--- a/CampusMatch.pptx
+++ b/CampusMatch.pptx
@@ -15,10 +15,11 @@
     <p:sldId id="263" r:id="rId9"/>
     <p:sldId id="264" r:id="rId10"/>
     <p:sldId id="269" r:id="rId11"/>
-    <p:sldId id="265" r:id="rId12"/>
-    <p:sldId id="266" r:id="rId13"/>
-    <p:sldId id="267" r:id="rId14"/>
-    <p:sldId id="268" r:id="rId15"/>
+    <p:sldId id="270" r:id="rId12"/>
+    <p:sldId id="265" r:id="rId13"/>
+    <p:sldId id="266" r:id="rId14"/>
+    <p:sldId id="267" r:id="rId15"/>
+    <p:sldId id="268" r:id="rId16"/>
   </p:sldIdLst>
   <p:sldSz cx="9144000" cy="6858000" type="screen4x3"/>
   <p:notesSz cx="6858000" cy="9144000"/>
@@ -3218,8 +3219,16 @@
               </a:defRPr>
             </a:pPr>
             <a:r>
-              <a:rPr dirty="0"/>
-              <a:t>1팀 (</a:t>
+              <a:rPr lang="vi-VN" dirty="0"/>
+              <a:t>30</a:t>
+            </a:r>
+            <a:r>
+              <a:rPr dirty="0" err="1"/>
+              <a:t>팀</a:t>
+            </a:r>
+            <a:r>
+              <a:rPr dirty="0"/>
+              <a:t> (</a:t>
             </a:r>
             <a:r>
               <a:rPr dirty="0" err="1"/>
@@ -3325,6 +3334,1663 @@
           <a:chExt cx="0" cy="0"/>
         </a:xfrm>
       </p:grpSpPr>
+      <p:sp>
+        <p:nvSpPr>
+          <p:cNvPr id="2" name="TextBox 1"/>
+          <p:cNvSpPr txBox="1"/>
+          <p:nvPr/>
+        </p:nvSpPr>
+        <p:spPr>
+          <a:xfrm>
+            <a:off x="640080" y="201168"/>
+            <a:ext cx="7863840" cy="640080"/>
+          </a:xfrm>
+          <a:prstGeom prst="rect">
+            <a:avLst/>
+          </a:prstGeom>
+          <a:noFill/>
+        </p:spPr>
+        <p:txBody>
+          <a:bodyPr wrap="square" lIns="0" tIns="0" rIns="0" bIns="0">
+            <a:spAutoFit/>
+          </a:bodyPr>
+          <a:lstStyle/>
+          <a:p>
+            <a:pPr>
+              <a:defRPr sz="2800" b="1">
+                <a:solidFill>
+                  <a:srgbClr val="1E293B"/>
+                </a:solidFill>
+                <a:latin typeface="Malgun Gothic"/>
+              </a:defRPr>
+            </a:pPr>
+            <a:r>
+              <a:rPr dirty="0"/>
+              <a:t>3. </a:t>
+            </a:r>
+            <a:r>
+              <a:rPr dirty="0" err="1"/>
+              <a:t>시스템</a:t>
+            </a:r>
+            <a:r>
+              <a:rPr dirty="0"/>
+              <a:t> </a:t>
+            </a:r>
+            <a:r>
+              <a:rPr dirty="0" err="1"/>
+              <a:t>설계</a:t>
+            </a:r>
+            <a:r>
+              <a:rPr dirty="0"/>
+              <a:t> - (4-1) </a:t>
+            </a:r>
+            <a:r>
+              <a:rPr dirty="0" err="1"/>
+              <a:t>그룹</a:t>
+            </a:r>
+            <a:r>
+              <a:rPr dirty="0"/>
+              <a:t> </a:t>
+            </a:r>
+            <a:r>
+              <a:rPr dirty="0" err="1"/>
+              <a:t>상세</a:t>
+            </a:r>
+            <a:r>
+              <a:rPr dirty="0"/>
+              <a:t> </a:t>
+            </a:r>
+            <a:r>
+              <a:rPr dirty="0" err="1"/>
+              <a:t>정보</a:t>
+            </a:r>
+            <a:r>
+              <a:rPr dirty="0"/>
+              <a:t> (Group Detail) [</a:t>
+            </a:r>
+            <a:r>
+              <a:rPr dirty="0" err="1"/>
+              <a:t>트란트룽하우</a:t>
+            </a:r>
+            <a:r>
+              <a:rPr dirty="0"/>
+              <a:t>]</a:t>
+            </a:r>
+          </a:p>
+        </p:txBody>
+      </p:sp>
+      <p:sp>
+        <p:nvSpPr>
+          <p:cNvPr id="3" name="Rectangle 2"/>
+          <p:cNvSpPr/>
+          <p:nvPr/>
+        </p:nvSpPr>
+        <p:spPr>
+          <a:xfrm>
+            <a:off x="457200" y="1062990"/>
+            <a:ext cx="8229600" cy="32004"/>
+          </a:xfrm>
+          <a:prstGeom prst="rect">
+            <a:avLst/>
+          </a:prstGeom>
+          <a:solidFill>
+            <a:srgbClr val="E46C0A"/>
+          </a:solidFill>
+          <a:ln>
+            <a:solidFill>
+              <a:srgbClr val="E46C0A"/>
+            </a:solidFill>
+          </a:ln>
+        </p:spPr>
+        <p:style>
+          <a:lnRef idx="1">
+            <a:schemeClr val="accent1"/>
+          </a:lnRef>
+          <a:fillRef idx="3">
+            <a:schemeClr val="accent1"/>
+          </a:fillRef>
+          <a:effectRef idx="2">
+            <a:schemeClr val="accent1"/>
+          </a:effectRef>
+          <a:fontRef idx="minor">
+            <a:schemeClr val="lt1"/>
+          </a:fontRef>
+        </p:style>
+        <p:txBody>
+          <a:bodyPr rtlCol="0" anchor="ctr"/>
+          <a:lstStyle/>
+          <a:p>
+            <a:pPr algn="ctr"/>
+            <a:endParaRPr/>
+          </a:p>
+        </p:txBody>
+      </p:sp>
+      <p:sp>
+        <p:nvSpPr>
+          <p:cNvPr id="4" name="TextBox 3"/>
+          <p:cNvSpPr txBox="1"/>
+          <p:nvPr/>
+        </p:nvSpPr>
+        <p:spPr>
+          <a:xfrm>
+            <a:off x="8412480" y="6492240"/>
+            <a:ext cx="548640" cy="274320"/>
+          </a:xfrm>
+          <a:prstGeom prst="rect">
+            <a:avLst/>
+          </a:prstGeom>
+          <a:noFill/>
+        </p:spPr>
+        <p:txBody>
+          <a:bodyPr wrap="none" lIns="0" tIns="0" rIns="0" bIns="0">
+            <a:spAutoFit/>
+          </a:bodyPr>
+          <a:lstStyle/>
+          <a:p>
+            <a:pPr algn="r">
+              <a:defRPr sz="1100">
+                <a:solidFill>
+                  <a:srgbClr val="64748B"/>
+                </a:solidFill>
+                <a:latin typeface="Malgun Gothic"/>
+              </a:defRPr>
+            </a:pPr>
+            <a:r>
+              <a:t>10</a:t>
+            </a:r>
+          </a:p>
+        </p:txBody>
+      </p:sp>
+      <p:sp>
+        <p:nvSpPr>
+          <p:cNvPr id="5" name="Rounded Rectangle 4"/>
+          <p:cNvSpPr/>
+          <p:nvPr/>
+        </p:nvSpPr>
+        <p:spPr>
+          <a:xfrm>
+            <a:off x="548640" y="1188720"/>
+            <a:ext cx="3931920" cy="5120640"/>
+          </a:xfrm>
+          <a:prstGeom prst="roundRect">
+            <a:avLst/>
+          </a:prstGeom>
+          <a:solidFill>
+            <a:srgbClr val="F5F7FA"/>
+          </a:solidFill>
+          <a:ln w="12700">
+            <a:solidFill>
+              <a:srgbClr val="E2E8F0"/>
+            </a:solidFill>
+          </a:ln>
+        </p:spPr>
+        <p:style>
+          <a:lnRef idx="1">
+            <a:schemeClr val="accent1"/>
+          </a:lnRef>
+          <a:fillRef idx="3">
+            <a:schemeClr val="accent1"/>
+          </a:fillRef>
+          <a:effectRef idx="2">
+            <a:schemeClr val="accent1"/>
+          </a:effectRef>
+          <a:fontRef idx="minor">
+            <a:schemeClr val="lt1"/>
+          </a:fontRef>
+        </p:style>
+        <p:txBody>
+          <a:bodyPr rtlCol="0" anchor="ctr"/>
+          <a:lstStyle/>
+          <a:p>
+            <a:pPr algn="ctr"/>
+            <a:endParaRPr/>
+          </a:p>
+        </p:txBody>
+      </p:sp>
+      <p:sp>
+        <p:nvSpPr>
+          <p:cNvPr id="6" name="TextBox 5"/>
+          <p:cNvSpPr txBox="1"/>
+          <p:nvPr/>
+        </p:nvSpPr>
+        <p:spPr>
+          <a:xfrm>
+            <a:off x="731520" y="1280160"/>
+            <a:ext cx="3566160" cy="365760"/>
+          </a:xfrm>
+          <a:prstGeom prst="rect">
+            <a:avLst/>
+          </a:prstGeom>
+          <a:noFill/>
+        </p:spPr>
+        <p:txBody>
+          <a:bodyPr wrap="square" lIns="0" tIns="0" rIns="0" bIns="0">
+            <a:spAutoFit/>
+          </a:bodyPr>
+          <a:lstStyle/>
+          <a:p>
+            <a:pPr>
+              <a:defRPr sz="1300" b="1">
+                <a:solidFill>
+                  <a:srgbClr val="004AC6"/>
+                </a:solidFill>
+                <a:latin typeface="Malgun Gothic"/>
+              </a:defRPr>
+            </a:pPr>
+            <a:r>
+              <a:t>📱 화면 레이아웃 (Group Detail)</a:t>
+            </a:r>
+          </a:p>
+        </p:txBody>
+      </p:sp>
+      <p:sp>
+        <p:nvSpPr>
+          <p:cNvPr id="8" name="Rounded Rectangle 7"/>
+          <p:cNvSpPr/>
+          <p:nvPr/>
+        </p:nvSpPr>
+        <p:spPr>
+          <a:xfrm>
+            <a:off x="685800" y="4160520"/>
+            <a:ext cx="3657600" cy="2011680"/>
+          </a:xfrm>
+          <a:prstGeom prst="roundRect">
+            <a:avLst/>
+          </a:prstGeom>
+          <a:solidFill>
+            <a:srgbClr val="FFFFFF"/>
+          </a:solidFill>
+          <a:ln w="12700">
+            <a:solidFill>
+              <a:srgbClr val="E2E8F0"/>
+            </a:solidFill>
+          </a:ln>
+        </p:spPr>
+        <p:style>
+          <a:lnRef idx="1">
+            <a:schemeClr val="accent1"/>
+          </a:lnRef>
+          <a:fillRef idx="3">
+            <a:schemeClr val="accent1"/>
+          </a:fillRef>
+          <a:effectRef idx="2">
+            <a:schemeClr val="accent1"/>
+          </a:effectRef>
+          <a:fontRef idx="minor">
+            <a:schemeClr val="lt1"/>
+          </a:fontRef>
+        </p:style>
+        <p:txBody>
+          <a:bodyPr rtlCol="0" anchor="ctr"/>
+          <a:lstStyle/>
+          <a:p>
+            <a:pPr algn="ctr"/>
+            <a:endParaRPr/>
+          </a:p>
+        </p:txBody>
+      </p:sp>
+      <p:sp>
+        <p:nvSpPr>
+          <p:cNvPr id="9" name="TextBox 8"/>
+          <p:cNvSpPr txBox="1"/>
+          <p:nvPr/>
+        </p:nvSpPr>
+        <p:spPr>
+          <a:xfrm>
+            <a:off x="777240" y="4251960"/>
+            <a:ext cx="3474720" cy="1828800"/>
+          </a:xfrm>
+          <a:prstGeom prst="rect">
+            <a:avLst/>
+          </a:prstGeom>
+          <a:noFill/>
+        </p:spPr>
+        <p:txBody>
+          <a:bodyPr wrap="square" lIns="0" tIns="0" rIns="0" bIns="0">
+            <a:spAutoFit/>
+          </a:bodyPr>
+          <a:lstStyle/>
+          <a:p>
+            <a:pPr>
+              <a:defRPr sz="1050" b="1">
+                <a:solidFill>
+                  <a:srgbClr val="004AC6"/>
+                </a:solidFill>
+                <a:latin typeface="Malgun Gothic"/>
+              </a:defRPr>
+            </a:pPr>
+            <a:r>
+              <a:rPr dirty="0"/>
+              <a:t>💡 </a:t>
+            </a:r>
+            <a:r>
+              <a:rPr dirty="0" err="1"/>
+              <a:t>화면</a:t>
+            </a:r>
+            <a:r>
+              <a:rPr dirty="0"/>
+              <a:t> </a:t>
+            </a:r>
+            <a:r>
+              <a:rPr dirty="0" err="1"/>
+              <a:t>핵심</a:t>
+            </a:r>
+            <a:r>
+              <a:rPr dirty="0"/>
+              <a:t> </a:t>
+            </a:r>
+            <a:r>
+              <a:rPr dirty="0" err="1"/>
+              <a:t>구성</a:t>
+            </a:r>
+            <a:r>
+              <a:rPr dirty="0"/>
+              <a:t> </a:t>
+            </a:r>
+            <a:r>
+              <a:rPr dirty="0" err="1"/>
+              <a:t>영역</a:t>
+            </a:r>
+            <a:r>
+              <a:rPr dirty="0"/>
+              <a:t> (Key Sections)</a:t>
+            </a:r>
+          </a:p>
+          <a:p>
+            <a:pPr>
+              <a:spcBef>
+                <a:spcPts val="300"/>
+              </a:spcBef>
+              <a:defRPr sz="950">
+                <a:solidFill>
+                  <a:srgbClr val="334155"/>
+                </a:solidFill>
+                <a:latin typeface="Malgun Gothic"/>
+              </a:defRPr>
+            </a:pPr>
+            <a:r>
+              <a:rPr dirty="0"/>
+              <a:t>• </a:t>
+            </a:r>
+            <a:r>
+              <a:rPr dirty="0" err="1"/>
+              <a:t>상단</a:t>
+            </a:r>
+            <a:r>
+              <a:rPr dirty="0"/>
+              <a:t> </a:t>
+            </a:r>
+            <a:r>
+              <a:rPr dirty="0" err="1"/>
+              <a:t>헤더</a:t>
+            </a:r>
+            <a:r>
+              <a:rPr dirty="0"/>
+              <a:t>: </a:t>
+            </a:r>
+            <a:r>
+              <a:rPr dirty="0" err="1"/>
+              <a:t>과목코드</a:t>
+            </a:r>
+            <a:r>
+              <a:rPr dirty="0"/>
+              <a:t>, </a:t>
+            </a:r>
+            <a:r>
+              <a:rPr dirty="0" err="1"/>
+              <a:t>모집상태</a:t>
+            </a:r>
+            <a:r>
+              <a:rPr dirty="0"/>
+              <a:t> </a:t>
+            </a:r>
+            <a:r>
+              <a:rPr dirty="0" err="1"/>
+              <a:t>뱃지</a:t>
+            </a:r>
+            <a:r>
+              <a:rPr dirty="0"/>
+              <a:t>, </a:t>
+            </a:r>
+            <a:r>
+              <a:rPr dirty="0" err="1"/>
+              <a:t>미팅방식</a:t>
+            </a:r>
+            <a:r>
+              <a:rPr dirty="0"/>
+              <a:t>, </a:t>
+            </a:r>
+            <a:r>
+              <a:rPr dirty="0" err="1"/>
+              <a:t>실시간</a:t>
+            </a:r>
+            <a:r>
+              <a:rPr dirty="0"/>
+              <a:t> </a:t>
+            </a:r>
+            <a:r>
+              <a:rPr dirty="0" err="1"/>
+              <a:t>다국어</a:t>
+            </a:r>
+            <a:r>
+              <a:rPr dirty="0"/>
+              <a:t> </a:t>
+            </a:r>
+            <a:r>
+              <a:rPr dirty="0" err="1"/>
+              <a:t>번역</a:t>
+            </a:r>
+            <a:endParaRPr dirty="0"/>
+          </a:p>
+          <a:p>
+            <a:pPr>
+              <a:spcBef>
+                <a:spcPts val="300"/>
+              </a:spcBef>
+              <a:defRPr sz="950">
+                <a:solidFill>
+                  <a:srgbClr val="334155"/>
+                </a:solidFill>
+                <a:latin typeface="Malgun Gothic"/>
+              </a:defRPr>
+            </a:pPr>
+            <a:r>
+              <a:rPr dirty="0"/>
+              <a:t>• </a:t>
+            </a:r>
+            <a:r>
+              <a:rPr dirty="0" err="1"/>
+              <a:t>프로젝트</a:t>
+            </a:r>
+            <a:r>
+              <a:rPr dirty="0"/>
+              <a:t> </a:t>
+            </a:r>
+            <a:r>
+              <a:rPr dirty="0" err="1"/>
+              <a:t>개요</a:t>
+            </a:r>
+            <a:r>
+              <a:rPr dirty="0"/>
+              <a:t>: </a:t>
+            </a:r>
+            <a:r>
+              <a:rPr dirty="0" err="1"/>
+              <a:t>상세</a:t>
+            </a:r>
+            <a:r>
+              <a:rPr dirty="0"/>
+              <a:t> </a:t>
+            </a:r>
+            <a:r>
+              <a:rPr dirty="0" err="1"/>
+              <a:t>소개</a:t>
+            </a:r>
+            <a:r>
+              <a:rPr dirty="0"/>
+              <a:t>, A+ </a:t>
+            </a:r>
+            <a:r>
+              <a:rPr dirty="0" err="1"/>
+              <a:t>지향</a:t>
+            </a:r>
+            <a:r>
+              <a:rPr dirty="0"/>
+              <a:t> </a:t>
+            </a:r>
+            <a:r>
+              <a:rPr dirty="0" err="1"/>
+              <a:t>목표</a:t>
+            </a:r>
+            <a:r>
+              <a:rPr dirty="0"/>
+              <a:t>, </a:t>
+            </a:r>
+            <a:r>
+              <a:rPr dirty="0" err="1"/>
+              <a:t>주간</a:t>
+            </a:r>
+            <a:r>
+              <a:rPr dirty="0"/>
+              <a:t> </a:t>
+            </a:r>
+            <a:r>
+              <a:rPr dirty="0" err="1"/>
+              <a:t>정기</a:t>
+            </a:r>
+            <a:r>
+              <a:rPr dirty="0"/>
+              <a:t> </a:t>
+            </a:r>
+            <a:r>
+              <a:rPr dirty="0" err="1"/>
+              <a:t>모임</a:t>
+            </a:r>
+            <a:r>
+              <a:rPr dirty="0"/>
+              <a:t> </a:t>
+            </a:r>
+            <a:r>
+              <a:rPr dirty="0" err="1"/>
+              <a:t>일정</a:t>
+            </a:r>
+            <a:endParaRPr dirty="0"/>
+          </a:p>
+          <a:p>
+            <a:pPr>
+              <a:spcBef>
+                <a:spcPts val="300"/>
+              </a:spcBef>
+              <a:defRPr sz="950">
+                <a:solidFill>
+                  <a:srgbClr val="334155"/>
+                </a:solidFill>
+                <a:latin typeface="Malgun Gothic"/>
+              </a:defRPr>
+            </a:pPr>
+            <a:r>
+              <a:rPr dirty="0"/>
+              <a:t>• </a:t>
+            </a:r>
+            <a:r>
+              <a:rPr dirty="0" err="1"/>
+              <a:t>포지션별</a:t>
+            </a:r>
+            <a:r>
+              <a:rPr dirty="0"/>
+              <a:t> </a:t>
+            </a:r>
+            <a:r>
+              <a:rPr dirty="0" err="1"/>
+              <a:t>쿼터</a:t>
+            </a:r>
+            <a:r>
+              <a:rPr dirty="0"/>
+              <a:t>: FE/BE </a:t>
+            </a:r>
+            <a:r>
+              <a:rPr dirty="0" err="1"/>
+              <a:t>등</a:t>
+            </a:r>
+            <a:r>
+              <a:rPr dirty="0"/>
+              <a:t> </a:t>
+            </a:r>
+            <a:r>
+              <a:rPr dirty="0" err="1"/>
+              <a:t>직군별</a:t>
+            </a:r>
+            <a:r>
+              <a:rPr dirty="0"/>
+              <a:t> </a:t>
+            </a:r>
+            <a:r>
+              <a:rPr dirty="0" err="1"/>
+              <a:t>정원</a:t>
+            </a:r>
+            <a:r>
+              <a:rPr dirty="0"/>
+              <a:t> </a:t>
+            </a:r>
+            <a:r>
+              <a:rPr dirty="0" err="1"/>
+              <a:t>시각화</a:t>
+            </a:r>
+            <a:r>
+              <a:rPr dirty="0"/>
+              <a:t> </a:t>
+            </a:r>
+            <a:r>
+              <a:rPr dirty="0" err="1"/>
+              <a:t>바</a:t>
+            </a:r>
+            <a:r>
+              <a:rPr dirty="0"/>
+              <a:t> &amp; Filled/Open </a:t>
+            </a:r>
+            <a:r>
+              <a:rPr dirty="0" err="1"/>
+              <a:t>뱃지</a:t>
+            </a:r>
+            <a:endParaRPr dirty="0"/>
+          </a:p>
+          <a:p>
+            <a:pPr>
+              <a:spcBef>
+                <a:spcPts val="300"/>
+              </a:spcBef>
+              <a:defRPr sz="950">
+                <a:solidFill>
+                  <a:srgbClr val="334155"/>
+                </a:solidFill>
+                <a:latin typeface="Malgun Gothic"/>
+              </a:defRPr>
+            </a:pPr>
+            <a:r>
+              <a:rPr dirty="0"/>
+              <a:t>• </a:t>
+            </a:r>
+            <a:r>
+              <a:rPr dirty="0" err="1"/>
+              <a:t>리더</a:t>
+            </a:r>
+            <a:r>
+              <a:rPr dirty="0"/>
+              <a:t> &amp; </a:t>
+            </a:r>
+            <a:r>
+              <a:rPr dirty="0" err="1"/>
+              <a:t>로스터</a:t>
+            </a:r>
+            <a:r>
+              <a:rPr dirty="0"/>
+              <a:t>: u-SAINT </a:t>
+            </a:r>
+            <a:r>
+              <a:rPr dirty="0" err="1"/>
+              <a:t>학적</a:t>
+            </a:r>
+            <a:r>
+              <a:rPr dirty="0"/>
+              <a:t> </a:t>
+            </a:r>
+            <a:r>
+              <a:rPr dirty="0" err="1"/>
+              <a:t>인증</a:t>
+            </a:r>
+            <a:r>
+              <a:rPr dirty="0"/>
+              <a:t> </a:t>
+            </a:r>
+            <a:r>
+              <a:rPr dirty="0" err="1"/>
+              <a:t>팀장</a:t>
+            </a:r>
+            <a:r>
+              <a:rPr dirty="0"/>
+              <a:t> </a:t>
+            </a:r>
+            <a:r>
+              <a:rPr dirty="0" err="1"/>
+              <a:t>프로필</a:t>
+            </a:r>
+            <a:r>
+              <a:rPr dirty="0"/>
+              <a:t> </a:t>
+            </a:r>
+            <a:r>
+              <a:rPr dirty="0" err="1"/>
+              <a:t>및</a:t>
+            </a:r>
+            <a:r>
+              <a:rPr dirty="0"/>
+              <a:t> </a:t>
+            </a:r>
+            <a:r>
+              <a:rPr dirty="0" err="1"/>
+              <a:t>참여</a:t>
+            </a:r>
+            <a:r>
+              <a:rPr dirty="0"/>
+              <a:t> </a:t>
+            </a:r>
+            <a:r>
+              <a:rPr dirty="0" err="1"/>
+              <a:t>팀원</a:t>
+            </a:r>
+            <a:r>
+              <a:rPr dirty="0"/>
+              <a:t> </a:t>
+            </a:r>
+            <a:r>
+              <a:rPr dirty="0" err="1"/>
+              <a:t>목록</a:t>
+            </a:r>
+            <a:endParaRPr dirty="0"/>
+          </a:p>
+          <a:p>
+            <a:pPr>
+              <a:spcBef>
+                <a:spcPts val="300"/>
+              </a:spcBef>
+              <a:defRPr sz="950">
+                <a:solidFill>
+                  <a:srgbClr val="334155"/>
+                </a:solidFill>
+                <a:latin typeface="Malgun Gothic"/>
+              </a:defRPr>
+            </a:pPr>
+            <a:r>
+              <a:rPr dirty="0"/>
+              <a:t>• </a:t>
+            </a:r>
+            <a:r>
+              <a:rPr dirty="0" err="1"/>
+              <a:t>실시간</a:t>
+            </a:r>
+            <a:r>
+              <a:rPr dirty="0"/>
+              <a:t> </a:t>
+            </a:r>
+            <a:r>
+              <a:rPr dirty="0" err="1"/>
+              <a:t>지원</a:t>
+            </a:r>
+            <a:r>
+              <a:rPr dirty="0"/>
+              <a:t> CTA: </a:t>
+            </a:r>
+            <a:r>
+              <a:rPr dirty="0" err="1"/>
+              <a:t>모집</a:t>
+            </a:r>
+            <a:r>
+              <a:rPr dirty="0"/>
+              <a:t> </a:t>
+            </a:r>
+            <a:r>
+              <a:rPr dirty="0" err="1"/>
+              <a:t>충족률</a:t>
+            </a:r>
+            <a:r>
+              <a:rPr dirty="0"/>
+              <a:t>(%) </a:t>
+            </a:r>
+            <a:r>
+              <a:rPr dirty="0" err="1"/>
+              <a:t>및</a:t>
+            </a:r>
+            <a:r>
+              <a:rPr dirty="0"/>
+              <a:t> </a:t>
+            </a:r>
+            <a:r>
+              <a:rPr dirty="0" err="1"/>
+              <a:t>즉시</a:t>
+            </a:r>
+            <a:r>
+              <a:rPr dirty="0"/>
+              <a:t> </a:t>
+            </a:r>
+            <a:r>
+              <a:rPr dirty="0" err="1"/>
+              <a:t>지원</a:t>
+            </a:r>
+            <a:r>
+              <a:rPr dirty="0"/>
+              <a:t> (Apply to Join)</a:t>
+            </a:r>
+          </a:p>
+        </p:txBody>
+      </p:sp>
+      <p:sp>
+        <p:nvSpPr>
+          <p:cNvPr id="10" name="Rounded Rectangle 9"/>
+          <p:cNvSpPr/>
+          <p:nvPr/>
+        </p:nvSpPr>
+        <p:spPr>
+          <a:xfrm>
+            <a:off x="4709160" y="1188720"/>
+            <a:ext cx="3886200" cy="5120640"/>
+          </a:xfrm>
+          <a:prstGeom prst="roundRect">
+            <a:avLst/>
+          </a:prstGeom>
+          <a:solidFill>
+            <a:srgbClr val="F8FAFC"/>
+          </a:solidFill>
+          <a:ln w="12700">
+            <a:solidFill>
+              <a:srgbClr val="E2E8F0"/>
+            </a:solidFill>
+          </a:ln>
+        </p:spPr>
+        <p:style>
+          <a:lnRef idx="1">
+            <a:schemeClr val="accent1"/>
+          </a:lnRef>
+          <a:fillRef idx="3">
+            <a:schemeClr val="accent1"/>
+          </a:fillRef>
+          <a:effectRef idx="2">
+            <a:schemeClr val="accent1"/>
+          </a:effectRef>
+          <a:fontRef idx="minor">
+            <a:schemeClr val="lt1"/>
+          </a:fontRef>
+        </p:style>
+        <p:txBody>
+          <a:bodyPr rtlCol="0" anchor="ctr"/>
+          <a:lstStyle/>
+          <a:p>
+            <a:pPr algn="ctr"/>
+            <a:endParaRPr/>
+          </a:p>
+        </p:txBody>
+      </p:sp>
+      <p:sp>
+        <p:nvSpPr>
+          <p:cNvPr id="11" name="TextBox 10"/>
+          <p:cNvSpPr txBox="1"/>
+          <p:nvPr/>
+        </p:nvSpPr>
+        <p:spPr>
+          <a:xfrm>
+            <a:off x="4892040" y="1325880"/>
+            <a:ext cx="3520440" cy="3559949"/>
+          </a:xfrm>
+          <a:prstGeom prst="rect">
+            <a:avLst/>
+          </a:prstGeom>
+          <a:noFill/>
+        </p:spPr>
+        <p:txBody>
+          <a:bodyPr wrap="square" lIns="0" tIns="0" rIns="0" bIns="0">
+            <a:spAutoFit/>
+          </a:bodyPr>
+          <a:lstStyle/>
+          <a:p>
+            <a:pPr>
+              <a:defRPr sz="1500" b="1">
+                <a:solidFill>
+                  <a:srgbClr val="1E293B"/>
+                </a:solidFill>
+                <a:latin typeface="Malgun Gothic"/>
+              </a:defRPr>
+            </a:pPr>
+            <a:r>
+              <a:rPr dirty="0"/>
+              <a:t>📋 </a:t>
+            </a:r>
+            <a:r>
+              <a:rPr dirty="0" err="1"/>
+              <a:t>담당</a:t>
+            </a:r>
+            <a:r>
+              <a:rPr dirty="0"/>
+              <a:t> </a:t>
+            </a:r>
+            <a:r>
+              <a:rPr dirty="0" err="1"/>
+              <a:t>역할</a:t>
+            </a:r>
+            <a:r>
+              <a:rPr dirty="0"/>
+              <a:t> &amp; </a:t>
+            </a:r>
+            <a:r>
+              <a:rPr dirty="0" err="1"/>
+              <a:t>핵심</a:t>
+            </a:r>
+            <a:r>
+              <a:rPr dirty="0"/>
+              <a:t> </a:t>
+            </a:r>
+            <a:r>
+              <a:rPr dirty="0" err="1"/>
+              <a:t>구현</a:t>
+            </a:r>
+            <a:r>
+              <a:rPr dirty="0"/>
+              <a:t> </a:t>
+            </a:r>
+            <a:r>
+              <a:rPr dirty="0" err="1"/>
+              <a:t>기능</a:t>
+            </a:r>
+            <a:endParaRPr dirty="0"/>
+          </a:p>
+          <a:p>
+            <a:pPr>
+              <a:spcBef>
+                <a:spcPts val="700"/>
+              </a:spcBef>
+              <a:defRPr sz="1200" b="1">
+                <a:solidFill>
+                  <a:srgbClr val="004AC6"/>
+                </a:solidFill>
+                <a:latin typeface="Malgun Gothic"/>
+              </a:defRPr>
+            </a:pPr>
+            <a:r>
+              <a:rPr dirty="0"/>
+              <a:t>• </a:t>
+            </a:r>
+            <a:r>
+              <a:rPr dirty="0" err="1"/>
+              <a:t>담당</a:t>
+            </a:r>
+            <a:r>
+              <a:rPr dirty="0"/>
+              <a:t> </a:t>
+            </a:r>
+            <a:r>
+              <a:rPr dirty="0" err="1"/>
+              <a:t>팀원</a:t>
+            </a:r>
+            <a:endParaRPr dirty="0"/>
+          </a:p>
+          <a:p>
+            <a:pPr>
+              <a:spcBef>
+                <a:spcPts val="200"/>
+              </a:spcBef>
+              <a:defRPr sz="1050">
+                <a:solidFill>
+                  <a:srgbClr val="334155"/>
+                </a:solidFill>
+                <a:latin typeface="Malgun Gothic"/>
+              </a:defRPr>
+            </a:pPr>
+            <a:r>
+              <a:rPr dirty="0"/>
+              <a:t>  </a:t>
+            </a:r>
+            <a:r>
+              <a:rPr dirty="0" err="1"/>
+              <a:t>트란트룽하우</a:t>
+            </a:r>
+            <a:endParaRPr dirty="0"/>
+          </a:p>
+          <a:p>
+            <a:pPr>
+              <a:spcBef>
+                <a:spcPts val="700"/>
+              </a:spcBef>
+              <a:defRPr sz="1200" b="1">
+                <a:solidFill>
+                  <a:srgbClr val="1E293B"/>
+                </a:solidFill>
+                <a:latin typeface="Malgun Gothic"/>
+              </a:defRPr>
+            </a:pPr>
+            <a:r>
+              <a:rPr dirty="0"/>
+              <a:t>• </a:t>
+            </a:r>
+            <a:r>
+              <a:rPr dirty="0" err="1"/>
+              <a:t>개발</a:t>
+            </a:r>
+            <a:r>
+              <a:rPr dirty="0"/>
+              <a:t> </a:t>
+            </a:r>
+            <a:r>
+              <a:rPr dirty="0" err="1"/>
+              <a:t>화면</a:t>
+            </a:r>
+            <a:endParaRPr dirty="0"/>
+          </a:p>
+          <a:p>
+            <a:pPr>
+              <a:spcBef>
+                <a:spcPts val="200"/>
+              </a:spcBef>
+              <a:defRPr sz="1050">
+                <a:solidFill>
+                  <a:srgbClr val="334155"/>
+                </a:solidFill>
+                <a:latin typeface="Malgun Gothic"/>
+              </a:defRPr>
+            </a:pPr>
+            <a:r>
+              <a:rPr dirty="0"/>
+              <a:t>  Group Detail (</a:t>
+            </a:r>
+            <a:r>
+              <a:rPr dirty="0" err="1"/>
+              <a:t>스터디</a:t>
+            </a:r>
+            <a:r>
+              <a:rPr dirty="0"/>
+              <a:t>/</a:t>
+            </a:r>
+            <a:r>
+              <a:rPr dirty="0" err="1"/>
+              <a:t>프로젝트</a:t>
+            </a:r>
+            <a:r>
+              <a:rPr dirty="0"/>
+              <a:t> </a:t>
+            </a:r>
+            <a:r>
+              <a:rPr dirty="0" err="1"/>
+              <a:t>상세</a:t>
+            </a:r>
+            <a:r>
+              <a:rPr dirty="0"/>
+              <a:t> </a:t>
+            </a:r>
+            <a:r>
+              <a:rPr dirty="0" err="1"/>
+              <a:t>정보</a:t>
+            </a:r>
+            <a:r>
+              <a:rPr dirty="0"/>
+              <a:t> </a:t>
+            </a:r>
+            <a:r>
+              <a:rPr dirty="0" err="1"/>
+              <a:t>페이지</a:t>
+            </a:r>
+            <a:r>
+              <a:rPr dirty="0"/>
+              <a:t>)</a:t>
+            </a:r>
+          </a:p>
+          <a:p>
+            <a:pPr>
+              <a:spcBef>
+                <a:spcPts val="700"/>
+              </a:spcBef>
+              <a:defRPr sz="1200" b="1">
+                <a:solidFill>
+                  <a:srgbClr val="1E293B"/>
+                </a:solidFill>
+                <a:latin typeface="Malgun Gothic"/>
+              </a:defRPr>
+            </a:pPr>
+            <a:r>
+              <a:rPr dirty="0"/>
+              <a:t>• </a:t>
+            </a:r>
+            <a:r>
+              <a:rPr dirty="0" err="1"/>
+              <a:t>프로젝트</a:t>
+            </a:r>
+            <a:r>
+              <a:rPr dirty="0"/>
+              <a:t> </a:t>
+            </a:r>
+            <a:r>
+              <a:rPr dirty="0" err="1"/>
+              <a:t>개요</a:t>
+            </a:r>
+            <a:r>
+              <a:rPr dirty="0"/>
+              <a:t> &amp; </a:t>
+            </a:r>
+            <a:r>
+              <a:rPr dirty="0" err="1"/>
+              <a:t>정기</a:t>
+            </a:r>
+            <a:r>
+              <a:rPr dirty="0"/>
+              <a:t> </a:t>
+            </a:r>
+            <a:r>
+              <a:rPr dirty="0" err="1"/>
+              <a:t>일정</a:t>
+            </a:r>
+            <a:endParaRPr dirty="0"/>
+          </a:p>
+          <a:p>
+            <a:pPr>
+              <a:spcBef>
+                <a:spcPts val="200"/>
+              </a:spcBef>
+              <a:defRPr sz="1050">
+                <a:solidFill>
+                  <a:srgbClr val="334155"/>
+                </a:solidFill>
+                <a:latin typeface="Malgun Gothic"/>
+              </a:defRPr>
+            </a:pPr>
+            <a:r>
+              <a:rPr dirty="0"/>
+              <a:t>  </a:t>
+            </a:r>
+            <a:r>
+              <a:rPr dirty="0" err="1"/>
+              <a:t>과제</a:t>
+            </a:r>
+            <a:r>
+              <a:rPr dirty="0"/>
+              <a:t> </a:t>
+            </a:r>
+            <a:r>
+              <a:rPr dirty="0" err="1"/>
+              <a:t>목표</a:t>
+            </a:r>
+            <a:r>
+              <a:rPr dirty="0"/>
+              <a:t>(A+ </a:t>
+            </a:r>
+            <a:r>
+              <a:rPr dirty="0" err="1"/>
+              <a:t>학점</a:t>
+            </a:r>
+            <a:r>
+              <a:rPr dirty="0"/>
+              <a:t> </a:t>
+            </a:r>
+            <a:r>
+              <a:rPr dirty="0" err="1"/>
+              <a:t>지향</a:t>
+            </a:r>
+            <a:r>
+              <a:rPr dirty="0"/>
+              <a:t>), </a:t>
+            </a:r>
+            <a:r>
+              <a:rPr dirty="0" err="1"/>
+              <a:t>주간</a:t>
+            </a:r>
+            <a:r>
+              <a:rPr dirty="0"/>
+              <a:t> </a:t>
+            </a:r>
+            <a:r>
+              <a:rPr dirty="0" err="1"/>
+              <a:t>정기</a:t>
+            </a:r>
+            <a:r>
+              <a:rPr dirty="0"/>
+              <a:t> </a:t>
+            </a:r>
+            <a:r>
+              <a:rPr dirty="0" err="1"/>
+              <a:t>모임</a:t>
+            </a:r>
+            <a:r>
+              <a:rPr dirty="0"/>
+              <a:t>(Hybrid Zoom/</a:t>
+            </a:r>
+            <a:r>
+              <a:rPr dirty="0" err="1"/>
+              <a:t>오프라인</a:t>
+            </a:r>
+            <a:r>
+              <a:rPr dirty="0"/>
+              <a:t>) </a:t>
+            </a:r>
+            <a:r>
+              <a:rPr dirty="0" err="1"/>
+              <a:t>일정을</a:t>
+            </a:r>
+            <a:r>
+              <a:rPr dirty="0"/>
+              <a:t> </a:t>
+            </a:r>
+            <a:r>
+              <a:rPr dirty="0" err="1"/>
+              <a:t>상세</a:t>
+            </a:r>
+            <a:r>
+              <a:rPr dirty="0"/>
+              <a:t> </a:t>
+            </a:r>
+            <a:r>
+              <a:rPr dirty="0" err="1"/>
+              <a:t>명시하여</a:t>
+            </a:r>
+            <a:r>
+              <a:rPr dirty="0"/>
+              <a:t> </a:t>
+            </a:r>
+            <a:r>
+              <a:rPr dirty="0" err="1"/>
+              <a:t>적합한</a:t>
+            </a:r>
+            <a:r>
+              <a:rPr dirty="0"/>
+              <a:t> </a:t>
+            </a:r>
+            <a:r>
+              <a:rPr dirty="0" err="1"/>
+              <a:t>팀원</a:t>
+            </a:r>
+            <a:r>
+              <a:rPr dirty="0"/>
+              <a:t> </a:t>
+            </a:r>
+            <a:r>
+              <a:rPr dirty="0" err="1"/>
+              <a:t>매칭</a:t>
+            </a:r>
+            <a:r>
+              <a:rPr dirty="0"/>
+              <a:t> </a:t>
+            </a:r>
+            <a:r>
+              <a:rPr dirty="0" err="1"/>
+              <a:t>유도</a:t>
+            </a:r>
+            <a:endParaRPr dirty="0"/>
+          </a:p>
+          <a:p>
+            <a:pPr>
+              <a:spcBef>
+                <a:spcPts val="700"/>
+              </a:spcBef>
+              <a:defRPr sz="1200" b="1">
+                <a:solidFill>
+                  <a:srgbClr val="1E293B"/>
+                </a:solidFill>
+                <a:latin typeface="Malgun Gothic"/>
+              </a:defRPr>
+            </a:pPr>
+            <a:r>
+              <a:rPr dirty="0"/>
+              <a:t>• </a:t>
+            </a:r>
+            <a:r>
+              <a:rPr dirty="0" err="1"/>
+              <a:t>포지션별</a:t>
+            </a:r>
+            <a:r>
+              <a:rPr dirty="0"/>
+              <a:t> </a:t>
+            </a:r>
+            <a:r>
+              <a:rPr dirty="0" err="1"/>
+              <a:t>쿼터</a:t>
+            </a:r>
+            <a:r>
+              <a:rPr dirty="0"/>
+              <a:t>(Role Quota) </a:t>
+            </a:r>
+            <a:r>
+              <a:rPr dirty="0" err="1"/>
+              <a:t>시각화</a:t>
+            </a:r>
+            <a:endParaRPr dirty="0"/>
+          </a:p>
+          <a:p>
+            <a:pPr>
+              <a:spcBef>
+                <a:spcPts val="200"/>
+              </a:spcBef>
+              <a:defRPr sz="1050">
+                <a:solidFill>
+                  <a:srgbClr val="334155"/>
+                </a:solidFill>
+                <a:latin typeface="Malgun Gothic"/>
+              </a:defRPr>
+            </a:pPr>
+            <a:r>
+              <a:rPr dirty="0"/>
+              <a:t>  </a:t>
+            </a:r>
+            <a:r>
+              <a:rPr lang="en-KR" sz="1050" dirty="0">
+                <a:solidFill>
+                  <a:srgbClr val="334155"/>
+                </a:solidFill>
+                <a:latin typeface="Malgun Gothic"/>
+              </a:rPr>
+              <a:t>Frontend Developer, Backend Developer, Fullstack / DevOps </a:t>
+            </a:r>
+            <a:r>
+              <a:rPr lang="ko-KR" altLang="en-US" sz="1050" dirty="0">
+                <a:solidFill>
+                  <a:srgbClr val="334155"/>
+                </a:solidFill>
+                <a:latin typeface="Malgun Gothic"/>
+              </a:rPr>
+              <a:t>선택</a:t>
+            </a:r>
+            <a:endParaRPr lang="en-KR" sz="1050" dirty="0">
+              <a:solidFill>
+                <a:srgbClr val="334155"/>
+              </a:solidFill>
+              <a:latin typeface="Malgun Gothic"/>
+            </a:endParaRPr>
+          </a:p>
+          <a:p>
+            <a:pPr>
+              <a:spcBef>
+                <a:spcPts val="200"/>
+              </a:spcBef>
+              <a:defRPr sz="1050">
+                <a:solidFill>
+                  <a:srgbClr val="334155"/>
+                </a:solidFill>
+                <a:latin typeface="Malgun Gothic"/>
+              </a:defRPr>
+            </a:pPr>
+            <a:r>
+              <a:rPr dirty="0"/>
+              <a:t>• </a:t>
+            </a:r>
+            <a:r>
+              <a:rPr dirty="0" err="1"/>
+              <a:t>팀장</a:t>
+            </a:r>
+            <a:r>
+              <a:rPr dirty="0"/>
+              <a:t> </a:t>
+            </a:r>
+            <a:r>
+              <a:rPr dirty="0" err="1"/>
+              <a:t>프로필</a:t>
+            </a:r>
+            <a:r>
+              <a:rPr dirty="0"/>
+              <a:t> &amp; </a:t>
+            </a:r>
+            <a:r>
+              <a:rPr dirty="0" err="1"/>
+              <a:t>멤버</a:t>
+            </a:r>
+            <a:r>
+              <a:rPr dirty="0"/>
+              <a:t> </a:t>
+            </a:r>
+            <a:r>
+              <a:rPr dirty="0" err="1"/>
+              <a:t>로스터</a:t>
+            </a:r>
+            <a:endParaRPr dirty="0"/>
+          </a:p>
+          <a:p>
+            <a:pPr>
+              <a:spcBef>
+                <a:spcPts val="200"/>
+              </a:spcBef>
+              <a:defRPr sz="1050">
+                <a:solidFill>
+                  <a:srgbClr val="334155"/>
+                </a:solidFill>
+                <a:latin typeface="Malgun Gothic"/>
+              </a:defRPr>
+            </a:pPr>
+            <a:r>
+              <a:rPr dirty="0"/>
+              <a:t>  u-SAINT </a:t>
+            </a:r>
+            <a:r>
+              <a:rPr dirty="0" err="1"/>
+              <a:t>학적</a:t>
+            </a:r>
+            <a:r>
+              <a:rPr dirty="0"/>
+              <a:t> </a:t>
+            </a:r>
+            <a:r>
+              <a:rPr dirty="0" err="1"/>
+              <a:t>기반</a:t>
+            </a:r>
+            <a:r>
+              <a:rPr dirty="0"/>
+              <a:t> </a:t>
+            </a:r>
+            <a:r>
+              <a:rPr dirty="0" err="1"/>
+              <a:t>개설자</a:t>
+            </a:r>
+            <a:r>
+              <a:rPr dirty="0"/>
+              <a:t> </a:t>
+            </a:r>
+            <a:r>
+              <a:rPr dirty="0" err="1"/>
+              <a:t>신원</a:t>
+            </a:r>
+            <a:r>
+              <a:rPr dirty="0"/>
+              <a:t>(</a:t>
+            </a:r>
+            <a:r>
+              <a:rPr dirty="0" err="1"/>
+              <a:t>전공</a:t>
+            </a:r>
+            <a:r>
+              <a:rPr dirty="0"/>
+              <a:t>/</a:t>
+            </a:r>
+            <a:r>
+              <a:rPr dirty="0" err="1"/>
+              <a:t>학번</a:t>
+            </a:r>
+            <a:r>
+              <a:rPr dirty="0"/>
+              <a:t>/</a:t>
+            </a:r>
+            <a:r>
+              <a:rPr dirty="0" err="1"/>
+              <a:t>이메일</a:t>
+            </a:r>
+            <a:r>
+              <a:rPr dirty="0"/>
+              <a:t>)</a:t>
+            </a:r>
+            <a:r>
+              <a:rPr dirty="0" err="1"/>
+              <a:t>과</a:t>
+            </a:r>
+            <a:r>
+              <a:rPr dirty="0"/>
+              <a:t> </a:t>
+            </a:r>
+            <a:r>
+              <a:rPr dirty="0" err="1"/>
+              <a:t>현재</a:t>
+            </a:r>
+            <a:r>
+              <a:rPr dirty="0"/>
+              <a:t> </a:t>
+            </a:r>
+            <a:r>
+              <a:rPr dirty="0" err="1"/>
+              <a:t>팀</a:t>
+            </a:r>
+            <a:r>
+              <a:rPr dirty="0"/>
+              <a:t> </a:t>
+            </a:r>
+            <a:r>
+              <a:rPr dirty="0" err="1"/>
+              <a:t>합류</a:t>
+            </a:r>
+            <a:r>
+              <a:rPr dirty="0"/>
+              <a:t> </a:t>
+            </a:r>
+            <a:r>
+              <a:rPr dirty="0" err="1"/>
+              <a:t>멤버</a:t>
+            </a:r>
+            <a:r>
+              <a:rPr dirty="0"/>
+              <a:t> </a:t>
+            </a:r>
+            <a:r>
+              <a:rPr dirty="0" err="1"/>
+              <a:t>목록을</a:t>
+            </a:r>
+            <a:r>
+              <a:rPr dirty="0"/>
+              <a:t> </a:t>
+            </a:r>
+            <a:r>
+              <a:rPr dirty="0" err="1"/>
+              <a:t>투명하게</a:t>
+            </a:r>
+            <a:r>
+              <a:rPr dirty="0"/>
+              <a:t> </a:t>
+            </a:r>
+            <a:r>
+              <a:rPr dirty="0" err="1"/>
+              <a:t>공개</a:t>
+            </a:r>
+            <a:endParaRPr dirty="0"/>
+          </a:p>
+          <a:p>
+            <a:pPr>
+              <a:spcBef>
+                <a:spcPts val="700"/>
+              </a:spcBef>
+              <a:defRPr sz="1200" b="1">
+                <a:solidFill>
+                  <a:srgbClr val="1E293B"/>
+                </a:solidFill>
+                <a:latin typeface="Malgun Gothic"/>
+              </a:defRPr>
+            </a:pPr>
+            <a:r>
+              <a:rPr dirty="0"/>
+              <a:t>• </a:t>
+            </a:r>
+            <a:r>
+              <a:rPr dirty="0" err="1"/>
+              <a:t>원클릭</a:t>
+            </a:r>
+            <a:r>
+              <a:rPr dirty="0"/>
+              <a:t> </a:t>
+            </a:r>
+            <a:r>
+              <a:rPr dirty="0" err="1"/>
+              <a:t>지원</a:t>
+            </a:r>
+            <a:r>
+              <a:rPr dirty="0"/>
+              <a:t> CTA &amp; </a:t>
+            </a:r>
+            <a:r>
+              <a:rPr dirty="0" err="1"/>
+              <a:t>반응형</a:t>
+            </a:r>
+            <a:r>
+              <a:rPr dirty="0"/>
+              <a:t> </a:t>
+            </a:r>
+            <a:r>
+              <a:rPr dirty="0" err="1"/>
+              <a:t>최적화</a:t>
+            </a:r>
+            <a:endParaRPr dirty="0"/>
+          </a:p>
+          <a:p>
+            <a:pPr>
+              <a:spcBef>
+                <a:spcPts val="200"/>
+              </a:spcBef>
+              <a:defRPr sz="1050">
+                <a:solidFill>
+                  <a:srgbClr val="334155"/>
+                </a:solidFill>
+                <a:latin typeface="Malgun Gothic"/>
+              </a:defRPr>
+            </a:pPr>
+            <a:r>
+              <a:rPr dirty="0"/>
+              <a:t>  </a:t>
+            </a:r>
+            <a:r>
+              <a:rPr dirty="0" err="1"/>
+              <a:t>모집</a:t>
+            </a:r>
+            <a:r>
+              <a:rPr dirty="0"/>
+              <a:t> </a:t>
+            </a:r>
+            <a:r>
+              <a:rPr dirty="0" err="1"/>
+              <a:t>충족률</a:t>
+            </a:r>
+            <a:r>
+              <a:rPr dirty="0"/>
+              <a:t>(%) </a:t>
+            </a:r>
+            <a:r>
+              <a:rPr dirty="0" err="1"/>
+              <a:t>게이지</a:t>
+            </a:r>
+            <a:r>
+              <a:rPr dirty="0"/>
+              <a:t>, [Apply to Join Group] </a:t>
+            </a:r>
+            <a:r>
+              <a:rPr dirty="0" err="1"/>
+              <a:t>버튼</a:t>
+            </a:r>
+            <a:r>
+              <a:rPr dirty="0"/>
+              <a:t>, </a:t>
+            </a:r>
+            <a:r>
+              <a:rPr dirty="0" err="1"/>
+              <a:t>모바일</a:t>
+            </a:r>
+            <a:r>
+              <a:rPr dirty="0"/>
+              <a:t> Sticky Bar </a:t>
+            </a:r>
+            <a:r>
+              <a:rPr dirty="0" err="1"/>
+              <a:t>및</a:t>
+            </a:r>
+            <a:r>
+              <a:rPr dirty="0"/>
+              <a:t> </a:t>
+            </a:r>
+            <a:r>
+              <a:rPr dirty="0" err="1"/>
+              <a:t>다국어</a:t>
+            </a:r>
+            <a:r>
+              <a:rPr dirty="0"/>
+              <a:t> </a:t>
+            </a:r>
+            <a:r>
+              <a:rPr dirty="0" err="1"/>
+              <a:t>실시간</a:t>
+            </a:r>
+            <a:r>
+              <a:rPr dirty="0"/>
+              <a:t> </a:t>
+            </a:r>
+            <a:r>
+              <a:rPr dirty="0" err="1"/>
+              <a:t>번역</a:t>
+            </a:r>
+            <a:r>
+              <a:rPr dirty="0"/>
+              <a:t> </a:t>
+            </a:r>
+            <a:r>
+              <a:rPr dirty="0" err="1"/>
+              <a:t>지원</a:t>
+            </a:r>
+            <a:endParaRPr dirty="0"/>
+          </a:p>
+        </p:txBody>
+      </p:sp>
+      <p:pic>
+        <p:nvPicPr>
+          <p:cNvPr id="15" name="Picture 14">
+            <a:extLst>
+              <a:ext uri="{FF2B5EF4-FFF2-40B4-BE49-F238E27FC236}">
+                <a16:creationId xmlns:a16="http://schemas.microsoft.com/office/drawing/2014/main" id="{0C3405DB-CD48-FCB5-3A10-510FA0D9AE9D}"/>
+              </a:ext>
+            </a:extLst>
+          </p:cNvPr>
+          <p:cNvPicPr>
+            <a:picLocks noChangeAspect="1"/>
+          </p:cNvPicPr>
+          <p:nvPr/>
+        </p:nvPicPr>
+        <p:blipFill>
+          <a:blip r:embed="rId2"/>
+          <a:stretch>
+            <a:fillRect/>
+          </a:stretch>
+        </p:blipFill>
+        <p:spPr>
+          <a:xfrm>
+            <a:off x="603411" y="1584670"/>
+            <a:ext cx="3877149" cy="2377730"/>
+          </a:xfrm>
+          <a:prstGeom prst="rect">
+            <a:avLst/>
+          </a:prstGeom>
+        </p:spPr>
+      </p:pic>
     </p:spTree>
     <p:extLst>
       <p:ext uri="{BB962C8B-B14F-4D97-AF65-F5344CB8AC3E}">
@@ -3386,7 +5052,7 @@
               </a:defRPr>
             </a:pPr>
             <a:r>
-              <a:t>3. 시스템 설계 - (5) 신규 그룹 개설 [황뚱백]</a:t>
+              <a:t>3. 시스템 설계 - (4-2) 지원서 작성 모달 (Application Modal) [트란트룽하우]</a:t>
             </a:r>
           </a:p>
         </p:txBody>
@@ -3399,7 +5065,7 @@
         </p:nvSpPr>
         <p:spPr>
           <a:xfrm>
-            <a:off x="457200" y="896112"/>
+            <a:off x="457200" y="1081278"/>
             <a:ext cx="8229600" cy="32004"/>
           </a:xfrm>
           <a:prstGeom prst="rect">
@@ -3468,7 +5134,7 @@
               </a:defRPr>
             </a:pPr>
             <a:r>
-              <a:t>10</a:t>
+              <a:t>11</a:t>
             </a:r>
           </a:p>
         </p:txBody>
@@ -3536,7 +5202,7 @@
           <a:noFill/>
         </p:spPr>
         <p:txBody>
-          <a:bodyPr wrap="none">
+          <a:bodyPr wrap="square" lIns="0" tIns="0" rIns="0" bIns="0">
             <a:spAutoFit/>
           </a:bodyPr>
           <a:lstStyle/>
@@ -3550,275 +5216,14 @@
               </a:defRPr>
             </a:pPr>
             <a:r>
-              <a:t>📱 화면 레이아웃 (Figma)</a:t>
-            </a:r>
-          </a:p>
-        </p:txBody>
-      </p:sp>
-      <p:sp>
-        <p:nvSpPr>
-          <p:cNvPr id="7" name="Rounded Rectangle 6"/>
-          <p:cNvSpPr/>
-          <p:nvPr/>
-        </p:nvSpPr>
-        <p:spPr>
-          <a:xfrm>
-            <a:off x="822960" y="1737360"/>
-            <a:ext cx="3383280" cy="4297680"/>
-          </a:xfrm>
-          <a:prstGeom prst="roundRect">
-            <a:avLst/>
-          </a:prstGeom>
-          <a:solidFill>
-            <a:srgbClr val="FFFFFF"/>
-          </a:solidFill>
-          <a:ln w="12700">
-            <a:solidFill>
-              <a:srgbClr val="E2E8F0"/>
-            </a:solidFill>
-          </a:ln>
-        </p:spPr>
-        <p:style>
-          <a:lnRef idx="1">
-            <a:schemeClr val="accent1"/>
-          </a:lnRef>
-          <a:fillRef idx="3">
-            <a:schemeClr val="accent1"/>
-          </a:fillRef>
-          <a:effectRef idx="2">
-            <a:schemeClr val="accent1"/>
-          </a:effectRef>
-          <a:fontRef idx="minor">
-            <a:schemeClr val="lt1"/>
-          </a:fontRef>
-        </p:style>
-        <p:txBody>
-          <a:bodyPr rtlCol="0" anchor="ctr"/>
-          <a:lstStyle/>
-          <a:p>
-            <a:pPr algn="ctr"/>
-            <a:endParaRPr/>
-          </a:p>
-        </p:txBody>
-      </p:sp>
-      <p:sp>
-        <p:nvSpPr>
-          <p:cNvPr id="8" name="TextBox 7"/>
-          <p:cNvSpPr txBox="1"/>
-          <p:nvPr/>
-        </p:nvSpPr>
-        <p:spPr>
-          <a:xfrm>
-            <a:off x="960120" y="1920240"/>
-            <a:ext cx="3108960" cy="3931920"/>
-          </a:xfrm>
-          <a:prstGeom prst="rect">
-            <a:avLst/>
-          </a:prstGeom>
-          <a:noFill/>
-        </p:spPr>
-        <p:txBody>
-          <a:bodyPr wrap="square">
-            <a:spAutoFit/>
-          </a:bodyPr>
-          <a:lstStyle/>
-          <a:p>
-            <a:pPr>
-              <a:spcBef>
-                <a:spcPts val="300"/>
-              </a:spcBef>
-              <a:defRPr sz="1050">
-                <a:solidFill>
-                  <a:srgbClr val="E46C0A"/>
-                </a:solidFill>
-                <a:latin typeface="Malgun Gothic"/>
-              </a:defRPr>
-            </a:pPr>
-            <a:r>
-              <a:t>✍️ 신규 스터디 / 프로젝트 모집 등록</a:t>
-            </a:r>
-          </a:p>
-          <a:p>
-            <a:pPr>
-              <a:spcBef>
-                <a:spcPts val="300"/>
-              </a:spcBef>
-              <a:defRPr sz="1050">
-                <a:solidFill>
-                  <a:srgbClr val="334155"/>
-                </a:solidFill>
-                <a:latin typeface="Malgun Gothic"/>
-              </a:defRPr>
-            </a:pPr>
-            <a:r>
-              <a:t>─────────────────────────</a:t>
-            </a:r>
-          </a:p>
-          <a:p>
-            <a:pPr>
-              <a:spcBef>
-                <a:spcPts val="300"/>
-              </a:spcBef>
-              <a:defRPr sz="1050">
-                <a:solidFill>
-                  <a:srgbClr val="334155"/>
-                </a:solidFill>
-                <a:latin typeface="Malgun Gothic"/>
-              </a:defRPr>
-            </a:pPr>
-            <a:r>
-              <a:t>[제목] 웹프로그래밍 캡스톤 프로젝트</a:t>
-            </a:r>
-          </a:p>
-          <a:p>
-            <a:pPr>
-              <a:spcBef>
-                <a:spcPts val="300"/>
-              </a:spcBef>
-              <a:defRPr sz="1050">
-                <a:solidFill>
-                  <a:srgbClr val="334155"/>
-                </a:solidFill>
-                <a:latin typeface="Malgun Gothic"/>
-              </a:defRPr>
-            </a:pPr>
-            <a:r>
-              <a:t>[과목] CS490 (웹프로그래밍)</a:t>
-            </a:r>
-          </a:p>
-          <a:p>
-            <a:pPr>
-              <a:spcBef>
-                <a:spcPts val="300"/>
-              </a:spcBef>
-              <a:defRPr sz="1050">
-                <a:solidFill>
-                  <a:srgbClr val="334155"/>
-                </a:solidFill>
-                <a:latin typeface="Malgun Gothic"/>
-              </a:defRPr>
-            </a:pPr>
-            <a:r>
-              <a:t>[소개] 숭실대 학우 전용 매칭 플랫폼...</a:t>
-            </a:r>
-          </a:p>
-          <a:p>
-            <a:pPr>
-              <a:spcBef>
-                <a:spcPts val="300"/>
-              </a:spcBef>
-              <a:defRPr sz="1050">
-                <a:solidFill>
-                  <a:srgbClr val="334155"/>
-                </a:solidFill>
-                <a:latin typeface="Malgun Gothic"/>
-              </a:defRPr>
-            </a:pPr>
-            <a:r>
-              <a:t>─────────────────────────</a:t>
-            </a:r>
-          </a:p>
-          <a:p>
-            <a:pPr>
-              <a:spcBef>
-                <a:spcPts val="300"/>
-              </a:spcBef>
-              <a:defRPr sz="1050">
-                <a:solidFill>
-                  <a:srgbClr val="E46C0A"/>
-                </a:solidFill>
-                <a:latin typeface="Malgun Gothic"/>
-              </a:defRPr>
-            </a:pPr>
-            <a:r>
-              <a:t>🎯 포지션별 쿼터(Role Quota) 설정</a:t>
-            </a:r>
-          </a:p>
-          <a:p>
-            <a:pPr>
-              <a:spcBef>
-                <a:spcPts val="300"/>
-              </a:spcBef>
-              <a:defRPr sz="1050">
-                <a:solidFill>
-                  <a:srgbClr val="334155"/>
-                </a:solidFill>
-                <a:latin typeface="Malgun Gothic"/>
-              </a:defRPr>
-            </a:pPr>
-            <a:r>
-              <a:t>• Frontend Developer : 2명</a:t>
-            </a:r>
-          </a:p>
-          <a:p>
-            <a:pPr>
-              <a:spcBef>
-                <a:spcPts val="300"/>
-              </a:spcBef>
-              <a:defRPr sz="1050">
-                <a:solidFill>
-                  <a:srgbClr val="334155"/>
-                </a:solidFill>
-                <a:latin typeface="Malgun Gothic"/>
-              </a:defRPr>
-            </a:pPr>
-            <a:r>
-              <a:t>• Backend Developer  : 2명</a:t>
-            </a:r>
-          </a:p>
-          <a:p>
-            <a:pPr>
-              <a:spcBef>
-                <a:spcPts val="300"/>
-              </a:spcBef>
-              <a:defRPr sz="1050">
-                <a:solidFill>
-                  <a:srgbClr val="334155"/>
-                </a:solidFill>
-                <a:latin typeface="Malgun Gothic"/>
-              </a:defRPr>
-            </a:pPr>
-            <a:r>
-              <a:t>• UI/UX Designer     : 1명</a:t>
-            </a:r>
-          </a:p>
-          <a:p>
-            <a:pPr>
-              <a:spcBef>
-                <a:spcPts val="300"/>
-              </a:spcBef>
-              <a:defRPr sz="1050">
-                <a:solidFill>
-                  <a:srgbClr val="334155"/>
-                </a:solidFill>
-                <a:latin typeface="Malgun Gothic"/>
-              </a:defRPr>
-            </a:pPr>
-            <a:r>
-              <a:t>─────────────────────────</a:t>
-            </a:r>
-          </a:p>
-          <a:p>
-            <a:pPr>
-              <a:spcBef>
-                <a:spcPts val="300"/>
-              </a:spcBef>
-              <a:defRPr sz="1050">
-                <a:solidFill>
-                  <a:srgbClr val="E46C0A"/>
-                </a:solidFill>
-                <a:latin typeface="Malgun Gothic"/>
-              </a:defRPr>
-            </a:pPr>
-            <a:r>
-              <a:t>[ 🚀 모집 공고 등록하기 ]</a:t>
-            </a:r>
-          </a:p>
-        </p:txBody>
-      </p:sp>
-      <p:sp>
-        <p:nvSpPr>
-          <p:cNvPr id="9" name="Rounded Rectangle 8"/>
+              <a:t>📱 화면 레이아웃 (Application Modal)</a:t>
+            </a:r>
+          </a:p>
+        </p:txBody>
+      </p:sp>
+      <p:sp>
+        <p:nvSpPr>
+          <p:cNvPr id="8" name="Rounded Rectangle 7"/>
           <p:cNvSpPr/>
           <p:nvPr/>
         </p:nvSpPr>
@@ -3864,14 +5269,14 @@
       </p:sp>
       <p:sp>
         <p:nvSpPr>
-          <p:cNvPr id="10" name="TextBox 9"/>
+          <p:cNvPr id="9" name="TextBox 8"/>
           <p:cNvSpPr txBox="1"/>
           <p:nvPr/>
         </p:nvSpPr>
         <p:spPr>
           <a:xfrm>
-            <a:off x="4892040" y="1371600"/>
-            <a:ext cx="3520440" cy="3408625"/>
+            <a:off x="4892040" y="1325880"/>
+            <a:ext cx="3520440" cy="3647152"/>
           </a:xfrm>
           <a:prstGeom prst="rect">
             <a:avLst/>
@@ -3879,7 +5284,7 @@
           <a:noFill/>
         </p:spPr>
         <p:txBody>
-          <a:bodyPr wrap="square">
+          <a:bodyPr wrap="square" lIns="0" tIns="0" rIns="0" bIns="0">
             <a:spAutoFit/>
           </a:bodyPr>
           <a:lstStyle/>
@@ -3937,9 +5342,9 @@
           <a:p>
             <a:pPr>
               <a:spcBef>
-                <a:spcPts val="1000"/>
-              </a:spcBef>
-              <a:defRPr sz="1250" b="1">
+                <a:spcPts val="700"/>
+              </a:spcBef>
+              <a:defRPr sz="1200" b="1">
                 <a:solidFill>
                   <a:srgbClr val="004AC6"/>
                 </a:solidFill>
@@ -3969,7 +5374,7 @@
               <a:spcBef>
                 <a:spcPts val="200"/>
               </a:spcBef>
-              <a:defRPr sz="1100">
+              <a:defRPr sz="1050">
                 <a:solidFill>
                   <a:srgbClr val="334155"/>
                 </a:solidFill>
@@ -3982,20 +5387,16 @@
             </a:r>
             <a:r>
               <a:rPr dirty="0" err="1"/>
-              <a:t>황뚱백</a:t>
-            </a:r>
-            <a:r>
-              <a:rPr dirty="0"/>
-              <a:t> </a:t>
-            </a:r>
-            <a:endParaRPr lang="en-US" dirty="0"/>
-          </a:p>
-          <a:p>
-            <a:pPr>
-              <a:spcBef>
-                <a:spcPts val="1000"/>
-              </a:spcBef>
-              <a:defRPr sz="1250" b="1">
+              <a:t>트란트룽하우</a:t>
+            </a:r>
+            <a:endParaRPr dirty="0"/>
+          </a:p>
+          <a:p>
+            <a:pPr>
+              <a:spcBef>
+                <a:spcPts val="700"/>
+              </a:spcBef>
+              <a:defRPr sz="1200" b="1">
                 <a:solidFill>
                   <a:srgbClr val="1E293B"/>
                 </a:solidFill>
@@ -4003,20 +5404,29 @@
               </a:defRPr>
             </a:pPr>
             <a:r>
-              <a:rPr lang="en-US" dirty="0"/>
+              <a:rPr dirty="0"/>
               <a:t>• </a:t>
             </a:r>
             <a:r>
-              <a:rPr lang="ko-KR" altLang="en-US" dirty="0"/>
-              <a:t>개발 화면</a:t>
-            </a:r>
+              <a:rPr dirty="0" err="1"/>
+              <a:t>개발</a:t>
+            </a:r>
+            <a:r>
+              <a:rPr dirty="0"/>
+              <a:t> </a:t>
+            </a:r>
+            <a:r>
+              <a:rPr dirty="0" err="1"/>
+              <a:t>화면</a:t>
+            </a:r>
+            <a:endParaRPr dirty="0"/>
           </a:p>
           <a:p>
             <a:pPr>
               <a:spcBef>
                 <a:spcPts val="200"/>
               </a:spcBef>
-              <a:defRPr sz="1100">
+              <a:defRPr sz="1050">
                 <a:solidFill>
                   <a:srgbClr val="334155"/>
                 </a:solidFill>
@@ -4025,7 +5435,23 @@
             </a:pPr>
             <a:r>
               <a:rPr dirty="0"/>
-              <a:t>  Create Group (</a:t>
+              <a:t>  </a:t>
+            </a:r>
+            <a:r>
+              <a:rPr dirty="0" err="1"/>
+              <a:t>ApplyModal</a:t>
+            </a:r>
+            <a:r>
+              <a:rPr dirty="0"/>
+              <a:t> (</a:t>
+            </a:r>
+            <a:r>
+              <a:rPr dirty="0" err="1"/>
+              <a:t>프로젝트</a:t>
+            </a:r>
+            <a:r>
+              <a:rPr dirty="0"/>
+              <a:t>/</a:t>
             </a:r>
             <a:r>
               <a:rPr dirty="0" err="1"/>
@@ -4033,11 +5459,278 @@
             </a:r>
             <a:r>
               <a:rPr dirty="0"/>
-              <a:t>/</a:t>
-            </a:r>
-            <a:r>
-              <a:rPr dirty="0" err="1"/>
-              <a:t>팀원</a:t>
+              <a:t> </a:t>
+            </a:r>
+            <a:r>
+              <a:rPr dirty="0" err="1"/>
+              <a:t>지원서</a:t>
+            </a:r>
+            <a:r>
+              <a:rPr dirty="0"/>
+              <a:t> </a:t>
+            </a:r>
+            <a:r>
+              <a:rPr dirty="0" err="1"/>
+              <a:t>팝업</a:t>
+            </a:r>
+            <a:r>
+              <a:rPr dirty="0"/>
+              <a:t> </a:t>
+            </a:r>
+            <a:r>
+              <a:rPr dirty="0" err="1"/>
+              <a:t>모달</a:t>
+            </a:r>
+            <a:r>
+              <a:rPr dirty="0"/>
+              <a:t>)</a:t>
+            </a:r>
+          </a:p>
+          <a:p>
+            <a:pPr>
+              <a:spcBef>
+                <a:spcPts val="700"/>
+              </a:spcBef>
+              <a:defRPr sz="1200" b="1">
+                <a:solidFill>
+                  <a:srgbClr val="1E293B"/>
+                </a:solidFill>
+                <a:latin typeface="Malgun Gothic"/>
+              </a:defRPr>
+            </a:pPr>
+            <a:r>
+              <a:rPr dirty="0"/>
+              <a:t>• u-SAINT </a:t>
+            </a:r>
+            <a:r>
+              <a:rPr dirty="0" err="1"/>
+              <a:t>학적</a:t>
+            </a:r>
+            <a:r>
+              <a:rPr dirty="0"/>
+              <a:t> </a:t>
+            </a:r>
+            <a:r>
+              <a:rPr dirty="0" err="1"/>
+              <a:t>자동</a:t>
+            </a:r>
+            <a:r>
+              <a:rPr dirty="0"/>
+              <a:t> </a:t>
+            </a:r>
+            <a:r>
+              <a:rPr dirty="0" err="1"/>
+              <a:t>연동</a:t>
+            </a:r>
+            <a:endParaRPr dirty="0"/>
+          </a:p>
+          <a:p>
+            <a:pPr>
+              <a:spcBef>
+                <a:spcPts val="200"/>
+              </a:spcBef>
+              <a:defRPr sz="1050">
+                <a:solidFill>
+                  <a:srgbClr val="334155"/>
+                </a:solidFill>
+                <a:latin typeface="Malgun Gothic"/>
+              </a:defRPr>
+            </a:pPr>
+            <a:r>
+              <a:rPr dirty="0"/>
+              <a:t>  </a:t>
+            </a:r>
+            <a:r>
+              <a:rPr dirty="0" err="1"/>
+              <a:t>로그인된</a:t>
+            </a:r>
+            <a:r>
+              <a:rPr dirty="0"/>
+              <a:t> </a:t>
+            </a:r>
+            <a:r>
+              <a:rPr dirty="0" err="1"/>
+              <a:t>학우의</a:t>
+            </a:r>
+            <a:r>
+              <a:rPr dirty="0"/>
+              <a:t> </a:t>
+            </a:r>
+            <a:r>
+              <a:rPr dirty="0" err="1"/>
+              <a:t>정보</a:t>
+            </a:r>
+            <a:r>
+              <a:rPr dirty="0"/>
+              <a:t>(</a:t>
+            </a:r>
+            <a:r>
+              <a:rPr dirty="0" err="1"/>
+              <a:t>학번</a:t>
+            </a:r>
+            <a:r>
+              <a:rPr dirty="0"/>
+              <a:t>, </a:t>
+            </a:r>
+            <a:r>
+              <a:rPr dirty="0" err="1"/>
+              <a:t>학부</a:t>
+            </a:r>
+            <a:r>
+              <a:rPr dirty="0"/>
+              <a:t>, </a:t>
+            </a:r>
+            <a:r>
+              <a:rPr dirty="0" err="1"/>
+              <a:t>학년</a:t>
+            </a:r>
+            <a:r>
+              <a:rPr dirty="0"/>
+              <a:t>)</a:t>
+            </a:r>
+            <a:r>
+              <a:rPr dirty="0" err="1"/>
+              <a:t>를</a:t>
+            </a:r>
+            <a:r>
+              <a:rPr dirty="0"/>
+              <a:t> u-SAINT </a:t>
+            </a:r>
+            <a:r>
+              <a:rPr dirty="0" err="1"/>
+              <a:t>인증</a:t>
+            </a:r>
+            <a:r>
+              <a:rPr dirty="0"/>
+              <a:t> </a:t>
+            </a:r>
+            <a:r>
+              <a:rPr dirty="0" err="1"/>
+              <a:t>뱃지와</a:t>
+            </a:r>
+            <a:r>
+              <a:rPr dirty="0"/>
+              <a:t> </a:t>
+            </a:r>
+            <a:r>
+              <a:rPr dirty="0" err="1"/>
+              <a:t>함께</a:t>
+            </a:r>
+            <a:r>
+              <a:rPr dirty="0"/>
+              <a:t> </a:t>
+            </a:r>
+            <a:r>
+              <a:rPr dirty="0" err="1"/>
+              <a:t>자동</a:t>
+            </a:r>
+            <a:r>
+              <a:rPr dirty="0"/>
+              <a:t> </a:t>
+            </a:r>
+            <a:r>
+              <a:rPr dirty="0" err="1"/>
+              <a:t>매핑하여</a:t>
+            </a:r>
+            <a:r>
+              <a:rPr dirty="0"/>
+              <a:t> </a:t>
+            </a:r>
+            <a:r>
+              <a:rPr dirty="0" err="1"/>
+              <a:t>신원</a:t>
+            </a:r>
+            <a:r>
+              <a:rPr dirty="0"/>
+              <a:t> </a:t>
+            </a:r>
+            <a:r>
+              <a:rPr dirty="0" err="1"/>
+              <a:t>신뢰도</a:t>
+            </a:r>
+            <a:r>
+              <a:rPr dirty="0"/>
+              <a:t> </a:t>
+            </a:r>
+            <a:r>
+              <a:rPr dirty="0" err="1"/>
+              <a:t>확보</a:t>
+            </a:r>
+            <a:endParaRPr dirty="0"/>
+          </a:p>
+          <a:p>
+            <a:pPr>
+              <a:spcBef>
+                <a:spcPts val="700"/>
+              </a:spcBef>
+              <a:defRPr sz="1200" b="1">
+                <a:solidFill>
+                  <a:srgbClr val="1E293B"/>
+                </a:solidFill>
+                <a:latin typeface="Malgun Gothic"/>
+              </a:defRPr>
+            </a:pPr>
+            <a:r>
+              <a:rPr dirty="0"/>
+              <a:t>• </a:t>
+            </a:r>
+            <a:r>
+              <a:rPr dirty="0" err="1"/>
+              <a:t>지원</a:t>
+            </a:r>
+            <a:r>
+              <a:rPr dirty="0"/>
+              <a:t> </a:t>
+            </a:r>
+            <a:r>
+              <a:rPr dirty="0" err="1"/>
+              <a:t>희망</a:t>
+            </a:r>
+            <a:r>
+              <a:rPr dirty="0"/>
+              <a:t> </a:t>
+            </a:r>
+            <a:r>
+              <a:rPr dirty="0" err="1"/>
+              <a:t>포지션</a:t>
+            </a:r>
+            <a:r>
+              <a:rPr dirty="0"/>
+              <a:t>(Desired Role) </a:t>
+            </a:r>
+            <a:r>
+              <a:rPr dirty="0" err="1"/>
+              <a:t>선택</a:t>
+            </a:r>
+            <a:endParaRPr dirty="0"/>
+          </a:p>
+          <a:p>
+            <a:pPr>
+              <a:spcBef>
+                <a:spcPts val="200"/>
+              </a:spcBef>
+              <a:defRPr sz="1050">
+                <a:solidFill>
+                  <a:srgbClr val="334155"/>
+                </a:solidFill>
+                <a:latin typeface="Malgun Gothic"/>
+              </a:defRPr>
+            </a:pPr>
+            <a:r>
+              <a:rPr dirty="0"/>
+              <a:t>  </a:t>
+            </a:r>
+            <a:r>
+              <a:rPr dirty="0" err="1"/>
+              <a:t>해당</a:t>
+            </a:r>
+            <a:r>
+              <a:rPr dirty="0"/>
+              <a:t> </a:t>
+            </a:r>
+            <a:r>
+              <a:rPr dirty="0" err="1"/>
+              <a:t>그룹에서</a:t>
             </a:r>
             <a:r>
               <a:rPr dirty="0"/>
@@ -4053,7 +5746,121 @@
             </a:r>
             <a:r>
               <a:rPr dirty="0" err="1"/>
-              <a:t>공고</a:t>
+              <a:t>중인</a:t>
+            </a:r>
+            <a:r>
+              <a:rPr dirty="0"/>
+              <a:t> </a:t>
+            </a:r>
+            <a:r>
+              <a:rPr dirty="0" err="1"/>
+              <a:t>오픈</a:t>
+            </a:r>
+            <a:r>
+              <a:rPr dirty="0"/>
+              <a:t> </a:t>
+            </a:r>
+            <a:r>
+              <a:rPr dirty="0" err="1"/>
+              <a:t>포지션</a:t>
+            </a:r>
+            <a:r>
+              <a:rPr dirty="0"/>
+              <a:t>(</a:t>
+            </a:r>
+            <a:r>
+              <a:rPr lang="vi-VN" dirty="0"/>
+              <a:t>Frontend, Backend </a:t>
+            </a:r>
+            <a:r>
+              <a:rPr dirty="0" err="1"/>
+              <a:t>등</a:t>
+            </a:r>
+            <a:r>
+              <a:rPr dirty="0"/>
+              <a:t>)</a:t>
+            </a:r>
+            <a:r>
+              <a:rPr dirty="0" err="1"/>
+              <a:t>을</a:t>
+            </a:r>
+            <a:r>
+              <a:rPr dirty="0"/>
+              <a:t> </a:t>
+            </a:r>
+            <a:r>
+              <a:rPr dirty="0" err="1"/>
+              <a:t>원클릭</a:t>
+            </a:r>
+            <a:r>
+              <a:rPr dirty="0"/>
+              <a:t> </a:t>
+            </a:r>
+            <a:r>
+              <a:rPr dirty="0" err="1"/>
+              <a:t>토글</a:t>
+            </a:r>
+            <a:r>
+              <a:rPr dirty="0"/>
+              <a:t> </a:t>
+            </a:r>
+            <a:r>
+              <a:rPr dirty="0" err="1"/>
+              <a:t>버튼으로</a:t>
+            </a:r>
+            <a:r>
+              <a:rPr dirty="0"/>
+              <a:t> </a:t>
+            </a:r>
+            <a:r>
+              <a:rPr dirty="0" err="1"/>
+              <a:t>직관적</a:t>
+            </a:r>
+            <a:r>
+              <a:rPr dirty="0"/>
+              <a:t> </a:t>
+            </a:r>
+            <a:r>
+              <a:rPr dirty="0" err="1"/>
+              <a:t>선택</a:t>
+            </a:r>
+            <a:endParaRPr dirty="0"/>
+          </a:p>
+          <a:p>
+            <a:pPr>
+              <a:spcBef>
+                <a:spcPts val="700"/>
+              </a:spcBef>
+              <a:defRPr sz="1200" b="1">
+                <a:solidFill>
+                  <a:srgbClr val="1E293B"/>
+                </a:solidFill>
+                <a:latin typeface="Malgun Gothic"/>
+              </a:defRPr>
+            </a:pPr>
+            <a:r>
+              <a:rPr dirty="0"/>
+              <a:t>• </a:t>
+            </a:r>
+            <a:r>
+              <a:rPr dirty="0" err="1"/>
+              <a:t>지원</a:t>
+            </a:r>
+            <a:r>
+              <a:rPr dirty="0"/>
+              <a:t> </a:t>
+            </a:r>
+            <a:r>
+              <a:rPr dirty="0" err="1"/>
+              <a:t>동기</a:t>
+            </a:r>
+            <a:r>
+              <a:rPr dirty="0"/>
+              <a:t> &amp; </a:t>
+            </a:r>
+            <a:r>
+              <a:rPr dirty="0" err="1"/>
+              <a:t>포부</a:t>
             </a:r>
             <a:r>
               <a:rPr dirty="0"/>
@@ -4065,15 +5872,173 @@
             </a:r>
             <a:r>
               <a:rPr dirty="0"/>
-              <a:t>)</a:t>
-            </a:r>
-          </a:p>
-          <a:p>
-            <a:pPr>
-              <a:spcBef>
-                <a:spcPts val="1000"/>
-              </a:spcBef>
-              <a:defRPr sz="1250" b="1">
+              <a:t> (500자)</a:t>
+            </a:r>
+          </a:p>
+          <a:p>
+            <a:pPr>
+              <a:spcBef>
+                <a:spcPts val="200"/>
+              </a:spcBef>
+              <a:defRPr sz="1050">
+                <a:solidFill>
+                  <a:srgbClr val="334155"/>
+                </a:solidFill>
+                <a:latin typeface="Malgun Gothic"/>
+              </a:defRPr>
+            </a:pPr>
+            <a:r>
+              <a:rPr dirty="0"/>
+              <a:t>  </a:t>
+            </a:r>
+            <a:r>
+              <a:rPr dirty="0" err="1"/>
+              <a:t>관련</a:t>
+            </a:r>
+            <a:r>
+              <a:rPr dirty="0"/>
+              <a:t> </a:t>
+            </a:r>
+            <a:r>
+              <a:rPr dirty="0" err="1"/>
+              <a:t>수강</a:t>
+            </a:r>
+            <a:r>
+              <a:rPr dirty="0"/>
+              <a:t> </a:t>
+            </a:r>
+            <a:r>
+              <a:rPr dirty="0" err="1"/>
+              <a:t>과목</a:t>
+            </a:r>
+            <a:r>
+              <a:rPr dirty="0"/>
+              <a:t>, </a:t>
+            </a:r>
+            <a:r>
+              <a:rPr dirty="0" err="1"/>
+              <a:t>프로젝트</a:t>
+            </a:r>
+            <a:r>
+              <a:rPr dirty="0"/>
+              <a:t> </a:t>
+            </a:r>
+            <a:r>
+              <a:rPr dirty="0" err="1"/>
+              <a:t>기여</a:t>
+            </a:r>
+            <a:r>
+              <a:rPr dirty="0"/>
+              <a:t> </a:t>
+            </a:r>
+            <a:r>
+              <a:rPr dirty="0" err="1"/>
+              <a:t>목표</a:t>
+            </a:r>
+            <a:r>
+              <a:rPr dirty="0"/>
+              <a:t> </a:t>
+            </a:r>
+            <a:r>
+              <a:rPr dirty="0" err="1"/>
+              <a:t>작성</a:t>
+            </a:r>
+            <a:r>
+              <a:rPr dirty="0"/>
+              <a:t> </a:t>
+            </a:r>
+            <a:r>
+              <a:rPr dirty="0" err="1"/>
+              <a:t>및</a:t>
+            </a:r>
+            <a:r>
+              <a:rPr dirty="0"/>
+              <a:t> </a:t>
+            </a:r>
+            <a:r>
+              <a:rPr dirty="0" err="1"/>
+              <a:t>실시간</a:t>
+            </a:r>
+            <a:r>
+              <a:rPr dirty="0"/>
+              <a:t> </a:t>
+            </a:r>
+            <a:r>
+              <a:rPr dirty="0" err="1"/>
+              <a:t>글자</a:t>
+            </a:r>
+            <a:r>
+              <a:rPr dirty="0"/>
+              <a:t> </a:t>
+            </a:r>
+            <a:r>
+              <a:rPr dirty="0" err="1"/>
+              <a:t>수</a:t>
+            </a:r>
+            <a:r>
+              <a:rPr dirty="0"/>
+              <a:t> </a:t>
+            </a:r>
+            <a:r>
+              <a:rPr dirty="0" err="1"/>
+              <a:t>카운터</a:t>
+            </a:r>
+            <a:r>
+              <a:rPr dirty="0"/>
+              <a:t>(0/500자) </a:t>
+            </a:r>
+            <a:r>
+              <a:rPr dirty="0" err="1"/>
+              <a:t>및</a:t>
+            </a:r>
+            <a:r>
+              <a:rPr dirty="0"/>
+              <a:t> </a:t>
+            </a:r>
+            <a:r>
+              <a:rPr dirty="0" err="1"/>
+              <a:t>필수</a:t>
+            </a:r>
+            <a:r>
+              <a:rPr dirty="0"/>
+              <a:t> </a:t>
+            </a:r>
+            <a:r>
+              <a:rPr dirty="0" err="1"/>
+              <a:t>입력</a:t>
+            </a:r>
+            <a:r>
+              <a:rPr dirty="0"/>
+              <a:t> </a:t>
+            </a:r>
+            <a:r>
+              <a:rPr dirty="0" err="1"/>
+              <a:t>유효성</a:t>
+            </a:r>
+            <a:r>
+              <a:rPr dirty="0"/>
+              <a:t> </a:t>
+            </a:r>
+            <a:r>
+              <a:rPr dirty="0" err="1"/>
+              <a:t>검사</a:t>
+            </a:r>
+            <a:r>
+              <a:rPr dirty="0"/>
+              <a:t> </a:t>
+            </a:r>
+            <a:r>
+              <a:rPr dirty="0" err="1"/>
+              <a:t>적용</a:t>
+            </a:r>
+            <a:endParaRPr dirty="0"/>
+          </a:p>
+          <a:p>
+            <a:pPr>
+              <a:spcBef>
+                <a:spcPts val="700"/>
+              </a:spcBef>
+              <a:defRPr sz="1200" b="1">
                 <a:solidFill>
                   <a:srgbClr val="1E293B"/>
                 </a:solidFill>
@@ -4086,31 +6051,39 @@
             </a:r>
             <a:r>
               <a:rPr dirty="0" err="1"/>
-              <a:t>학적</a:t>
-            </a:r>
-            <a:r>
-              <a:rPr dirty="0"/>
-              <a:t> </a:t>
-            </a:r>
-            <a:r>
-              <a:rPr dirty="0" err="1"/>
-              <a:t>정보</a:t>
-            </a:r>
-            <a:r>
-              <a:rPr dirty="0"/>
-              <a:t> </a:t>
-            </a:r>
-            <a:r>
-              <a:rPr dirty="0" err="1"/>
-              <a:t>자동</a:t>
-            </a:r>
-            <a:r>
-              <a:rPr dirty="0"/>
-              <a:t> </a:t>
-            </a:r>
-            <a:r>
-              <a:rPr dirty="0" err="1"/>
-              <a:t>연결</a:t>
+              <a:t>기술</a:t>
+            </a:r>
+            <a:r>
+              <a:rPr dirty="0"/>
+              <a:t> </a:t>
+            </a:r>
+            <a:r>
+              <a:rPr dirty="0" err="1"/>
+              <a:t>스택</a:t>
+            </a:r>
+            <a:r>
+              <a:rPr dirty="0"/>
+              <a:t> &amp; </a:t>
+            </a:r>
+            <a:r>
+              <a:rPr dirty="0" err="1"/>
+              <a:t>외부</a:t>
+            </a:r>
+            <a:r>
+              <a:rPr dirty="0"/>
+              <a:t> </a:t>
+            </a:r>
+            <a:r>
+              <a:rPr dirty="0" err="1"/>
+              <a:t>포트폴리오</a:t>
+            </a:r>
+            <a:r>
+              <a:rPr dirty="0"/>
+              <a:t> </a:t>
+            </a:r>
+            <a:r>
+              <a:rPr dirty="0" err="1"/>
+              <a:t>연동</a:t>
             </a:r>
             <a:endParaRPr dirty="0"/>
           </a:p>
@@ -4119,7 +6092,7 @@
               <a:spcBef>
                 <a:spcPts val="200"/>
               </a:spcBef>
-              <a:defRPr sz="1100">
+              <a:defRPr sz="1050">
                 <a:solidFill>
                   <a:srgbClr val="334155"/>
                 </a:solidFill>
@@ -4128,425 +6101,140 @@
             </a:pPr>
             <a:r>
               <a:rPr dirty="0"/>
-              <a:t>  </a:t>
-            </a:r>
-            <a:r>
-              <a:rPr dirty="0" err="1"/>
-              <a:t>로그인한</a:t>
-            </a:r>
-            <a:r>
-              <a:rPr dirty="0"/>
-              <a:t> </a:t>
-            </a:r>
-            <a:r>
-              <a:rPr dirty="0" err="1"/>
-              <a:t>사용자의</a:t>
-            </a:r>
-            <a:r>
-              <a:rPr dirty="0"/>
-              <a:t> </a:t>
-            </a:r>
-            <a:r>
-              <a:rPr dirty="0" err="1"/>
-              <a:t>소속</a:t>
-            </a:r>
-            <a:r>
-              <a:rPr dirty="0"/>
-              <a:t>(</a:t>
-            </a:r>
-            <a:r>
-              <a:rPr dirty="0" err="1"/>
-              <a:t>IT대학</a:t>
-            </a:r>
-            <a:r>
-              <a:rPr dirty="0"/>
-              <a:t>, </a:t>
-            </a:r>
-            <a:r>
-              <a:rPr dirty="0" err="1"/>
-              <a:t>소프트웨어학부</a:t>
-            </a:r>
-            <a:r>
-              <a:rPr dirty="0"/>
-              <a:t>)</a:t>
-            </a:r>
-            <a:r>
-              <a:rPr dirty="0" err="1"/>
-              <a:t>이</a:t>
-            </a:r>
-            <a:r>
-              <a:rPr dirty="0"/>
-              <a:t> </a:t>
-            </a:r>
-            <a:r>
-              <a:rPr dirty="0" err="1"/>
-              <a:t>공고에</a:t>
-            </a:r>
-            <a:r>
-              <a:rPr dirty="0"/>
-              <a:t> </a:t>
-            </a:r>
-            <a:r>
-              <a:rPr dirty="0" err="1"/>
-              <a:t>자동</a:t>
-            </a:r>
-            <a:r>
-              <a:rPr dirty="0"/>
-              <a:t> </a:t>
-            </a:r>
-            <a:r>
-              <a:rPr dirty="0" err="1"/>
-              <a:t>반영되어</a:t>
-            </a:r>
-            <a:r>
-              <a:rPr dirty="0"/>
-              <a:t> </a:t>
-            </a:r>
-            <a:r>
-              <a:rPr dirty="0" err="1"/>
-              <a:t>입력</a:t>
-            </a:r>
-            <a:r>
-              <a:rPr dirty="0"/>
-              <a:t> </a:t>
-            </a:r>
-            <a:r>
-              <a:rPr dirty="0" err="1"/>
-              <a:t>부담</a:t>
-            </a:r>
-            <a:r>
-              <a:rPr dirty="0"/>
-              <a:t> </a:t>
-            </a:r>
-            <a:r>
-              <a:rPr dirty="0" err="1"/>
-              <a:t>최소화</a:t>
+              <a:t>  React, </a:t>
+            </a:r>
+            <a:r>
+              <a:rPr dirty="0" err="1"/>
+              <a:t>Next.js</a:t>
+            </a:r>
+            <a:r>
+              <a:rPr dirty="0"/>
+              <a:t>, Python </a:t>
+            </a:r>
+            <a:r>
+              <a:rPr dirty="0" err="1"/>
+              <a:t>등</a:t>
+            </a:r>
+            <a:r>
+              <a:rPr dirty="0"/>
+              <a:t> </a:t>
+            </a:r>
+            <a:r>
+              <a:rPr dirty="0" err="1"/>
+              <a:t>사용</a:t>
+            </a:r>
+            <a:r>
+              <a:rPr dirty="0"/>
+              <a:t> </a:t>
+            </a:r>
+            <a:r>
+              <a:rPr dirty="0" err="1"/>
+              <a:t>가능</a:t>
+            </a:r>
+            <a:r>
+              <a:rPr dirty="0"/>
+              <a:t> </a:t>
+            </a:r>
+            <a:r>
+              <a:rPr dirty="0" err="1"/>
+              <a:t>기술과</a:t>
+            </a:r>
+            <a:r>
+              <a:rPr dirty="0"/>
+              <a:t> GitHub, </a:t>
+            </a:r>
+            <a:r>
+              <a:rPr dirty="0" err="1"/>
+              <a:t>개인</a:t>
+            </a:r>
+            <a:r>
+              <a:rPr dirty="0"/>
+              <a:t> </a:t>
+            </a:r>
+            <a:r>
+              <a:rPr dirty="0" err="1"/>
+              <a:t>포트폴리오</a:t>
+            </a:r>
+            <a:r>
+              <a:rPr dirty="0"/>
+              <a:t> </a:t>
+            </a:r>
+            <a:r>
+              <a:rPr dirty="0" err="1"/>
+              <a:t>링크를</a:t>
+            </a:r>
+            <a:r>
+              <a:rPr dirty="0"/>
+              <a:t> </a:t>
+            </a:r>
+            <a:r>
+              <a:rPr dirty="0" err="1"/>
+              <a:t>첨부하여</a:t>
+            </a:r>
+            <a:r>
+              <a:rPr dirty="0"/>
+              <a:t> </a:t>
+            </a:r>
+            <a:r>
+              <a:rPr dirty="0" err="1"/>
+              <a:t>선발</a:t>
+            </a:r>
+            <a:r>
+              <a:rPr dirty="0"/>
+              <a:t> </a:t>
+            </a:r>
+            <a:r>
+              <a:rPr dirty="0" err="1"/>
+              <a:t>심사</a:t>
+            </a:r>
+            <a:r>
+              <a:rPr dirty="0"/>
+              <a:t> </a:t>
+            </a:r>
+            <a:r>
+              <a:rPr dirty="0" err="1"/>
+              <a:t>지원</a:t>
             </a:r>
             <a:endParaRPr dirty="0"/>
           </a:p>
-          <a:p>
-            <a:pPr>
-              <a:spcBef>
-                <a:spcPts val="1000"/>
-              </a:spcBef>
-              <a:defRPr sz="1250" b="1">
-                <a:solidFill>
-                  <a:srgbClr val="1E293B"/>
-                </a:solidFill>
-                <a:latin typeface="Malgun Gothic"/>
-              </a:defRPr>
-            </a:pPr>
-            <a:r>
-              <a:rPr dirty="0"/>
-              <a:t>• </a:t>
-            </a:r>
-            <a:r>
-              <a:rPr dirty="0" err="1"/>
-              <a:t>역할별</a:t>
-            </a:r>
-            <a:r>
-              <a:rPr dirty="0"/>
-              <a:t> </a:t>
-            </a:r>
-            <a:r>
-              <a:rPr dirty="0" err="1"/>
-              <a:t>쿼터</a:t>
-            </a:r>
-            <a:r>
-              <a:rPr dirty="0"/>
-              <a:t> </a:t>
-            </a:r>
-            <a:r>
-              <a:rPr dirty="0" err="1"/>
-              <a:t>빌더</a:t>
-            </a:r>
-            <a:endParaRPr dirty="0"/>
-          </a:p>
-          <a:p>
-            <a:pPr>
-              <a:spcBef>
-                <a:spcPts val="200"/>
-              </a:spcBef>
-              <a:defRPr sz="1100">
-                <a:solidFill>
-                  <a:srgbClr val="334155"/>
-                </a:solidFill>
-                <a:latin typeface="Malgun Gothic"/>
-              </a:defRPr>
-            </a:pPr>
-            <a:r>
-              <a:rPr dirty="0"/>
-              <a:t>  FE, BE, AI, </a:t>
-            </a:r>
-            <a:r>
-              <a:rPr dirty="0" err="1"/>
-              <a:t>디자이너</a:t>
-            </a:r>
-            <a:r>
-              <a:rPr dirty="0"/>
-              <a:t> </a:t>
-            </a:r>
-            <a:r>
-              <a:rPr dirty="0" err="1"/>
-              <a:t>등</a:t>
-            </a:r>
-            <a:r>
-              <a:rPr dirty="0"/>
-              <a:t> </a:t>
-            </a:r>
-            <a:r>
-              <a:rPr dirty="0" err="1"/>
-              <a:t>원하는</a:t>
-            </a:r>
-            <a:r>
-              <a:rPr dirty="0"/>
-              <a:t> </a:t>
-            </a:r>
-            <a:r>
-              <a:rPr dirty="0" err="1"/>
-              <a:t>포지션을</a:t>
-            </a:r>
-            <a:r>
-              <a:rPr dirty="0"/>
-              <a:t> </a:t>
-            </a:r>
-            <a:r>
-              <a:rPr dirty="0" err="1"/>
-              <a:t>직접</a:t>
-            </a:r>
-            <a:r>
-              <a:rPr dirty="0"/>
-              <a:t> </a:t>
-            </a:r>
-            <a:r>
-              <a:rPr dirty="0" err="1"/>
-              <a:t>추가하고</a:t>
-            </a:r>
-            <a:r>
-              <a:rPr dirty="0"/>
-              <a:t> </a:t>
-            </a:r>
-            <a:r>
-              <a:rPr dirty="0" err="1"/>
-              <a:t>각각의</a:t>
-            </a:r>
-            <a:r>
-              <a:rPr dirty="0"/>
-              <a:t> </a:t>
-            </a:r>
-            <a:r>
-              <a:rPr dirty="0" err="1"/>
-              <a:t>모집</a:t>
-            </a:r>
-            <a:r>
-              <a:rPr dirty="0"/>
-              <a:t> </a:t>
-            </a:r>
-            <a:r>
-              <a:rPr dirty="0" err="1"/>
-              <a:t>인원</a:t>
-            </a:r>
-            <a:r>
-              <a:rPr dirty="0"/>
-              <a:t> </a:t>
-            </a:r>
-            <a:r>
-              <a:rPr dirty="0" err="1"/>
-              <a:t>설정</a:t>
-            </a:r>
-            <a:r>
-              <a:rPr dirty="0"/>
-              <a:t> </a:t>
-            </a:r>
-            <a:r>
-              <a:rPr dirty="0" err="1"/>
-              <a:t>가능</a:t>
-            </a:r>
-            <a:endParaRPr dirty="0"/>
-          </a:p>
-          <a:p>
-            <a:pPr>
-              <a:spcBef>
-                <a:spcPts val="1000"/>
-              </a:spcBef>
-              <a:defRPr sz="1250" b="1">
-                <a:solidFill>
-                  <a:srgbClr val="1E293B"/>
-                </a:solidFill>
-                <a:latin typeface="Malgun Gothic"/>
-              </a:defRPr>
-            </a:pPr>
-            <a:r>
-              <a:rPr dirty="0"/>
-              <a:t>• </a:t>
-            </a:r>
-            <a:r>
-              <a:rPr dirty="0" err="1"/>
-              <a:t>유효성</a:t>
-            </a:r>
-            <a:r>
-              <a:rPr dirty="0"/>
-              <a:t> </a:t>
-            </a:r>
-            <a:r>
-              <a:rPr dirty="0" err="1"/>
-              <a:t>검사</a:t>
-            </a:r>
-            <a:r>
-              <a:rPr dirty="0"/>
-              <a:t> &amp; </a:t>
-            </a:r>
-            <a:r>
-              <a:rPr dirty="0" err="1"/>
-              <a:t>권한</a:t>
-            </a:r>
-            <a:endParaRPr dirty="0"/>
-          </a:p>
-          <a:p>
-            <a:pPr>
-              <a:spcBef>
-                <a:spcPts val="200"/>
-              </a:spcBef>
-              <a:defRPr sz="1100">
-                <a:solidFill>
-                  <a:srgbClr val="334155"/>
-                </a:solidFill>
-                <a:latin typeface="Malgun Gothic"/>
-              </a:defRPr>
-            </a:pPr>
-            <a:r>
-              <a:rPr dirty="0"/>
-              <a:t>  </a:t>
-            </a:r>
-            <a:r>
-              <a:rPr dirty="0" err="1"/>
-              <a:t>필수</a:t>
-            </a:r>
-            <a:r>
-              <a:rPr dirty="0"/>
-              <a:t> </a:t>
-            </a:r>
-            <a:r>
-              <a:rPr dirty="0" err="1"/>
-              <a:t>항목</a:t>
-            </a:r>
-            <a:r>
-              <a:rPr dirty="0"/>
-              <a:t>(</a:t>
-            </a:r>
-            <a:r>
-              <a:rPr dirty="0" err="1"/>
-              <a:t>제목</a:t>
-            </a:r>
-            <a:r>
-              <a:rPr dirty="0"/>
-              <a:t>, </a:t>
-            </a:r>
-            <a:r>
-              <a:rPr dirty="0" err="1"/>
-              <a:t>인원수</a:t>
-            </a:r>
-            <a:r>
-              <a:rPr dirty="0"/>
-              <a:t>, </a:t>
-            </a:r>
-            <a:r>
-              <a:rPr dirty="0" err="1"/>
-              <a:t>마감일</a:t>
-            </a:r>
-            <a:r>
-              <a:rPr dirty="0"/>
-              <a:t>) </a:t>
-            </a:r>
-            <a:r>
-              <a:rPr dirty="0" err="1"/>
-              <a:t>체크</a:t>
-            </a:r>
-            <a:r>
-              <a:rPr dirty="0"/>
-              <a:t> </a:t>
-            </a:r>
-            <a:r>
-              <a:rPr dirty="0" err="1"/>
-              <a:t>후</a:t>
-            </a:r>
-            <a:r>
-              <a:rPr dirty="0"/>
-              <a:t> </a:t>
-            </a:r>
-            <a:r>
-              <a:rPr dirty="0" err="1"/>
-              <a:t>등록</a:t>
-            </a:r>
-            <a:r>
-              <a:rPr dirty="0"/>
-              <a:t> </a:t>
-            </a:r>
-            <a:r>
-              <a:rPr dirty="0" err="1"/>
-              <a:t>완료</a:t>
-            </a:r>
-            <a:r>
-              <a:rPr dirty="0"/>
-              <a:t> </a:t>
-            </a:r>
-            <a:r>
-              <a:rPr dirty="0" err="1"/>
-              <a:t>시</a:t>
-            </a:r>
-            <a:r>
-              <a:rPr dirty="0"/>
-              <a:t> </a:t>
-            </a:r>
-            <a:r>
-              <a:rPr dirty="0" err="1"/>
-              <a:t>작성자는</a:t>
-            </a:r>
-            <a:r>
-              <a:rPr dirty="0"/>
-              <a:t> </a:t>
-            </a:r>
-            <a:r>
-              <a:rPr dirty="0" err="1"/>
-              <a:t>자동으로</a:t>
-            </a:r>
-            <a:r>
-              <a:rPr dirty="0"/>
-              <a:t> </a:t>
-            </a:r>
-            <a:r>
-              <a:rPr dirty="0" err="1"/>
-              <a:t>해당</a:t>
-            </a:r>
-            <a:r>
-              <a:rPr dirty="0"/>
-              <a:t> </a:t>
-            </a:r>
-            <a:r>
-              <a:rPr dirty="0" err="1"/>
-              <a:t>팀의</a:t>
-            </a:r>
-            <a:r>
-              <a:rPr dirty="0"/>
-              <a:t> </a:t>
-            </a:r>
-            <a:r>
-              <a:rPr dirty="0" err="1"/>
-              <a:t>LEADER로</a:t>
-            </a:r>
-            <a:r>
-              <a:rPr dirty="0"/>
-              <a:t> </a:t>
-            </a:r>
-            <a:r>
-              <a:rPr dirty="0" err="1"/>
-              <a:t>지정</a:t>
-            </a:r>
-            <a:endParaRPr dirty="0"/>
-          </a:p>
-        </p:txBody>
-      </p:sp>
+        </p:txBody>
+      </p:sp>
+      <p:pic>
+        <p:nvPicPr>
+          <p:cNvPr id="11" name="Picture 10">
+            <a:extLst>
+              <a:ext uri="{FF2B5EF4-FFF2-40B4-BE49-F238E27FC236}">
+                <a16:creationId xmlns:a16="http://schemas.microsoft.com/office/drawing/2014/main" id="{0C979282-8731-2EFE-41F7-645F6B02CD79}"/>
+              </a:ext>
+            </a:extLst>
+          </p:cNvPr>
+          <p:cNvPicPr>
+            <a:picLocks noChangeAspect="1"/>
+          </p:cNvPicPr>
+          <p:nvPr/>
+        </p:nvPicPr>
+        <p:blipFill>
+          <a:blip r:embed="rId2"/>
+          <a:stretch>
+            <a:fillRect/>
+          </a:stretch>
+        </p:blipFill>
+        <p:spPr>
+          <a:xfrm>
+            <a:off x="808263" y="1737360"/>
+            <a:ext cx="3258197" cy="4178592"/>
+          </a:xfrm>
+          <a:prstGeom prst="rect">
+            <a:avLst/>
+          </a:prstGeom>
+        </p:spPr>
+      </p:pic>
     </p:spTree>
+    <p:extLst>
+      <p:ext uri="{BB962C8B-B14F-4D97-AF65-F5344CB8AC3E}">
+        <p14:creationId xmlns:p14="http://schemas.microsoft.com/office/powerpoint/2010/main" val="1301594164"/>
+      </p:ext>
+    </p:extLst>
   </p:cSld>
   <p:clrMapOvr>
     <a:masterClrMapping/>
@@ -4602,56 +6290,7 @@
               </a:defRPr>
             </a:pPr>
             <a:r>
-              <a:rPr dirty="0"/>
-              <a:t>3. </a:t>
-            </a:r>
-            <a:r>
-              <a:rPr dirty="0" err="1"/>
-              <a:t>시스템</a:t>
-            </a:r>
-            <a:r>
-              <a:rPr dirty="0"/>
-              <a:t> </a:t>
-            </a:r>
-            <a:r>
-              <a:rPr dirty="0" err="1"/>
-              <a:t>설계</a:t>
-            </a:r>
-            <a:r>
-              <a:rPr dirty="0"/>
-              <a:t> - (6) </a:t>
-            </a:r>
-            <a:r>
-              <a:rPr dirty="0" err="1"/>
-              <a:t>그룹</a:t>
-            </a:r>
-            <a:r>
-              <a:rPr dirty="0"/>
-              <a:t> </a:t>
-            </a:r>
-            <a:r>
-              <a:rPr dirty="0" err="1"/>
-              <a:t>관리</a:t>
-            </a:r>
-            <a:r>
-              <a:rPr dirty="0"/>
-              <a:t> </a:t>
-            </a:r>
-            <a:r>
-              <a:rPr dirty="0" err="1"/>
-              <a:t>워크스페이스</a:t>
-            </a:r>
-            <a:r>
-              <a:rPr dirty="0"/>
-              <a:t> [</a:t>
-            </a:r>
-            <a:r>
-              <a:rPr dirty="0" err="1"/>
-              <a:t>응오후인트</a:t>
-            </a:r>
-            <a:r>
-              <a:rPr dirty="0"/>
-              <a:t>]</a:t>
+              <a:t>3. 시스템 설계 - (5) 신규 그룹 개설 [황뚱백]</a:t>
             </a:r>
           </a:p>
         </p:txBody>
@@ -4664,7 +6303,7 @@
         </p:nvSpPr>
         <p:spPr>
           <a:xfrm>
-            <a:off x="548640" y="1065276"/>
+            <a:off x="457200" y="896112"/>
             <a:ext cx="8229600" cy="32004"/>
           </a:xfrm>
           <a:prstGeom prst="rect">
@@ -4733,7 +6372,7 @@
               </a:defRPr>
             </a:pPr>
             <a:r>
-              <a:t>11</a:t>
+              <a:t>12</a:t>
             </a:r>
           </a:p>
         </p:txBody>
@@ -4793,7 +6432,7 @@
         <p:spPr>
           <a:xfrm>
             <a:off x="731520" y="1280160"/>
-            <a:ext cx="3566160" cy="365760"/>
+            <a:ext cx="1588897" cy="292388"/>
           </a:xfrm>
           <a:prstGeom prst="rect">
             <a:avLst/>
@@ -4815,7 +6454,24 @@
               </a:defRPr>
             </a:pPr>
             <a:r>
-              <a:t>📱 화면 레이아웃 (Figma)</a:t>
+              <a:rPr dirty="0"/>
+              <a:t>📱 </a:t>
+            </a:r>
+            <a:r>
+              <a:rPr dirty="0" err="1"/>
+              <a:t>화면</a:t>
+            </a:r>
+            <a:r>
+              <a:rPr dirty="0"/>
+              <a:t> </a:t>
+            </a:r>
+            <a:r>
+              <a:rPr dirty="0" err="1"/>
+              <a:t>레이아웃</a:t>
+            </a:r>
+            <a:r>
+              <a:rPr dirty="0"/>
+              <a:t> </a:t>
             </a:r>
           </a:p>
         </p:txBody>
@@ -4875,7 +6531,7 @@
         <p:spPr>
           <a:xfrm>
             <a:off x="960120" y="1920240"/>
-            <a:ext cx="3108960" cy="3931920"/>
+            <a:ext cx="3108960" cy="253916"/>
           </a:xfrm>
           <a:prstGeom prst="rect">
             <a:avLst/>
@@ -4894,238 +6550,12 @@
               </a:spcBef>
               <a:defRPr sz="1050">
                 <a:solidFill>
-                  <a:srgbClr val="334155"/>
-                </a:solidFill>
-                <a:latin typeface="Malgun Gothic"/>
-              </a:defRPr>
-            </a:pPr>
-            <a:r>
-              <a:t>⚙️ 리더 전용 지원자 관리 대시보드</a:t>
-            </a:r>
-          </a:p>
-          <a:p>
-            <a:pPr>
-              <a:spcBef>
-                <a:spcPts val="300"/>
-              </a:spcBef>
-              <a:defRPr sz="1050">
-                <a:solidFill>
-                  <a:srgbClr val="334155"/>
-                </a:solidFill>
-                <a:latin typeface="Malgun Gothic"/>
-              </a:defRPr>
-            </a:pPr>
-            <a:r>
-              <a:t>─────────────────────────</a:t>
-            </a:r>
-          </a:p>
-          <a:p>
-            <a:pPr>
-              <a:spcBef>
-                <a:spcPts val="300"/>
-              </a:spcBef>
-              <a:defRPr sz="1050">
-                <a:solidFill>
-                  <a:srgbClr val="334155"/>
-                </a:solidFill>
-                <a:latin typeface="Malgun Gothic"/>
-              </a:defRPr>
-            </a:pPr>
-            <a:r>
-              <a:t>[내 프로젝트] Web Programming Capstone</a:t>
-            </a:r>
-          </a:p>
-          <a:p>
-            <a:pPr>
-              <a:spcBef>
-                <a:spcPts val="300"/>
-              </a:spcBef>
-              <a:defRPr sz="1050">
-                <a:solidFill>
-                  <a:srgbClr val="334155"/>
-                </a:solidFill>
-                <a:latin typeface="Malgun Gothic"/>
-              </a:defRPr>
-            </a:pPr>
-            <a:r>
-              <a:t>현재 모집 현황: 2/4명 (모집중)</a:t>
-            </a:r>
-          </a:p>
-          <a:p>
-            <a:pPr>
-              <a:spcBef>
-                <a:spcPts val="300"/>
-              </a:spcBef>
-              <a:defRPr sz="1050">
-                <a:solidFill>
-                  <a:srgbClr val="334155"/>
-                </a:solidFill>
-                <a:latin typeface="Malgun Gothic"/>
-              </a:defRPr>
-            </a:pPr>
-            <a:r>
-              <a:t>─────────────────────────</a:t>
-            </a:r>
-          </a:p>
-          <a:p>
-            <a:pPr>
-              <a:spcBef>
-                <a:spcPts val="300"/>
-              </a:spcBef>
-              <a:defRPr sz="1050">
-                <a:solidFill>
-                  <a:srgbClr val="334155"/>
-                </a:solidFill>
-                <a:latin typeface="Malgun Gothic"/>
-              </a:defRPr>
-            </a:pPr>
-            <a:r>
-              <a:t>📬 대기 중인 지원서 (2건)</a:t>
-            </a:r>
-          </a:p>
-          <a:p>
-            <a:pPr>
-              <a:spcBef>
-                <a:spcPts val="300"/>
-              </a:spcBef>
-              <a:defRPr sz="1050">
-                <a:solidFill>
-                  <a:srgbClr val="334155"/>
-                </a:solidFill>
-                <a:latin typeface="Malgun Gothic"/>
-              </a:defRPr>
-            </a:pPr>
-            <a:r>
-              <a:t>┌───────────────────────┐</a:t>
-            </a:r>
-          </a:p>
-          <a:p>
-            <a:pPr>
-              <a:spcBef>
-                <a:spcPts val="300"/>
-              </a:spcBef>
-              <a:defRPr sz="1050">
-                <a:solidFill>
-                  <a:srgbClr val="334155"/>
-                </a:solidFill>
-                <a:latin typeface="Malgun Gothic"/>
-              </a:defRPr>
-            </a:pPr>
-            <a:r>
-              <a:t>│ 지원자: 이영희 (소프트 3학년)   │</a:t>
-            </a:r>
-          </a:p>
-          <a:p>
-            <a:pPr>
-              <a:spcBef>
-                <a:spcPts val="300"/>
-              </a:spcBef>
-              <a:defRPr sz="1050">
-                <a:solidFill>
-                  <a:srgbClr val="334155"/>
-                </a:solidFill>
-                <a:latin typeface="Malgun Gothic"/>
-              </a:defRPr>
-            </a:pPr>
-            <a:r>
-              <a:t>│ 희망 역할: Frontend Developer │</a:t>
-            </a:r>
-          </a:p>
-          <a:p>
-            <a:pPr>
-              <a:spcBef>
-                <a:spcPts val="300"/>
-              </a:spcBef>
-              <a:defRPr sz="1050">
-                <a:solidFill>
-                  <a:srgbClr val="334155"/>
-                </a:solidFill>
-                <a:latin typeface="Malgun Gothic"/>
-              </a:defRPr>
-            </a:pPr>
-            <a:r>
-              <a:t>│ [ ✅ 수락 (Accept) ] [ ❌ 거절 ]│</a:t>
-            </a:r>
-          </a:p>
-          <a:p>
-            <a:pPr>
-              <a:spcBef>
-                <a:spcPts val="300"/>
-              </a:spcBef>
-              <a:defRPr sz="1050">
-                <a:solidFill>
-                  <a:srgbClr val="334155"/>
-                </a:solidFill>
-                <a:latin typeface="Malgun Gothic"/>
-              </a:defRPr>
-            </a:pPr>
-            <a:r>
-              <a:t>└───────────────────────┘</a:t>
-            </a:r>
-          </a:p>
-          <a:p>
-            <a:pPr>
-              <a:spcBef>
-                <a:spcPts val="300"/>
-              </a:spcBef>
-              <a:defRPr sz="1050">
-                <a:solidFill>
-                  <a:srgbClr val="334155"/>
-                </a:solidFill>
-                <a:latin typeface="Malgun Gothic"/>
-              </a:defRPr>
-            </a:pPr>
-            <a:r>
-              <a:t>┌───────────────────────┐</a:t>
-            </a:r>
-          </a:p>
-          <a:p>
-            <a:pPr>
-              <a:spcBef>
-                <a:spcPts val="300"/>
-              </a:spcBef>
-              <a:defRPr sz="1050">
-                <a:solidFill>
-                  <a:srgbClr val="334155"/>
-                </a:solidFill>
-                <a:latin typeface="Malgun Gothic"/>
-              </a:defRPr>
-            </a:pPr>
-            <a:r>
-              <a:t>│ 지원자: 박철수 (컴퓨터 2학년)   │</a:t>
-            </a:r>
-          </a:p>
-          <a:p>
-            <a:pPr>
-              <a:spcBef>
-                <a:spcPts val="300"/>
-              </a:spcBef>
-              <a:defRPr sz="1050">
-                <a:solidFill>
-                  <a:srgbClr val="334155"/>
-                </a:solidFill>
-                <a:latin typeface="Malgun Gothic"/>
-              </a:defRPr>
-            </a:pPr>
-            <a:r>
-              <a:t>│ [ ✅ 수락 (Accept) ] [ ❌ 거절 ]│</a:t>
-            </a:r>
-          </a:p>
-          <a:p>
-            <a:pPr>
-              <a:spcBef>
-                <a:spcPts val="300"/>
-              </a:spcBef>
-              <a:defRPr sz="1050">
-                <a:solidFill>
-                  <a:srgbClr val="334155"/>
-                </a:solidFill>
-                <a:latin typeface="Malgun Gothic"/>
-              </a:defRPr>
-            </a:pPr>
-            <a:r>
-              <a:t>└───────────────────────┘</a:t>
-            </a:r>
+                  <a:srgbClr val="E46C0A"/>
+                </a:solidFill>
+                <a:latin typeface="Malgun Gothic"/>
+              </a:defRPr>
+            </a:pPr>
+            <a:endParaRPr dirty="0"/>
           </a:p>
         </p:txBody>
       </p:sp>
@@ -5295,13 +6725,251 @@
             </a:r>
             <a:r>
               <a:rPr dirty="0" err="1"/>
-              <a:t>응오후인트</a:t>
+              <a:t>황뚱백</a:t>
+            </a:r>
+            <a:r>
+              <a:rPr dirty="0"/>
+              <a:t> </a:t>
+            </a:r>
+            <a:endParaRPr lang="en-US" dirty="0"/>
+          </a:p>
+          <a:p>
+            <a:pPr>
+              <a:spcBef>
+                <a:spcPts val="1000"/>
+              </a:spcBef>
+              <a:defRPr sz="1250" b="1">
+                <a:solidFill>
+                  <a:srgbClr val="1E293B"/>
+                </a:solidFill>
+                <a:latin typeface="Malgun Gothic"/>
+              </a:defRPr>
+            </a:pPr>
+            <a:r>
+              <a:rPr lang="en-US" dirty="0"/>
+              <a:t>• </a:t>
+            </a:r>
+            <a:r>
+              <a:rPr lang="ko-KR" altLang="en-US" dirty="0"/>
+              <a:t>개발 화면</a:t>
+            </a:r>
+          </a:p>
+          <a:p>
+            <a:pPr>
+              <a:spcBef>
+                <a:spcPts val="200"/>
+              </a:spcBef>
+              <a:defRPr sz="1100">
+                <a:solidFill>
+                  <a:srgbClr val="334155"/>
+                </a:solidFill>
+                <a:latin typeface="Malgun Gothic"/>
+              </a:defRPr>
+            </a:pPr>
+            <a:r>
+              <a:rPr dirty="0"/>
+              <a:t>  Create Group (</a:t>
+            </a:r>
+            <a:r>
+              <a:rPr dirty="0" err="1"/>
+              <a:t>스터디</a:t>
+            </a:r>
+            <a:r>
+              <a:rPr dirty="0"/>
+              <a:t>/</a:t>
+            </a:r>
+            <a:r>
+              <a:rPr dirty="0" err="1"/>
+              <a:t>팀원</a:t>
+            </a:r>
+            <a:r>
+              <a:rPr dirty="0"/>
+              <a:t> </a:t>
+            </a:r>
+            <a:r>
+              <a:rPr dirty="0" err="1"/>
+              <a:t>모집</a:t>
+            </a:r>
+            <a:r>
+              <a:rPr dirty="0"/>
+              <a:t> </a:t>
+            </a:r>
+            <a:r>
+              <a:rPr dirty="0" err="1"/>
+              <a:t>공고</a:t>
+            </a:r>
+            <a:r>
+              <a:rPr dirty="0"/>
+              <a:t> </a:t>
+            </a:r>
+            <a:r>
+              <a:rPr dirty="0" err="1"/>
+              <a:t>작성</a:t>
+            </a:r>
+            <a:r>
+              <a:rPr dirty="0"/>
+              <a:t>)</a:t>
+            </a:r>
+          </a:p>
+          <a:p>
+            <a:pPr>
+              <a:spcBef>
+                <a:spcPts val="1000"/>
+              </a:spcBef>
+              <a:defRPr sz="1250" b="1">
+                <a:solidFill>
+                  <a:srgbClr val="1E293B"/>
+                </a:solidFill>
+                <a:latin typeface="Malgun Gothic"/>
+              </a:defRPr>
+            </a:pPr>
+            <a:r>
+              <a:rPr dirty="0"/>
+              <a:t>• </a:t>
+            </a:r>
+            <a:r>
+              <a:rPr dirty="0" err="1"/>
+              <a:t>학적</a:t>
+            </a:r>
+            <a:r>
+              <a:rPr dirty="0"/>
+              <a:t> </a:t>
+            </a:r>
+            <a:r>
+              <a:rPr dirty="0" err="1"/>
+              <a:t>정보</a:t>
+            </a:r>
+            <a:r>
+              <a:rPr dirty="0"/>
+              <a:t> </a:t>
+            </a:r>
+            <a:r>
+              <a:rPr dirty="0" err="1"/>
+              <a:t>자동</a:t>
+            </a:r>
+            <a:r>
+              <a:rPr dirty="0"/>
+              <a:t> </a:t>
+            </a:r>
+            <a:r>
+              <a:rPr dirty="0" err="1"/>
+              <a:t>연결</a:t>
             </a:r>
             <a:endParaRPr dirty="0"/>
           </a:p>
           <a:p>
             <a:pPr>
               <a:spcBef>
+                <a:spcPts val="200"/>
+              </a:spcBef>
+              <a:defRPr sz="1100">
+                <a:solidFill>
+                  <a:srgbClr val="334155"/>
+                </a:solidFill>
+                <a:latin typeface="Malgun Gothic"/>
+              </a:defRPr>
+            </a:pPr>
+            <a:r>
+              <a:rPr dirty="0"/>
+              <a:t>  </a:t>
+            </a:r>
+            <a:r>
+              <a:rPr dirty="0" err="1"/>
+              <a:t>로그인한</a:t>
+            </a:r>
+            <a:r>
+              <a:rPr dirty="0"/>
+              <a:t> </a:t>
+            </a:r>
+            <a:r>
+              <a:rPr dirty="0" err="1"/>
+              <a:t>사용자의</a:t>
+            </a:r>
+            <a:r>
+              <a:rPr dirty="0"/>
+              <a:t> </a:t>
+            </a:r>
+            <a:r>
+              <a:rPr dirty="0" err="1"/>
+              <a:t>소속</a:t>
+            </a:r>
+            <a:r>
+              <a:rPr dirty="0"/>
+              <a:t>(</a:t>
+            </a:r>
+            <a:r>
+              <a:rPr dirty="0" err="1"/>
+              <a:t>IT대학</a:t>
+            </a:r>
+            <a:r>
+              <a:rPr dirty="0"/>
+              <a:t>, </a:t>
+            </a:r>
+            <a:r>
+              <a:rPr dirty="0" err="1"/>
+              <a:t>소프트웨어학부</a:t>
+            </a:r>
+            <a:r>
+              <a:rPr dirty="0"/>
+              <a:t>)</a:t>
+            </a:r>
+            <a:r>
+              <a:rPr dirty="0" err="1"/>
+              <a:t>이</a:t>
+            </a:r>
+            <a:r>
+              <a:rPr dirty="0"/>
+              <a:t> </a:t>
+            </a:r>
+            <a:r>
+              <a:rPr dirty="0" err="1"/>
+              <a:t>공고에</a:t>
+            </a:r>
+            <a:r>
+              <a:rPr dirty="0"/>
+              <a:t> </a:t>
+            </a:r>
+            <a:r>
+              <a:rPr dirty="0" err="1"/>
+              <a:t>자동</a:t>
+            </a:r>
+            <a:r>
+              <a:rPr dirty="0"/>
+              <a:t> </a:t>
+            </a:r>
+            <a:r>
+              <a:rPr dirty="0" err="1"/>
+              <a:t>반영되어</a:t>
+            </a:r>
+            <a:r>
+              <a:rPr dirty="0"/>
+              <a:t> </a:t>
+            </a:r>
+            <a:r>
+              <a:rPr dirty="0" err="1"/>
+              <a:t>입력</a:t>
+            </a:r>
+            <a:r>
+              <a:rPr dirty="0"/>
+              <a:t> </a:t>
+            </a:r>
+            <a:r>
+              <a:rPr dirty="0" err="1"/>
+              <a:t>부담</a:t>
+            </a:r>
+            <a:r>
+              <a:rPr dirty="0"/>
+              <a:t> </a:t>
+            </a:r>
+            <a:r>
+              <a:rPr dirty="0" err="1"/>
+              <a:t>최소화</a:t>
+            </a:r>
+            <a:endParaRPr dirty="0"/>
+          </a:p>
+          <a:p>
+            <a:pPr>
+              <a:spcBef>
                 <a:spcPts val="1000"/>
               </a:spcBef>
               <a:defRPr sz="1250" b="1">
@@ -5317,15 +6985,23 @@
             </a:r>
             <a:r>
               <a:rPr dirty="0" err="1"/>
-              <a:t>개발</a:t>
-            </a:r>
-            <a:r>
-              <a:rPr dirty="0"/>
-              <a:t> </a:t>
-            </a:r>
-            <a:r>
-              <a:rPr dirty="0" err="1"/>
-              <a:t>화면</a:t>
+              <a:t>역할별</a:t>
+            </a:r>
+            <a:r>
+              <a:rPr dirty="0"/>
+              <a:t> </a:t>
+            </a:r>
+            <a:r>
+              <a:rPr dirty="0" err="1"/>
+              <a:t>쿼터</a:t>
+            </a:r>
+            <a:r>
+              <a:rPr dirty="0"/>
+              <a:t> </a:t>
+            </a:r>
+            <a:r>
+              <a:rPr dirty="0" err="1"/>
+              <a:t>빌더</a:t>
             </a:r>
             <a:endParaRPr dirty="0"/>
           </a:p>
@@ -5343,56 +7019,93 @@
             </a:pPr>
             <a:r>
               <a:rPr dirty="0"/>
-              <a:t>  Manage (</a:t>
-            </a:r>
-            <a:r>
-              <a:rPr dirty="0" err="1"/>
-              <a:t>그룹</a:t>
-            </a:r>
-            <a:r>
-              <a:rPr dirty="0"/>
-              <a:t> </a:t>
-            </a:r>
-            <a:r>
-              <a:rPr dirty="0" err="1"/>
-              <a:t>관리</a:t>
-            </a:r>
-            <a:r>
-              <a:rPr dirty="0"/>
-              <a:t> </a:t>
-            </a:r>
-            <a:r>
-              <a:rPr dirty="0" err="1"/>
-              <a:t>및</a:t>
-            </a:r>
-            <a:r>
-              <a:rPr dirty="0"/>
-              <a:t> </a:t>
-            </a:r>
-            <a:r>
-              <a:rPr dirty="0" err="1"/>
-              <a:t>지원자</a:t>
-            </a:r>
-            <a:r>
-              <a:rPr dirty="0"/>
-              <a:t> </a:t>
-            </a:r>
-            <a:r>
-              <a:rPr dirty="0" err="1"/>
-              <a:t>심사</a:t>
-            </a:r>
-            <a:r>
-              <a:rPr dirty="0"/>
-              <a:t> </a:t>
-            </a:r>
-            <a:r>
-              <a:rPr dirty="0" err="1"/>
-              <a:t>페이지</a:t>
-            </a:r>
-            <a:r>
-              <a:rPr dirty="0"/>
-              <a:t>)</a:t>
-            </a:r>
+              <a:t>  FE, BE, AI, </a:t>
+            </a:r>
+            <a:r>
+              <a:rPr dirty="0" err="1"/>
+              <a:t>디자이너</a:t>
+            </a:r>
+            <a:r>
+              <a:rPr dirty="0"/>
+              <a:t> </a:t>
+            </a:r>
+            <a:r>
+              <a:rPr dirty="0" err="1"/>
+              <a:t>등</a:t>
+            </a:r>
+            <a:r>
+              <a:rPr dirty="0"/>
+              <a:t> </a:t>
+            </a:r>
+            <a:r>
+              <a:rPr dirty="0" err="1"/>
+              <a:t>원하는</a:t>
+            </a:r>
+            <a:r>
+              <a:rPr dirty="0"/>
+              <a:t> </a:t>
+            </a:r>
+            <a:r>
+              <a:rPr dirty="0" err="1"/>
+              <a:t>포지션을</a:t>
+            </a:r>
+            <a:r>
+              <a:rPr dirty="0"/>
+              <a:t> </a:t>
+            </a:r>
+            <a:r>
+              <a:rPr dirty="0" err="1"/>
+              <a:t>직접</a:t>
+            </a:r>
+            <a:r>
+              <a:rPr dirty="0"/>
+              <a:t> </a:t>
+            </a:r>
+            <a:r>
+              <a:rPr dirty="0" err="1"/>
+              <a:t>추가하고</a:t>
+            </a:r>
+            <a:r>
+              <a:rPr dirty="0"/>
+              <a:t> </a:t>
+            </a:r>
+            <a:r>
+              <a:rPr dirty="0" err="1"/>
+              <a:t>각각의</a:t>
+            </a:r>
+            <a:r>
+              <a:rPr dirty="0"/>
+              <a:t> </a:t>
+            </a:r>
+            <a:r>
+              <a:rPr dirty="0" err="1"/>
+              <a:t>모집</a:t>
+            </a:r>
+            <a:r>
+              <a:rPr dirty="0"/>
+              <a:t> </a:t>
+            </a:r>
+            <a:r>
+              <a:rPr dirty="0" err="1"/>
+              <a:t>인원</a:t>
+            </a:r>
+            <a:r>
+              <a:rPr dirty="0"/>
+              <a:t> </a:t>
+            </a:r>
+            <a:r>
+              <a:rPr dirty="0" err="1"/>
+              <a:t>설정</a:t>
+            </a:r>
+            <a:r>
+              <a:rPr dirty="0"/>
+              <a:t> </a:t>
+            </a:r>
+            <a:r>
+              <a:rPr dirty="0" err="1"/>
+              <a:t>가능</a:t>
+            </a:r>
+            <a:endParaRPr dirty="0"/>
           </a:p>
           <a:p>
             <a:pPr>
@@ -5412,15 +7125,23 @@
             </a:r>
             <a:r>
               <a:rPr dirty="0" err="1"/>
-              <a:t>리더</a:t>
-            </a:r>
-            <a:r>
-              <a:rPr dirty="0"/>
-              <a:t> </a:t>
-            </a:r>
-            <a:r>
-              <a:rPr dirty="0" err="1"/>
-              <a:t>대시보드</a:t>
+              <a:t>유효성</a:t>
+            </a:r>
+            <a:r>
+              <a:rPr dirty="0"/>
+              <a:t> </a:t>
+            </a:r>
+            <a:r>
+              <a:rPr dirty="0" err="1"/>
+              <a:t>검사</a:t>
+            </a:r>
+            <a:r>
+              <a:rPr dirty="0"/>
+              <a:t> &amp; </a:t>
+            </a:r>
+            <a:r>
+              <a:rPr dirty="0" err="1"/>
+              <a:t>권한</a:t>
             </a:r>
             <a:endParaRPr dirty="0"/>
           </a:p>
@@ -5442,404 +7163,172 @@
             </a:r>
             <a:r>
               <a:rPr dirty="0" err="1"/>
-              <a:t>내가</a:t>
-            </a:r>
-            <a:r>
-              <a:rPr dirty="0"/>
-              <a:t> </a:t>
-            </a:r>
-            <a:r>
-              <a:rPr dirty="0" err="1"/>
-              <a:t>개설한</a:t>
-            </a:r>
-            <a:r>
-              <a:rPr dirty="0"/>
-              <a:t> </a:t>
-            </a:r>
-            <a:r>
-              <a:rPr dirty="0" err="1"/>
-              <a:t>프로젝트의</a:t>
-            </a:r>
-            <a:r>
-              <a:rPr dirty="0"/>
-              <a:t> </a:t>
-            </a:r>
-            <a:r>
-              <a:rPr dirty="0" err="1"/>
-              <a:t>현재</a:t>
-            </a:r>
-            <a:r>
-              <a:rPr dirty="0"/>
-              <a:t> </a:t>
-            </a:r>
-            <a:r>
-              <a:rPr dirty="0" err="1"/>
-              <a:t>팀원</a:t>
-            </a:r>
-            <a:r>
-              <a:rPr dirty="0"/>
-              <a:t> </a:t>
-            </a:r>
-            <a:r>
-              <a:rPr dirty="0" err="1"/>
-              <a:t>수와</a:t>
-            </a:r>
-            <a:r>
-              <a:rPr dirty="0"/>
-              <a:t> </a:t>
-            </a:r>
-            <a:r>
-              <a:rPr dirty="0" err="1"/>
-              <a:t>모집</a:t>
-            </a:r>
-            <a:r>
-              <a:rPr dirty="0"/>
-              <a:t> </a:t>
-            </a:r>
-            <a:r>
-              <a:rPr dirty="0" err="1"/>
-              <a:t>진행</a:t>
-            </a:r>
-            <a:r>
-              <a:rPr dirty="0"/>
-              <a:t> </a:t>
-            </a:r>
-            <a:r>
-              <a:rPr dirty="0" err="1"/>
-              <a:t>상태를</a:t>
-            </a:r>
-            <a:r>
-              <a:rPr dirty="0"/>
-              <a:t> </a:t>
-            </a:r>
-            <a:r>
-              <a:rPr dirty="0" err="1"/>
-              <a:t>한눈에</a:t>
-            </a:r>
-            <a:r>
-              <a:rPr dirty="0"/>
-              <a:t> </a:t>
-            </a:r>
-            <a:r>
-              <a:rPr dirty="0" err="1"/>
-              <a:t>파악</a:t>
+              <a:t>필수</a:t>
+            </a:r>
+            <a:r>
+              <a:rPr dirty="0"/>
+              <a:t> </a:t>
+            </a:r>
+            <a:r>
+              <a:rPr dirty="0" err="1"/>
+              <a:t>항목</a:t>
+            </a:r>
+            <a:r>
+              <a:rPr dirty="0"/>
+              <a:t>(</a:t>
+            </a:r>
+            <a:r>
+              <a:rPr dirty="0" err="1"/>
+              <a:t>제목</a:t>
+            </a:r>
+            <a:r>
+              <a:rPr dirty="0"/>
+              <a:t>, </a:t>
+            </a:r>
+            <a:r>
+              <a:rPr dirty="0" err="1"/>
+              <a:t>인원수</a:t>
+            </a:r>
+            <a:r>
+              <a:rPr dirty="0"/>
+              <a:t>, </a:t>
+            </a:r>
+            <a:r>
+              <a:rPr dirty="0" err="1"/>
+              <a:t>마감일</a:t>
+            </a:r>
+            <a:r>
+              <a:rPr dirty="0"/>
+              <a:t>) </a:t>
+            </a:r>
+            <a:r>
+              <a:rPr dirty="0" err="1"/>
+              <a:t>체크</a:t>
+            </a:r>
+            <a:r>
+              <a:rPr dirty="0"/>
+              <a:t> </a:t>
+            </a:r>
+            <a:r>
+              <a:rPr dirty="0" err="1"/>
+              <a:t>후</a:t>
+            </a:r>
+            <a:r>
+              <a:rPr dirty="0"/>
+              <a:t> </a:t>
+            </a:r>
+            <a:r>
+              <a:rPr dirty="0" err="1"/>
+              <a:t>등록</a:t>
+            </a:r>
+            <a:r>
+              <a:rPr dirty="0"/>
+              <a:t> </a:t>
+            </a:r>
+            <a:r>
+              <a:rPr dirty="0" err="1"/>
+              <a:t>완료</a:t>
+            </a:r>
+            <a:r>
+              <a:rPr dirty="0"/>
+              <a:t> </a:t>
+            </a:r>
+            <a:r>
+              <a:rPr dirty="0" err="1"/>
+              <a:t>시</a:t>
+            </a:r>
+            <a:r>
+              <a:rPr dirty="0"/>
+              <a:t> </a:t>
+            </a:r>
+            <a:r>
+              <a:rPr dirty="0" err="1"/>
+              <a:t>작성자는</a:t>
+            </a:r>
+            <a:r>
+              <a:rPr dirty="0"/>
+              <a:t> </a:t>
+            </a:r>
+            <a:r>
+              <a:rPr dirty="0" err="1"/>
+              <a:t>자동으로</a:t>
+            </a:r>
+            <a:r>
+              <a:rPr dirty="0"/>
+              <a:t> </a:t>
+            </a:r>
+            <a:r>
+              <a:rPr dirty="0" err="1"/>
+              <a:t>해당</a:t>
+            </a:r>
+            <a:r>
+              <a:rPr dirty="0"/>
+              <a:t> </a:t>
+            </a:r>
+            <a:r>
+              <a:rPr dirty="0" err="1"/>
+              <a:t>팀의</a:t>
+            </a:r>
+            <a:r>
+              <a:rPr dirty="0"/>
+              <a:t> </a:t>
+            </a:r>
+            <a:r>
+              <a:rPr dirty="0" err="1"/>
+              <a:t>LEADER로</a:t>
+            </a:r>
+            <a:r>
+              <a:rPr dirty="0"/>
+              <a:t> </a:t>
+            </a:r>
+            <a:r>
+              <a:rPr dirty="0" err="1"/>
+              <a:t>지정</a:t>
             </a:r>
             <a:endParaRPr dirty="0"/>
           </a:p>
-          <a:p>
-            <a:pPr>
-              <a:spcBef>
-                <a:spcPts val="1000"/>
-              </a:spcBef>
-              <a:defRPr sz="1250" b="1">
-                <a:solidFill>
-                  <a:srgbClr val="1E293B"/>
-                </a:solidFill>
-                <a:latin typeface="Malgun Gothic"/>
-              </a:defRPr>
-            </a:pPr>
-            <a:r>
-              <a:rPr dirty="0"/>
-              <a:t>• </a:t>
-            </a:r>
-            <a:r>
-              <a:rPr dirty="0" err="1"/>
-              <a:t>지원자</a:t>
-            </a:r>
-            <a:r>
-              <a:rPr dirty="0"/>
-              <a:t> </a:t>
-            </a:r>
-            <a:r>
-              <a:rPr dirty="0" err="1"/>
-              <a:t>검토</a:t>
-            </a:r>
-            <a:r>
-              <a:rPr dirty="0"/>
-              <a:t> </a:t>
-            </a:r>
-            <a:r>
-              <a:rPr dirty="0" err="1"/>
-              <a:t>카드</a:t>
-            </a:r>
-            <a:endParaRPr dirty="0"/>
-          </a:p>
-          <a:p>
-            <a:pPr>
-              <a:spcBef>
-                <a:spcPts val="200"/>
-              </a:spcBef>
-              <a:defRPr sz="1100">
-                <a:solidFill>
-                  <a:srgbClr val="334155"/>
-                </a:solidFill>
-                <a:latin typeface="Malgun Gothic"/>
-              </a:defRPr>
-            </a:pPr>
-            <a:r>
-              <a:rPr dirty="0"/>
-              <a:t>  </a:t>
-            </a:r>
-            <a:r>
-              <a:rPr dirty="0" err="1"/>
-              <a:t>지원자의</a:t>
-            </a:r>
-            <a:r>
-              <a:rPr dirty="0"/>
-              <a:t> u-SAINT </a:t>
-            </a:r>
-            <a:r>
-              <a:rPr dirty="0" err="1"/>
-              <a:t>실명</a:t>
-            </a:r>
-            <a:r>
-              <a:rPr dirty="0"/>
-              <a:t>, </a:t>
-            </a:r>
-            <a:r>
-              <a:rPr dirty="0" err="1"/>
-              <a:t>학과</a:t>
-            </a:r>
-            <a:r>
-              <a:rPr dirty="0"/>
-              <a:t>, </a:t>
-            </a:r>
-            <a:r>
-              <a:rPr dirty="0" err="1"/>
-              <a:t>학년</a:t>
-            </a:r>
-            <a:r>
-              <a:rPr dirty="0"/>
-              <a:t>, </a:t>
-            </a:r>
-            <a:r>
-              <a:rPr dirty="0" err="1"/>
-              <a:t>희망</a:t>
-            </a:r>
-            <a:r>
-              <a:rPr dirty="0"/>
-              <a:t> </a:t>
-            </a:r>
-            <a:r>
-              <a:rPr dirty="0" err="1"/>
-              <a:t>포지션</a:t>
-            </a:r>
-            <a:r>
-              <a:rPr dirty="0"/>
-              <a:t>, </a:t>
-            </a:r>
-            <a:r>
-              <a:rPr dirty="0" err="1"/>
-              <a:t>지원</a:t>
-            </a:r>
-            <a:r>
-              <a:rPr dirty="0"/>
-              <a:t> </a:t>
-            </a:r>
-            <a:r>
-              <a:rPr dirty="0" err="1"/>
-              <a:t>메시지를</a:t>
-            </a:r>
-            <a:r>
-              <a:rPr dirty="0"/>
-              <a:t> </a:t>
-            </a:r>
-            <a:r>
-              <a:rPr dirty="0" err="1"/>
-              <a:t>카드로</a:t>
-            </a:r>
-            <a:r>
-              <a:rPr dirty="0"/>
-              <a:t> </a:t>
-            </a:r>
-            <a:r>
-              <a:rPr dirty="0" err="1"/>
-              <a:t>직관적</a:t>
-            </a:r>
-            <a:r>
-              <a:rPr dirty="0"/>
-              <a:t> </a:t>
-            </a:r>
-            <a:r>
-              <a:rPr dirty="0" err="1"/>
-              <a:t>제공</a:t>
-            </a:r>
-            <a:endParaRPr dirty="0"/>
-          </a:p>
-          <a:p>
-            <a:pPr>
-              <a:spcBef>
-                <a:spcPts val="1000"/>
-              </a:spcBef>
-              <a:defRPr sz="1250" b="1">
-                <a:solidFill>
-                  <a:srgbClr val="1E293B"/>
-                </a:solidFill>
-                <a:latin typeface="Malgun Gothic"/>
-              </a:defRPr>
-            </a:pPr>
-            <a:r>
-              <a:rPr dirty="0"/>
-              <a:t>• </a:t>
-            </a:r>
-            <a:r>
-              <a:rPr dirty="0" err="1"/>
-              <a:t>원클릭</a:t>
-            </a:r>
-            <a:r>
-              <a:rPr dirty="0"/>
-              <a:t> </a:t>
-            </a:r>
-            <a:r>
-              <a:rPr dirty="0" err="1"/>
-              <a:t>수락</a:t>
-            </a:r>
-            <a:r>
-              <a:rPr dirty="0"/>
-              <a:t>/</a:t>
-            </a:r>
-            <a:r>
-              <a:rPr dirty="0" err="1"/>
-              <a:t>거절</a:t>
-            </a:r>
-            <a:endParaRPr dirty="0"/>
-          </a:p>
-          <a:p>
-            <a:pPr>
-              <a:spcBef>
-                <a:spcPts val="200"/>
-              </a:spcBef>
-              <a:defRPr sz="1100">
-                <a:solidFill>
-                  <a:srgbClr val="334155"/>
-                </a:solidFill>
-                <a:latin typeface="Malgun Gothic"/>
-              </a:defRPr>
-            </a:pPr>
-            <a:r>
-              <a:rPr dirty="0"/>
-              <a:t>  [</a:t>
-            </a:r>
-            <a:r>
-              <a:rPr dirty="0" err="1"/>
-              <a:t>수락</a:t>
-            </a:r>
-            <a:r>
-              <a:rPr dirty="0"/>
-              <a:t>] </a:t>
-            </a:r>
-            <a:r>
-              <a:rPr dirty="0" err="1"/>
-              <a:t>클릭</a:t>
-            </a:r>
-            <a:r>
-              <a:rPr dirty="0"/>
-              <a:t> </a:t>
-            </a:r>
-            <a:r>
-              <a:rPr dirty="0" err="1"/>
-              <a:t>시</a:t>
-            </a:r>
-            <a:r>
-              <a:rPr dirty="0"/>
-              <a:t> </a:t>
-            </a:r>
-            <a:r>
-              <a:rPr dirty="0" err="1"/>
-              <a:t>즉시</a:t>
-            </a:r>
-            <a:r>
-              <a:rPr dirty="0"/>
-              <a:t> </a:t>
-            </a:r>
-            <a:r>
-              <a:rPr dirty="0" err="1"/>
-              <a:t>정식</a:t>
-            </a:r>
-            <a:r>
-              <a:rPr dirty="0"/>
-              <a:t> </a:t>
-            </a:r>
-            <a:r>
-              <a:rPr dirty="0" err="1"/>
-              <a:t>팀원으로</a:t>
-            </a:r>
-            <a:r>
-              <a:rPr dirty="0"/>
-              <a:t> </a:t>
-            </a:r>
-            <a:r>
-              <a:rPr dirty="0" err="1"/>
-              <a:t>등록되며</a:t>
-            </a:r>
-            <a:r>
-              <a:rPr dirty="0"/>
-              <a:t>, </a:t>
-            </a:r>
-            <a:r>
-              <a:rPr dirty="0" err="1"/>
-              <a:t>정원이</a:t>
-            </a:r>
-            <a:r>
-              <a:rPr dirty="0"/>
-              <a:t> </a:t>
-            </a:r>
-            <a:r>
-              <a:rPr dirty="0" err="1"/>
-              <a:t>모두</a:t>
-            </a:r>
-            <a:r>
-              <a:rPr dirty="0"/>
-              <a:t> </a:t>
-            </a:r>
-            <a:r>
-              <a:rPr dirty="0" err="1"/>
-              <a:t>차면</a:t>
-            </a:r>
-            <a:r>
-              <a:rPr dirty="0"/>
-              <a:t> </a:t>
-            </a:r>
-            <a:r>
-              <a:rPr dirty="0" err="1"/>
-              <a:t>공고가</a:t>
-            </a:r>
-            <a:r>
-              <a:rPr dirty="0"/>
-              <a:t> </a:t>
-            </a:r>
-            <a:r>
-              <a:rPr dirty="0" err="1"/>
-              <a:t>자동으로</a:t>
-            </a:r>
-            <a:r>
-              <a:rPr dirty="0"/>
-              <a:t> </a:t>
-            </a:r>
-            <a:r>
-              <a:rPr dirty="0" err="1"/>
-              <a:t>모집</a:t>
-            </a:r>
-            <a:r>
-              <a:rPr dirty="0"/>
-              <a:t> </a:t>
-            </a:r>
-            <a:r>
-              <a:rPr dirty="0" err="1"/>
-              <a:t>마감</a:t>
-            </a:r>
-            <a:r>
-              <a:rPr dirty="0"/>
-              <a:t> </a:t>
-            </a:r>
-            <a:r>
-              <a:rPr dirty="0" err="1"/>
-              <a:t>처리됨</a:t>
-            </a:r>
-            <a:endParaRPr dirty="0"/>
-          </a:p>
-        </p:txBody>
-      </p:sp>
+        </p:txBody>
+      </p:sp>
+      <p:pic>
+        <p:nvPicPr>
+          <p:cNvPr id="14" name="Picture 13">
+            <a:extLst>
+              <a:ext uri="{FF2B5EF4-FFF2-40B4-BE49-F238E27FC236}">
+                <a16:creationId xmlns:a16="http://schemas.microsoft.com/office/drawing/2014/main" id="{1E3921AF-CBF5-3E00-5529-DD976D17F65E}"/>
+              </a:ext>
+            </a:extLst>
+          </p:cNvPr>
+          <p:cNvPicPr>
+            <a:picLocks noChangeAspect="1"/>
+          </p:cNvPicPr>
+          <p:nvPr/>
+        </p:nvPicPr>
+        <p:blipFill>
+          <a:blip r:embed="rId2"/>
+          <a:stretch>
+            <a:fillRect/>
+          </a:stretch>
+        </p:blipFill>
+        <p:spPr>
+          <a:xfrm>
+            <a:off x="885821" y="2174156"/>
+            <a:ext cx="3257558" cy="3137962"/>
+          </a:xfrm>
+          <a:prstGeom prst="rect">
+            <a:avLst/>
+          </a:prstGeom>
+          <a:ln>
+            <a:noFill/>
+          </a:ln>
+          <a:effectLst>
+            <a:outerShdw blurRad="292100" dist="139700" dir="2700000" algn="tl" rotWithShape="0">
+              <a:srgbClr val="333333">
+                <a:alpha val="65000"/>
+              </a:srgbClr>
+            </a:outerShdw>
+          </a:effectLst>
+        </p:spPr>
+      </p:pic>
     </p:spTree>
   </p:cSld>
   <p:clrMapOvr>
@@ -5896,7 +7385,56 @@
               </a:defRPr>
             </a:pPr>
             <a:r>
-              <a:t>3. 시스템 설계 - (7) 마이페이지 [응웬치롱]</a:t>
+              <a:rPr dirty="0"/>
+              <a:t>3. </a:t>
+            </a:r>
+            <a:r>
+              <a:rPr dirty="0" err="1"/>
+              <a:t>시스템</a:t>
+            </a:r>
+            <a:r>
+              <a:rPr dirty="0"/>
+              <a:t> </a:t>
+            </a:r>
+            <a:r>
+              <a:rPr dirty="0" err="1"/>
+              <a:t>설계</a:t>
+            </a:r>
+            <a:r>
+              <a:rPr dirty="0"/>
+              <a:t> - (6) </a:t>
+            </a:r>
+            <a:r>
+              <a:rPr dirty="0" err="1"/>
+              <a:t>그룹</a:t>
+            </a:r>
+            <a:r>
+              <a:rPr dirty="0"/>
+              <a:t> </a:t>
+            </a:r>
+            <a:r>
+              <a:rPr dirty="0" err="1"/>
+              <a:t>관리</a:t>
+            </a:r>
+            <a:r>
+              <a:rPr dirty="0"/>
+              <a:t> </a:t>
+            </a:r>
+            <a:r>
+              <a:rPr dirty="0" err="1"/>
+              <a:t>워크스페이스</a:t>
+            </a:r>
+            <a:r>
+              <a:rPr dirty="0"/>
+              <a:t> [</a:t>
+            </a:r>
+            <a:r>
+              <a:rPr dirty="0" err="1"/>
+              <a:t>응오후인트</a:t>
+            </a:r>
+            <a:r>
+              <a:rPr dirty="0"/>
+              <a:t>]</a:t>
             </a:r>
           </a:p>
         </p:txBody>
@@ -5909,7 +7447,7 @@
         </p:nvSpPr>
         <p:spPr>
           <a:xfrm>
-            <a:off x="457200" y="896112"/>
+            <a:off x="548640" y="1065276"/>
             <a:ext cx="8229600" cy="32004"/>
           </a:xfrm>
           <a:prstGeom prst="rect">
@@ -5978,20 +7516,26 @@
               </a:defRPr>
             </a:pPr>
             <a:r>
-              <a:t>12</a:t>
-            </a:r>
-          </a:p>
-        </p:txBody>
-      </p:sp>
-      <p:sp>
-        <p:nvSpPr>
-          <p:cNvPr id="5" name="Rounded Rectangle 4"/>
+              <a:t>13</a:t>
+            </a:r>
+          </a:p>
+        </p:txBody>
+      </p:sp>
+      <p:sp>
+        <p:nvSpPr>
+          <p:cNvPr id="17" name="Rounded Rectangle 16">
+            <a:extLst>
+              <a:ext uri="{FF2B5EF4-FFF2-40B4-BE49-F238E27FC236}">
+                <a16:creationId xmlns:a16="http://schemas.microsoft.com/office/drawing/2014/main" id="{1260AA5A-E43A-B557-9A22-012769AF5186}"/>
+              </a:ext>
+            </a:extLst>
+          </p:cNvPr>
           <p:cNvSpPr/>
           <p:nvPr/>
         </p:nvSpPr>
         <p:spPr>
           <a:xfrm>
-            <a:off x="548640" y="1188720"/>
+            <a:off x="439783" y="1321308"/>
             <a:ext cx="3931920" cy="5120640"/>
           </a:xfrm>
           <a:prstGeom prst="roundRect">
@@ -6031,14 +7575,20 @@
       </p:sp>
       <p:sp>
         <p:nvSpPr>
-          <p:cNvPr id="6" name="TextBox 5"/>
+          <p:cNvPr id="18" name="TextBox 17">
+            <a:extLst>
+              <a:ext uri="{FF2B5EF4-FFF2-40B4-BE49-F238E27FC236}">
+                <a16:creationId xmlns:a16="http://schemas.microsoft.com/office/drawing/2014/main" id="{F11DDB01-444A-0FE3-1A1E-45E361AB2053}"/>
+              </a:ext>
+            </a:extLst>
+          </p:cNvPr>
           <p:cNvSpPr txBox="1"/>
           <p:nvPr/>
         </p:nvSpPr>
         <p:spPr>
           <a:xfrm>
-            <a:off x="731520" y="1280160"/>
-            <a:ext cx="3566160" cy="365760"/>
+            <a:off x="622663" y="1412748"/>
+            <a:ext cx="1588897" cy="292388"/>
           </a:xfrm>
           <a:prstGeom prst="rect">
             <a:avLst/>
@@ -6060,297 +7610,43 @@
               </a:defRPr>
             </a:pPr>
             <a:r>
-              <a:t>📱 화면 레이아웃 (Figma)</a:t>
-            </a:r>
-          </a:p>
-        </p:txBody>
-      </p:sp>
-      <p:sp>
-        <p:nvSpPr>
-          <p:cNvPr id="7" name="Rounded Rectangle 6"/>
+              <a:rPr dirty="0"/>
+              <a:t>📱 </a:t>
+            </a:r>
+            <a:r>
+              <a:rPr dirty="0" err="1"/>
+              <a:t>화면</a:t>
+            </a:r>
+            <a:r>
+              <a:rPr dirty="0"/>
+              <a:t> </a:t>
+            </a:r>
+            <a:r>
+              <a:rPr dirty="0" err="1"/>
+              <a:t>레이아웃</a:t>
+            </a:r>
+            <a:r>
+              <a:rPr dirty="0"/>
+              <a:t> </a:t>
+            </a:r>
+          </a:p>
+        </p:txBody>
+      </p:sp>
+      <p:sp>
+        <p:nvSpPr>
+          <p:cNvPr id="21" name="Rounded Rectangle 20">
+            <a:extLst>
+              <a:ext uri="{FF2B5EF4-FFF2-40B4-BE49-F238E27FC236}">
+                <a16:creationId xmlns:a16="http://schemas.microsoft.com/office/drawing/2014/main" id="{F1271CAE-D1C3-475B-D0E4-E04095CF0CCE}"/>
+              </a:ext>
+            </a:extLst>
+          </p:cNvPr>
           <p:cNvSpPr/>
           <p:nvPr/>
         </p:nvSpPr>
         <p:spPr>
           <a:xfrm>
-            <a:off x="822960" y="1737360"/>
-            <a:ext cx="3383280" cy="4297680"/>
-          </a:xfrm>
-          <a:prstGeom prst="roundRect">
-            <a:avLst/>
-          </a:prstGeom>
-          <a:solidFill>
-            <a:srgbClr val="FFFFFF"/>
-          </a:solidFill>
-          <a:ln w="12700">
-            <a:solidFill>
-              <a:srgbClr val="E2E8F0"/>
-            </a:solidFill>
-          </a:ln>
-        </p:spPr>
-        <p:style>
-          <a:lnRef idx="1">
-            <a:schemeClr val="accent1"/>
-          </a:lnRef>
-          <a:fillRef idx="3">
-            <a:schemeClr val="accent1"/>
-          </a:fillRef>
-          <a:effectRef idx="2">
-            <a:schemeClr val="accent1"/>
-          </a:effectRef>
-          <a:fontRef idx="minor">
-            <a:schemeClr val="lt1"/>
-          </a:fontRef>
-        </p:style>
-        <p:txBody>
-          <a:bodyPr rtlCol="0" anchor="ctr"/>
-          <a:lstStyle/>
-          <a:p>
-            <a:pPr algn="ctr"/>
-            <a:endParaRPr/>
-          </a:p>
-        </p:txBody>
-      </p:sp>
-      <p:sp>
-        <p:nvSpPr>
-          <p:cNvPr id="8" name="TextBox 7"/>
-          <p:cNvSpPr txBox="1"/>
-          <p:nvPr/>
-        </p:nvSpPr>
-        <p:spPr>
-          <a:xfrm>
-            <a:off x="960120" y="1920240"/>
-            <a:ext cx="3108960" cy="3931920"/>
-          </a:xfrm>
-          <a:prstGeom prst="rect">
-            <a:avLst/>
-          </a:prstGeom>
-          <a:noFill/>
-        </p:spPr>
-        <p:txBody>
-          <a:bodyPr wrap="square">
-            <a:spAutoFit/>
-          </a:bodyPr>
-          <a:lstStyle/>
-          <a:p>
-            <a:pPr>
-              <a:spcBef>
-                <a:spcPts val="300"/>
-              </a:spcBef>
-              <a:defRPr sz="1050">
-                <a:solidFill>
-                  <a:srgbClr val="334155"/>
-                </a:solidFill>
-                <a:latin typeface="Malgun Gothic"/>
-              </a:defRPr>
-            </a:pPr>
-            <a:r>
-              <a:t>👤 학생 프로필 (u-SAINT 동기화)</a:t>
-            </a:r>
-          </a:p>
-          <a:p>
-            <a:pPr>
-              <a:spcBef>
-                <a:spcPts val="300"/>
-              </a:spcBef>
-              <a:defRPr sz="1050">
-                <a:solidFill>
-                  <a:srgbClr val="334155"/>
-                </a:solidFill>
-                <a:latin typeface="Malgun Gothic"/>
-              </a:defRPr>
-            </a:pPr>
-            <a:r>
-              <a:t>─────────────────────────</a:t>
-            </a:r>
-          </a:p>
-          <a:p>
-            <a:pPr>
-              <a:spcBef>
-                <a:spcPts val="300"/>
-              </a:spcBef>
-              <a:defRPr sz="1050">
-                <a:solidFill>
-                  <a:srgbClr val="334155"/>
-                </a:solidFill>
-                <a:latin typeface="Malgun Gothic"/>
-              </a:defRPr>
-            </a:pPr>
-            <a:r>
-              <a:t>이름: 김진호 (20211234) | 학년: 3학년</a:t>
-            </a:r>
-          </a:p>
-          <a:p>
-            <a:pPr>
-              <a:spcBef>
-                <a:spcPts val="300"/>
-              </a:spcBef>
-              <a:defRPr sz="1050">
-                <a:solidFill>
-                  <a:srgbClr val="334155"/>
-                </a:solidFill>
-                <a:latin typeface="Malgun Gothic"/>
-              </a:defRPr>
-            </a:pPr>
-            <a:r>
-              <a:t>소속: IT대학 · 소프트웨어학부</a:t>
-            </a:r>
-          </a:p>
-          <a:p>
-            <a:pPr>
-              <a:spcBef>
-                <a:spcPts val="300"/>
-              </a:spcBef>
-              <a:defRPr sz="1050">
-                <a:solidFill>
-                  <a:srgbClr val="334155"/>
-                </a:solidFill>
-                <a:latin typeface="Malgun Gothic"/>
-              </a:defRPr>
-            </a:pPr>
-            <a:r>
-              <a:t>스킬: React, Next.js, Spring Boot</a:t>
-            </a:r>
-          </a:p>
-          <a:p>
-            <a:pPr>
-              <a:spcBef>
-                <a:spcPts val="300"/>
-              </a:spcBef>
-              <a:defRPr sz="1050">
-                <a:solidFill>
-                  <a:srgbClr val="334155"/>
-                </a:solidFill>
-                <a:latin typeface="Malgun Gothic"/>
-              </a:defRPr>
-            </a:pPr>
-            <a:r>
-              <a:t>─────────────────────────</a:t>
-            </a:r>
-          </a:p>
-          <a:p>
-            <a:pPr>
-              <a:spcBef>
-                <a:spcPts val="300"/>
-              </a:spcBef>
-              <a:defRPr sz="1050">
-                <a:solidFill>
-                  <a:srgbClr val="334155"/>
-                </a:solidFill>
-                <a:latin typeface="Malgun Gothic"/>
-              </a:defRPr>
-            </a:pPr>
-            <a:r>
-              <a:t>[참여 중인 그룹 (2)] | [지원 내역 (3)]</a:t>
-            </a:r>
-          </a:p>
-          <a:p>
-            <a:pPr>
-              <a:spcBef>
-                <a:spcPts val="300"/>
-              </a:spcBef>
-              <a:defRPr sz="1050">
-                <a:solidFill>
-                  <a:srgbClr val="334155"/>
-                </a:solidFill>
-                <a:latin typeface="Malgun Gothic"/>
-              </a:defRPr>
-            </a:pPr>
-            <a:r>
-              <a:t>• Web Programming  [활동중]</a:t>
-            </a:r>
-          </a:p>
-          <a:p>
-            <a:pPr>
-              <a:spcBef>
-                <a:spcPts val="300"/>
-              </a:spcBef>
-              <a:defRPr sz="1050">
-                <a:solidFill>
-                  <a:srgbClr val="334155"/>
-                </a:solidFill>
-                <a:latin typeface="Malgun Gothic"/>
-              </a:defRPr>
-            </a:pPr>
-            <a:r>
-              <a:t>• AI 융합 캡스톤     [활동중]</a:t>
-            </a:r>
-          </a:p>
-          <a:p>
-            <a:pPr>
-              <a:spcBef>
-                <a:spcPts val="300"/>
-              </a:spcBef>
-              <a:defRPr sz="1050">
-                <a:solidFill>
-                  <a:srgbClr val="334155"/>
-                </a:solidFill>
-                <a:latin typeface="Malgun Gothic"/>
-              </a:defRPr>
-            </a:pPr>
-            <a:r>
-              <a:t>─────────────────────────</a:t>
-            </a:r>
-          </a:p>
-          <a:p>
-            <a:pPr>
-              <a:spcBef>
-                <a:spcPts val="300"/>
-              </a:spcBef>
-              <a:defRPr sz="1050">
-                <a:solidFill>
-                  <a:srgbClr val="334155"/>
-                </a:solidFill>
-                <a:latin typeface="Malgun Gothic"/>
-              </a:defRPr>
-            </a:pPr>
-            <a:r>
-              <a:t>📋 내 지원 현황:</a:t>
-            </a:r>
-          </a:p>
-          <a:p>
-            <a:pPr>
-              <a:spcBef>
-                <a:spcPts val="300"/>
-              </a:spcBef>
-              <a:defRPr sz="1050">
-                <a:solidFill>
-                  <a:srgbClr val="334155"/>
-                </a:solidFill>
-                <a:latin typeface="Malgun Gothic"/>
-              </a:defRPr>
-            </a:pPr>
-            <a:r>
-              <a:t>• Spring Study    [ 🟡 검토중 ]</a:t>
-            </a:r>
-          </a:p>
-          <a:p>
-            <a:pPr>
-              <a:spcBef>
-                <a:spcPts val="300"/>
-              </a:spcBef>
-              <a:defRPr sz="1050">
-                <a:solidFill>
-                  <a:srgbClr val="334155"/>
-                </a:solidFill>
-                <a:latin typeface="Malgun Gothic"/>
-              </a:defRPr>
-            </a:pPr>
-            <a:r>
-              <a:t>• Cloud Hackathon [ 🟢 승인됨 ]</a:t>
-            </a:r>
-          </a:p>
-        </p:txBody>
-      </p:sp>
-      <p:sp>
-        <p:nvSpPr>
-          <p:cNvPr id="9" name="Rounded Rectangle 8"/>
-          <p:cNvSpPr/>
-          <p:nvPr/>
-        </p:nvSpPr>
-        <p:spPr>
-          <a:xfrm>
-            <a:off x="4709160" y="1188720"/>
+            <a:off x="4772299" y="1321308"/>
             <a:ext cx="3886200" cy="5120640"/>
           </a:xfrm>
           <a:prstGeom prst="roundRect">
@@ -6390,14 +7686,20 @@
       </p:sp>
       <p:sp>
         <p:nvSpPr>
-          <p:cNvPr id="10" name="TextBox 9"/>
+          <p:cNvPr id="22" name="TextBox 21">
+            <a:extLst>
+              <a:ext uri="{FF2B5EF4-FFF2-40B4-BE49-F238E27FC236}">
+                <a16:creationId xmlns:a16="http://schemas.microsoft.com/office/drawing/2014/main" id="{771B3C16-D089-187A-D13B-633D3D8976A9}"/>
+              </a:ext>
+            </a:extLst>
+          </p:cNvPr>
           <p:cNvSpPr txBox="1"/>
           <p:nvPr/>
         </p:nvSpPr>
         <p:spPr>
           <a:xfrm>
-            <a:off x="4892040" y="1371600"/>
-            <a:ext cx="3520440" cy="3408625"/>
+            <a:off x="4955179" y="1504188"/>
+            <a:ext cx="3520440" cy="3639458"/>
           </a:xfrm>
           <a:prstGeom prst="rect">
             <a:avLst/>
@@ -6419,656 +7721,348 @@
               </a:defRPr>
             </a:pPr>
             <a:r>
-              <a:rPr dirty="0"/>
+              <a:rPr lang="en-KR" dirty="0"/>
               <a:t>📋 </a:t>
             </a:r>
             <a:r>
-              <a:rPr dirty="0" err="1"/>
-              <a:t>담당</a:t>
-            </a:r>
-            <a:r>
-              <a:rPr dirty="0"/>
-              <a:t> </a:t>
-            </a:r>
-            <a:r>
-              <a:rPr dirty="0" err="1"/>
-              <a:t>역할</a:t>
-            </a:r>
-            <a:r>
-              <a:rPr dirty="0"/>
-              <a:t> &amp; </a:t>
-            </a:r>
-            <a:r>
-              <a:rPr dirty="0" err="1"/>
-              <a:t>핵심</a:t>
-            </a:r>
-            <a:r>
-              <a:rPr dirty="0"/>
-              <a:t> </a:t>
-            </a:r>
-            <a:r>
-              <a:rPr dirty="0" err="1"/>
-              <a:t>구현</a:t>
-            </a:r>
-            <a:r>
-              <a:rPr dirty="0"/>
-              <a:t> </a:t>
-            </a:r>
-            <a:r>
-              <a:rPr dirty="0" err="1"/>
-              <a:t>기능</a:t>
-            </a:r>
+              <a:rPr lang="ko-KR" altLang="en-US" dirty="0"/>
+              <a:t>담당 역할 </a:t>
+            </a:r>
+            <a:r>
+              <a:rPr lang="en-US" altLang="ko-KR" dirty="0"/>
+              <a:t>&amp; </a:t>
+            </a:r>
+            <a:r>
+              <a:rPr lang="ko-KR" altLang="en-US" dirty="0"/>
+              <a:t>핵심 구현 기능</a:t>
+            </a:r>
+          </a:p>
+          <a:p>
+            <a:pPr>
+              <a:spcBef>
+                <a:spcPts val="1000"/>
+              </a:spcBef>
+              <a:defRPr sz="1250" b="1">
+                <a:solidFill>
+                  <a:srgbClr val="004AC6"/>
+                </a:solidFill>
+                <a:latin typeface="Malgun Gothic"/>
+              </a:defRPr>
+            </a:pPr>
+            <a:r>
+              <a:rPr lang="en-US" altLang="ko-KR" dirty="0"/>
+              <a:t>• </a:t>
+            </a:r>
+            <a:r>
+              <a:rPr lang="ko-KR" altLang="en-US" dirty="0"/>
+              <a:t>담당 팀원</a:t>
+            </a:r>
+          </a:p>
+          <a:p>
+            <a:pPr>
+              <a:spcBef>
+                <a:spcPts val="200"/>
+              </a:spcBef>
+              <a:defRPr sz="1100">
+                <a:solidFill>
+                  <a:srgbClr val="334155"/>
+                </a:solidFill>
+                <a:latin typeface="Malgun Gothic"/>
+              </a:defRPr>
+            </a:pPr>
+            <a:r>
+              <a:rPr lang="ko-KR" altLang="en-US" dirty="0"/>
+              <a:t>  </a:t>
+            </a:r>
+            <a:r>
+              <a:rPr lang="ko-KR" altLang="en-US" dirty="0" err="1"/>
+              <a:t>응오후인트</a:t>
+            </a:r>
+            <a:endParaRPr lang="ko-KR" altLang="en-US" dirty="0"/>
+          </a:p>
+          <a:p>
+            <a:pPr>
+              <a:spcBef>
+                <a:spcPts val="1000"/>
+              </a:spcBef>
+              <a:defRPr sz="1250" b="1">
+                <a:solidFill>
+                  <a:srgbClr val="1E293B"/>
+                </a:solidFill>
+                <a:latin typeface="Malgun Gothic"/>
+              </a:defRPr>
+            </a:pPr>
+            <a:r>
+              <a:rPr lang="en-US" altLang="ko-KR" dirty="0"/>
+              <a:t>• </a:t>
+            </a:r>
+            <a:r>
+              <a:rPr lang="ko-KR" altLang="en-US" dirty="0"/>
+              <a:t>개발 화면</a:t>
+            </a:r>
+          </a:p>
+          <a:p>
+            <a:pPr>
+              <a:spcBef>
+                <a:spcPts val="200"/>
+              </a:spcBef>
+              <a:defRPr sz="1100">
+                <a:solidFill>
+                  <a:srgbClr val="334155"/>
+                </a:solidFill>
+                <a:latin typeface="Malgun Gothic"/>
+              </a:defRPr>
+            </a:pPr>
+            <a:r>
+              <a:rPr lang="ko-KR" altLang="en-US" dirty="0"/>
+              <a:t>  </a:t>
+            </a:r>
+            <a:r>
+              <a:rPr lang="en-US" dirty="0"/>
+              <a:t>Manage (</a:t>
+            </a:r>
+            <a:r>
+              <a:rPr lang="ko-KR" altLang="en-US" dirty="0"/>
+              <a:t>그룹 관리 및 지원자 심사 페이지</a:t>
+            </a:r>
+            <a:r>
+              <a:rPr lang="en-US" altLang="ko-KR" dirty="0"/>
+              <a:t>)</a:t>
+            </a:r>
+          </a:p>
+          <a:p>
+            <a:pPr>
+              <a:spcBef>
+                <a:spcPts val="1000"/>
+              </a:spcBef>
+              <a:defRPr sz="1250" b="1">
+                <a:solidFill>
+                  <a:srgbClr val="1E293B"/>
+                </a:solidFill>
+                <a:latin typeface="Malgun Gothic"/>
+              </a:defRPr>
+            </a:pPr>
+            <a:r>
+              <a:rPr lang="en-US" altLang="ko-KR" dirty="0"/>
+              <a:t>• </a:t>
+            </a:r>
+            <a:r>
+              <a:rPr lang="ko-KR" altLang="en-US" dirty="0"/>
+              <a:t>리더 대시보드</a:t>
+            </a:r>
+          </a:p>
+          <a:p>
+            <a:pPr>
+              <a:spcBef>
+                <a:spcPts val="200"/>
+              </a:spcBef>
+              <a:defRPr sz="1100">
+                <a:solidFill>
+                  <a:srgbClr val="334155"/>
+                </a:solidFill>
+                <a:latin typeface="Malgun Gothic"/>
+              </a:defRPr>
+            </a:pPr>
+            <a:r>
+              <a:rPr lang="ko-KR" altLang="en-US" dirty="0"/>
+              <a:t>  내가 개설한 프로젝트의 현재 팀원 수와 모집 진행 상태를 한눈에 파악</a:t>
+            </a:r>
+          </a:p>
+          <a:p>
+            <a:pPr>
+              <a:spcBef>
+                <a:spcPts val="1000"/>
+              </a:spcBef>
+              <a:defRPr sz="1250" b="1">
+                <a:solidFill>
+                  <a:srgbClr val="1E293B"/>
+                </a:solidFill>
+                <a:latin typeface="Malgun Gothic"/>
+              </a:defRPr>
+            </a:pPr>
+            <a:r>
+              <a:rPr lang="en-US" altLang="ko-KR" dirty="0"/>
+              <a:t>• </a:t>
+            </a:r>
+            <a:r>
+              <a:rPr lang="ko-KR" altLang="en-US" dirty="0"/>
+              <a:t>지원자 검토 카드</a:t>
+            </a:r>
+          </a:p>
+          <a:p>
+            <a:pPr>
+              <a:spcBef>
+                <a:spcPts val="200"/>
+              </a:spcBef>
+              <a:defRPr sz="1100">
+                <a:solidFill>
+                  <a:srgbClr val="334155"/>
+                </a:solidFill>
+                <a:latin typeface="Malgun Gothic"/>
+              </a:defRPr>
+            </a:pPr>
+            <a:r>
+              <a:rPr lang="ko-KR" altLang="en-US" dirty="0"/>
+              <a:t>  지원자의 </a:t>
+            </a:r>
+            <a:r>
+              <a:rPr lang="en-US" dirty="0"/>
+              <a:t>u-SAINT </a:t>
+            </a:r>
+            <a:r>
+              <a:rPr lang="ko-KR" altLang="en-US" dirty="0"/>
+              <a:t>실명</a:t>
+            </a:r>
+            <a:r>
+              <a:rPr lang="en-US" altLang="ko-KR" dirty="0"/>
+              <a:t>, </a:t>
+            </a:r>
+            <a:r>
+              <a:rPr lang="ko-KR" altLang="en-US" dirty="0"/>
+              <a:t>학과</a:t>
+            </a:r>
+            <a:r>
+              <a:rPr lang="en-US" altLang="ko-KR" dirty="0"/>
+              <a:t>, </a:t>
+            </a:r>
+            <a:r>
+              <a:rPr lang="ko-KR" altLang="en-US" dirty="0"/>
+              <a:t>학년</a:t>
+            </a:r>
+            <a:r>
+              <a:rPr lang="en-US" altLang="ko-KR" dirty="0"/>
+              <a:t>, </a:t>
+            </a:r>
+            <a:r>
+              <a:rPr lang="ko-KR" altLang="en-US" dirty="0"/>
+              <a:t>희망 포지션</a:t>
+            </a:r>
+            <a:r>
+              <a:rPr lang="en-US" altLang="ko-KR" dirty="0"/>
+              <a:t>, </a:t>
+            </a:r>
+            <a:r>
+              <a:rPr lang="ko-KR" altLang="en-US" dirty="0"/>
+              <a:t>지원 메시지를 카드로 직관적 제공</a:t>
+            </a:r>
+          </a:p>
+          <a:p>
+            <a:pPr>
+              <a:spcBef>
+                <a:spcPts val="1000"/>
+              </a:spcBef>
+              <a:defRPr sz="1250" b="1">
+                <a:solidFill>
+                  <a:srgbClr val="1E293B"/>
+                </a:solidFill>
+                <a:latin typeface="Malgun Gothic"/>
+              </a:defRPr>
+            </a:pPr>
+            <a:r>
+              <a:rPr lang="en-US" altLang="ko-KR" dirty="0"/>
+              <a:t>• </a:t>
+            </a:r>
+            <a:r>
+              <a:rPr lang="ko-KR" altLang="en-US" dirty="0" err="1"/>
+              <a:t>원클릭</a:t>
+            </a:r>
+            <a:r>
+              <a:rPr lang="ko-KR" altLang="en-US" dirty="0"/>
+              <a:t> 수락</a:t>
+            </a:r>
+            <a:r>
+              <a:rPr lang="en-US" altLang="ko-KR" dirty="0"/>
+              <a:t>/</a:t>
+            </a:r>
+            <a:r>
+              <a:rPr lang="ko-KR" altLang="en-US" dirty="0"/>
+              <a:t>거절</a:t>
+            </a:r>
+          </a:p>
+          <a:p>
+            <a:pPr>
+              <a:spcBef>
+                <a:spcPts val="200"/>
+              </a:spcBef>
+              <a:defRPr sz="1100">
+                <a:solidFill>
+                  <a:srgbClr val="334155"/>
+                </a:solidFill>
+                <a:latin typeface="Malgun Gothic"/>
+              </a:defRPr>
+            </a:pPr>
+            <a:r>
+              <a:rPr lang="ko-KR" altLang="en-US" dirty="0"/>
+              <a:t>  </a:t>
+            </a:r>
+            <a:r>
+              <a:rPr lang="en-US" altLang="ko-KR" dirty="0"/>
+              <a:t>[</a:t>
+            </a:r>
+            <a:r>
+              <a:rPr lang="ko-KR" altLang="en-US" dirty="0"/>
+              <a:t>수락</a:t>
+            </a:r>
+            <a:r>
+              <a:rPr lang="en-US" altLang="ko-KR" dirty="0"/>
+              <a:t>] </a:t>
+            </a:r>
+            <a:r>
+              <a:rPr lang="ko-KR" altLang="en-US" dirty="0"/>
+              <a:t>클릭 시 즉시 정식 팀원으로 등록되며</a:t>
+            </a:r>
+            <a:r>
+              <a:rPr lang="en-US" altLang="ko-KR" dirty="0"/>
+              <a:t>, </a:t>
+            </a:r>
+            <a:r>
+              <a:rPr lang="ko-KR" altLang="en-US" dirty="0"/>
+              <a:t>정원이 모두 차면 공고가 자동으로 모집 마감 처리됨</a:t>
+            </a:r>
+          </a:p>
+          <a:p>
+            <a:pPr>
+              <a:defRPr sz="1500" b="1">
+                <a:solidFill>
+                  <a:srgbClr val="1E293B"/>
+                </a:solidFill>
+                <a:latin typeface="Malgun Gothic"/>
+              </a:defRPr>
+            </a:pPr>
             <a:endParaRPr dirty="0"/>
           </a:p>
-          <a:p>
-            <a:pPr>
-              <a:spcBef>
-                <a:spcPts val="1000"/>
-              </a:spcBef>
-              <a:defRPr sz="1250" b="1">
-                <a:solidFill>
-                  <a:srgbClr val="004AC6"/>
-                </a:solidFill>
-                <a:latin typeface="Malgun Gothic"/>
-              </a:defRPr>
-            </a:pPr>
-            <a:r>
-              <a:rPr dirty="0"/>
-              <a:t>• </a:t>
-            </a:r>
-            <a:r>
-              <a:rPr dirty="0" err="1"/>
-              <a:t>담당</a:t>
-            </a:r>
-            <a:r>
-              <a:rPr dirty="0"/>
-              <a:t> </a:t>
-            </a:r>
-            <a:r>
-              <a:rPr dirty="0" err="1"/>
-              <a:t>팀원</a:t>
-            </a:r>
-            <a:endParaRPr dirty="0"/>
-          </a:p>
-          <a:p>
-            <a:pPr>
-              <a:spcBef>
-                <a:spcPts val="200"/>
-              </a:spcBef>
-              <a:defRPr sz="1100">
-                <a:solidFill>
-                  <a:srgbClr val="334155"/>
-                </a:solidFill>
-                <a:latin typeface="Malgun Gothic"/>
-              </a:defRPr>
-            </a:pPr>
-            <a:r>
-              <a:rPr dirty="0"/>
-              <a:t>  </a:t>
-            </a:r>
-            <a:r>
-              <a:rPr dirty="0" err="1"/>
-              <a:t>응웬치롱</a:t>
-            </a:r>
-            <a:endParaRPr dirty="0"/>
-          </a:p>
-          <a:p>
-            <a:pPr>
-              <a:spcBef>
-                <a:spcPts val="1000"/>
-              </a:spcBef>
-              <a:defRPr sz="1250" b="1">
-                <a:solidFill>
-                  <a:srgbClr val="1E293B"/>
-                </a:solidFill>
-                <a:latin typeface="Malgun Gothic"/>
-              </a:defRPr>
-            </a:pPr>
-            <a:r>
-              <a:rPr dirty="0"/>
-              <a:t>• </a:t>
-            </a:r>
-            <a:r>
-              <a:rPr dirty="0" err="1"/>
-              <a:t>개발</a:t>
-            </a:r>
-            <a:r>
-              <a:rPr dirty="0"/>
-              <a:t> </a:t>
-            </a:r>
-            <a:r>
-              <a:rPr dirty="0" err="1"/>
-              <a:t>화면</a:t>
-            </a:r>
-            <a:endParaRPr dirty="0"/>
-          </a:p>
-          <a:p>
-            <a:pPr>
-              <a:spcBef>
-                <a:spcPts val="200"/>
-              </a:spcBef>
-              <a:defRPr sz="1100">
-                <a:solidFill>
-                  <a:srgbClr val="334155"/>
-                </a:solidFill>
-                <a:latin typeface="Malgun Gothic"/>
-              </a:defRPr>
-            </a:pPr>
-            <a:r>
-              <a:rPr dirty="0"/>
-              <a:t>  My Page (</a:t>
-            </a:r>
-            <a:r>
-              <a:rPr dirty="0" err="1"/>
-              <a:t>학생</a:t>
-            </a:r>
-            <a:r>
-              <a:rPr dirty="0"/>
-              <a:t> </a:t>
-            </a:r>
-            <a:r>
-              <a:rPr dirty="0" err="1"/>
-              <a:t>개인</a:t>
-            </a:r>
-            <a:r>
-              <a:rPr dirty="0"/>
-              <a:t> </a:t>
-            </a:r>
-            <a:r>
-              <a:rPr dirty="0" err="1"/>
-              <a:t>프로필</a:t>
-            </a:r>
-            <a:r>
-              <a:rPr dirty="0"/>
-              <a:t> </a:t>
-            </a:r>
-            <a:r>
-              <a:rPr dirty="0" err="1"/>
-              <a:t>및</a:t>
-            </a:r>
-            <a:r>
-              <a:rPr dirty="0"/>
-              <a:t> </a:t>
-            </a:r>
-            <a:r>
-              <a:rPr dirty="0" err="1"/>
-              <a:t>활동</a:t>
-            </a:r>
-            <a:r>
-              <a:rPr dirty="0"/>
-              <a:t> </a:t>
-            </a:r>
-            <a:r>
-              <a:rPr dirty="0" err="1"/>
-              <a:t>관리</a:t>
-            </a:r>
-            <a:r>
-              <a:rPr dirty="0"/>
-              <a:t>)</a:t>
-            </a:r>
-          </a:p>
-          <a:p>
-            <a:pPr>
-              <a:spcBef>
-                <a:spcPts val="1000"/>
-              </a:spcBef>
-              <a:defRPr sz="1250" b="1">
-                <a:solidFill>
-                  <a:srgbClr val="1E293B"/>
-                </a:solidFill>
-                <a:latin typeface="Malgun Gothic"/>
-              </a:defRPr>
-            </a:pPr>
-            <a:r>
-              <a:rPr dirty="0"/>
-              <a:t>• </a:t>
-            </a:r>
-            <a:r>
-              <a:rPr dirty="0" err="1"/>
-              <a:t>학적</a:t>
-            </a:r>
-            <a:r>
-              <a:rPr dirty="0"/>
-              <a:t> </a:t>
-            </a:r>
-            <a:r>
-              <a:rPr dirty="0" err="1"/>
-              <a:t>프로필</a:t>
-            </a:r>
-            <a:r>
-              <a:rPr dirty="0"/>
-              <a:t> </a:t>
-            </a:r>
-            <a:r>
-              <a:rPr dirty="0" err="1"/>
-              <a:t>카드</a:t>
-            </a:r>
-            <a:endParaRPr dirty="0"/>
-          </a:p>
-          <a:p>
-            <a:pPr>
-              <a:spcBef>
-                <a:spcPts val="200"/>
-              </a:spcBef>
-              <a:defRPr sz="1100">
-                <a:solidFill>
-                  <a:srgbClr val="334155"/>
-                </a:solidFill>
-                <a:latin typeface="Malgun Gothic"/>
-              </a:defRPr>
-            </a:pPr>
-            <a:r>
-              <a:rPr dirty="0"/>
-              <a:t>  u-SAINT </a:t>
-            </a:r>
-            <a:r>
-              <a:rPr dirty="0" err="1"/>
-              <a:t>연동</a:t>
-            </a:r>
-            <a:r>
-              <a:rPr dirty="0"/>
-              <a:t> </a:t>
-            </a:r>
-            <a:r>
-              <a:rPr dirty="0" err="1"/>
-              <a:t>정보</a:t>
-            </a:r>
-            <a:r>
-              <a:rPr dirty="0"/>
-              <a:t>(</a:t>
-            </a:r>
-            <a:r>
-              <a:rPr dirty="0" err="1"/>
-              <a:t>이름</a:t>
-            </a:r>
-            <a:r>
-              <a:rPr dirty="0"/>
-              <a:t>, </a:t>
-            </a:r>
-            <a:r>
-              <a:rPr dirty="0" err="1"/>
-              <a:t>학번</a:t>
-            </a:r>
-            <a:r>
-              <a:rPr dirty="0"/>
-              <a:t>, </a:t>
-            </a:r>
-            <a:r>
-              <a:rPr dirty="0" err="1"/>
-              <a:t>소속</a:t>
-            </a:r>
-            <a:r>
-              <a:rPr dirty="0"/>
-              <a:t> </a:t>
-            </a:r>
-            <a:r>
-              <a:rPr dirty="0" err="1"/>
-              <a:t>단과대</a:t>
-            </a:r>
-            <a:r>
-              <a:rPr dirty="0"/>
-              <a:t>/</a:t>
-            </a:r>
-            <a:r>
-              <a:rPr dirty="0" err="1"/>
-              <a:t>학부</a:t>
-            </a:r>
-            <a:r>
-              <a:rPr dirty="0"/>
-              <a:t>, </a:t>
-            </a:r>
-            <a:r>
-              <a:rPr dirty="0" err="1"/>
-              <a:t>학년</a:t>
-            </a:r>
-            <a:r>
-              <a:rPr dirty="0"/>
-              <a:t>)</a:t>
-            </a:r>
-            <a:r>
-              <a:rPr dirty="0" err="1"/>
-              <a:t>와</a:t>
-            </a:r>
-            <a:r>
-              <a:rPr dirty="0"/>
-              <a:t> </a:t>
-            </a:r>
-            <a:r>
-              <a:rPr dirty="0" err="1"/>
-              <a:t>보유</a:t>
-            </a:r>
-            <a:r>
-              <a:rPr dirty="0"/>
-              <a:t> </a:t>
-            </a:r>
-            <a:r>
-              <a:rPr dirty="0" err="1"/>
-              <a:t>기술</a:t>
-            </a:r>
-            <a:r>
-              <a:rPr dirty="0"/>
-              <a:t> </a:t>
-            </a:r>
-            <a:r>
-              <a:rPr dirty="0" err="1"/>
-              <a:t>스택</a:t>
-            </a:r>
-            <a:r>
-              <a:rPr dirty="0"/>
-              <a:t> </a:t>
-            </a:r>
-            <a:r>
-              <a:rPr dirty="0" err="1"/>
-              <a:t>뱃지</a:t>
-            </a:r>
-            <a:r>
-              <a:rPr dirty="0"/>
-              <a:t> </a:t>
-            </a:r>
-            <a:r>
-              <a:rPr dirty="0" err="1"/>
-              <a:t>표시</a:t>
-            </a:r>
-            <a:endParaRPr dirty="0"/>
-          </a:p>
-          <a:p>
-            <a:pPr>
-              <a:spcBef>
-                <a:spcPts val="1000"/>
-              </a:spcBef>
-              <a:defRPr sz="1250" b="1">
-                <a:solidFill>
-                  <a:srgbClr val="1E293B"/>
-                </a:solidFill>
-                <a:latin typeface="Malgun Gothic"/>
-              </a:defRPr>
-            </a:pPr>
-            <a:r>
-              <a:rPr dirty="0"/>
-              <a:t>• </a:t>
-            </a:r>
-            <a:r>
-              <a:rPr dirty="0" err="1"/>
-              <a:t>참여</a:t>
-            </a:r>
-            <a:r>
-              <a:rPr dirty="0"/>
-              <a:t> </a:t>
-            </a:r>
-            <a:r>
-              <a:rPr dirty="0" err="1"/>
-              <a:t>그룹</a:t>
-            </a:r>
-            <a:r>
-              <a:rPr dirty="0"/>
-              <a:t> </a:t>
-            </a:r>
-            <a:r>
-              <a:rPr dirty="0" err="1"/>
-              <a:t>목록</a:t>
-            </a:r>
-            <a:endParaRPr dirty="0"/>
-          </a:p>
-          <a:p>
-            <a:pPr>
-              <a:spcBef>
-                <a:spcPts val="200"/>
-              </a:spcBef>
-              <a:defRPr sz="1100">
-                <a:solidFill>
-                  <a:srgbClr val="334155"/>
-                </a:solidFill>
-                <a:latin typeface="Malgun Gothic"/>
-              </a:defRPr>
-            </a:pPr>
-            <a:r>
-              <a:rPr dirty="0"/>
-              <a:t>  </a:t>
-            </a:r>
-            <a:r>
-              <a:rPr dirty="0" err="1"/>
-              <a:t>내가</a:t>
-            </a:r>
-            <a:r>
-              <a:rPr dirty="0"/>
-              <a:t> </a:t>
-            </a:r>
-            <a:r>
-              <a:rPr dirty="0" err="1"/>
-              <a:t>현재</a:t>
-            </a:r>
-            <a:r>
-              <a:rPr dirty="0"/>
-              <a:t> </a:t>
-            </a:r>
-            <a:r>
-              <a:rPr dirty="0" err="1"/>
-              <a:t>속해</a:t>
-            </a:r>
-            <a:r>
-              <a:rPr dirty="0"/>
-              <a:t> </a:t>
-            </a:r>
-            <a:r>
-              <a:rPr dirty="0" err="1"/>
-              <a:t>있는</a:t>
-            </a:r>
-            <a:r>
-              <a:rPr dirty="0"/>
-              <a:t> </a:t>
-            </a:r>
-            <a:r>
-              <a:rPr dirty="0" err="1"/>
-              <a:t>프로젝트</a:t>
-            </a:r>
-            <a:r>
-              <a:rPr dirty="0"/>
-              <a:t>/</a:t>
-            </a:r>
-            <a:r>
-              <a:rPr dirty="0" err="1"/>
-              <a:t>스터디</a:t>
-            </a:r>
-            <a:r>
-              <a:rPr dirty="0"/>
-              <a:t> </a:t>
-            </a:r>
-            <a:r>
-              <a:rPr dirty="0" err="1"/>
-              <a:t>목록</a:t>
-            </a:r>
-            <a:r>
-              <a:rPr dirty="0"/>
-              <a:t> </a:t>
-            </a:r>
-            <a:r>
-              <a:rPr dirty="0" err="1"/>
-              <a:t>및</a:t>
-            </a:r>
-            <a:r>
-              <a:rPr dirty="0"/>
-              <a:t> </a:t>
-            </a:r>
-            <a:r>
-              <a:rPr dirty="0" err="1"/>
-              <a:t>팀원</a:t>
-            </a:r>
-            <a:r>
-              <a:rPr dirty="0"/>
-              <a:t> </a:t>
-            </a:r>
-            <a:r>
-              <a:rPr dirty="0" err="1"/>
-              <a:t>현황</a:t>
-            </a:r>
-            <a:r>
-              <a:rPr dirty="0"/>
-              <a:t> </a:t>
-            </a:r>
-            <a:r>
-              <a:rPr dirty="0" err="1"/>
-              <a:t>한눈에</a:t>
-            </a:r>
-            <a:r>
-              <a:rPr dirty="0"/>
-              <a:t> </a:t>
-            </a:r>
-            <a:r>
-              <a:rPr dirty="0" err="1"/>
-              <a:t>확인</a:t>
-            </a:r>
-            <a:endParaRPr dirty="0"/>
-          </a:p>
-          <a:p>
-            <a:pPr>
-              <a:spcBef>
-                <a:spcPts val="1000"/>
-              </a:spcBef>
-              <a:defRPr sz="1250" b="1">
-                <a:solidFill>
-                  <a:srgbClr val="1E293B"/>
-                </a:solidFill>
-                <a:latin typeface="Malgun Gothic"/>
-              </a:defRPr>
-            </a:pPr>
-            <a:r>
-              <a:rPr dirty="0"/>
-              <a:t>• </a:t>
-            </a:r>
-            <a:r>
-              <a:rPr dirty="0" err="1"/>
-              <a:t>지원</a:t>
-            </a:r>
-            <a:r>
-              <a:rPr dirty="0"/>
-              <a:t> </a:t>
-            </a:r>
-            <a:r>
-              <a:rPr dirty="0" err="1"/>
-              <a:t>결과</a:t>
-            </a:r>
-            <a:r>
-              <a:rPr dirty="0"/>
-              <a:t> </a:t>
-            </a:r>
-            <a:r>
-              <a:rPr dirty="0" err="1"/>
-              <a:t>실시간</a:t>
-            </a:r>
-            <a:r>
-              <a:rPr dirty="0"/>
-              <a:t> </a:t>
-            </a:r>
-            <a:r>
-              <a:rPr dirty="0" err="1"/>
-              <a:t>추적</a:t>
-            </a:r>
-            <a:endParaRPr dirty="0"/>
-          </a:p>
-          <a:p>
-            <a:pPr>
-              <a:spcBef>
-                <a:spcPts val="200"/>
-              </a:spcBef>
-              <a:defRPr sz="1100">
-                <a:solidFill>
-                  <a:srgbClr val="334155"/>
-                </a:solidFill>
-                <a:latin typeface="Malgun Gothic"/>
-              </a:defRPr>
-            </a:pPr>
-            <a:r>
-              <a:rPr dirty="0"/>
-              <a:t>  </a:t>
-            </a:r>
-            <a:r>
-              <a:rPr dirty="0" err="1"/>
-              <a:t>내가</a:t>
-            </a:r>
-            <a:r>
-              <a:rPr dirty="0"/>
-              <a:t> </a:t>
-            </a:r>
-            <a:r>
-              <a:rPr dirty="0" err="1"/>
-              <a:t>지원한</a:t>
-            </a:r>
-            <a:r>
-              <a:rPr dirty="0"/>
-              <a:t> </a:t>
-            </a:r>
-            <a:r>
-              <a:rPr dirty="0" err="1"/>
-              <a:t>그룹의</a:t>
-            </a:r>
-            <a:r>
-              <a:rPr dirty="0"/>
-              <a:t> </a:t>
-            </a:r>
-            <a:r>
-              <a:rPr dirty="0" err="1"/>
-              <a:t>심사</a:t>
-            </a:r>
-            <a:r>
-              <a:rPr dirty="0"/>
-              <a:t> </a:t>
-            </a:r>
-            <a:r>
-              <a:rPr dirty="0" err="1"/>
-              <a:t>결과를</a:t>
-            </a:r>
-            <a:r>
-              <a:rPr dirty="0"/>
-              <a:t> [</a:t>
-            </a:r>
-            <a:r>
-              <a:rPr dirty="0" err="1"/>
-              <a:t>검토중</a:t>
-            </a:r>
-            <a:r>
-              <a:rPr dirty="0"/>
-              <a:t> (🟡)], [</a:t>
-            </a:r>
-            <a:r>
-              <a:rPr dirty="0" err="1"/>
-              <a:t>승인됨</a:t>
-            </a:r>
-            <a:r>
-              <a:rPr dirty="0"/>
-              <a:t> (🟢)], [</a:t>
-            </a:r>
-            <a:r>
-              <a:rPr dirty="0" err="1"/>
-              <a:t>반려됨</a:t>
-            </a:r>
-            <a:r>
-              <a:rPr dirty="0"/>
-              <a:t> (🔴)] </a:t>
-            </a:r>
-            <a:r>
-              <a:rPr dirty="0" err="1"/>
-              <a:t>뱃지로</a:t>
-            </a:r>
-            <a:r>
-              <a:rPr dirty="0"/>
-              <a:t> </a:t>
-            </a:r>
-            <a:r>
-              <a:rPr dirty="0" err="1"/>
-              <a:t>즉시</a:t>
-            </a:r>
-            <a:r>
-              <a:rPr dirty="0"/>
-              <a:t> </a:t>
-            </a:r>
-            <a:r>
-              <a:rPr dirty="0" err="1"/>
-              <a:t>파악</a:t>
-            </a:r>
-            <a:endParaRPr dirty="0"/>
-          </a:p>
-        </p:txBody>
-      </p:sp>
+        </p:txBody>
+      </p:sp>
+      <p:pic>
+        <p:nvPicPr>
+          <p:cNvPr id="24" name="Picture 23">
+            <a:extLst>
+              <a:ext uri="{FF2B5EF4-FFF2-40B4-BE49-F238E27FC236}">
+                <a16:creationId xmlns:a16="http://schemas.microsoft.com/office/drawing/2014/main" id="{55A6188B-6B84-FBE2-E32E-16F23C3E7768}"/>
+              </a:ext>
+            </a:extLst>
+          </p:cNvPr>
+          <p:cNvPicPr>
+            <a:picLocks noChangeAspect="1"/>
+          </p:cNvPicPr>
+          <p:nvPr/>
+        </p:nvPicPr>
+        <p:blipFill>
+          <a:blip r:embed="rId2"/>
+          <a:stretch>
+            <a:fillRect/>
+          </a:stretch>
+        </p:blipFill>
+        <p:spPr>
+          <a:xfrm>
+            <a:off x="550817" y="2823689"/>
+            <a:ext cx="3709852" cy="1210622"/>
+          </a:xfrm>
+          <a:prstGeom prst="rect">
+            <a:avLst/>
+          </a:prstGeom>
+        </p:spPr>
+      </p:pic>
     </p:spTree>
   </p:cSld>
   <p:clrMapOvr>
@@ -7125,7 +8119,7 @@
               </a:defRPr>
             </a:pPr>
             <a:r>
-              <a:t>3. 시스템 설계 - (8) 데이터베이스 설계 (ERD)</a:t>
+              <a:t>3. 시스템 설계 - (7) 마이페이지 [응웬치롱]</a:t>
             </a:r>
           </a:p>
         </p:txBody>
@@ -7207,7 +8201,1006 @@
               </a:defRPr>
             </a:pPr>
             <a:r>
-              <a:t>13</a:t>
+              <a:t>14</a:t>
+            </a:r>
+          </a:p>
+        </p:txBody>
+      </p:sp>
+      <p:sp>
+        <p:nvSpPr>
+          <p:cNvPr id="5" name="Rounded Rectangle 4"/>
+          <p:cNvSpPr/>
+          <p:nvPr/>
+        </p:nvSpPr>
+        <p:spPr>
+          <a:xfrm>
+            <a:off x="548640" y="1188720"/>
+            <a:ext cx="3931920" cy="5120640"/>
+          </a:xfrm>
+          <a:prstGeom prst="roundRect">
+            <a:avLst/>
+          </a:prstGeom>
+          <a:solidFill>
+            <a:srgbClr val="F5F7FA"/>
+          </a:solidFill>
+          <a:ln w="12700">
+            <a:solidFill>
+              <a:srgbClr val="E2E8F0"/>
+            </a:solidFill>
+          </a:ln>
+        </p:spPr>
+        <p:style>
+          <a:lnRef idx="1">
+            <a:schemeClr val="accent1"/>
+          </a:lnRef>
+          <a:fillRef idx="3">
+            <a:schemeClr val="accent1"/>
+          </a:fillRef>
+          <a:effectRef idx="2">
+            <a:schemeClr val="accent1"/>
+          </a:effectRef>
+          <a:fontRef idx="minor">
+            <a:schemeClr val="lt1"/>
+          </a:fontRef>
+        </p:style>
+        <p:txBody>
+          <a:bodyPr rtlCol="0" anchor="ctr"/>
+          <a:lstStyle/>
+          <a:p>
+            <a:pPr algn="ctr"/>
+            <a:endParaRPr/>
+          </a:p>
+        </p:txBody>
+      </p:sp>
+      <p:sp>
+        <p:nvSpPr>
+          <p:cNvPr id="6" name="TextBox 5"/>
+          <p:cNvSpPr txBox="1"/>
+          <p:nvPr/>
+        </p:nvSpPr>
+        <p:spPr>
+          <a:xfrm>
+            <a:off x="731520" y="1280160"/>
+            <a:ext cx="1588897" cy="292388"/>
+          </a:xfrm>
+          <a:prstGeom prst="rect">
+            <a:avLst/>
+          </a:prstGeom>
+          <a:noFill/>
+        </p:spPr>
+        <p:txBody>
+          <a:bodyPr wrap="none">
+            <a:spAutoFit/>
+          </a:bodyPr>
+          <a:lstStyle/>
+          <a:p>
+            <a:pPr>
+              <a:defRPr sz="1300" b="1">
+                <a:solidFill>
+                  <a:srgbClr val="004AC6"/>
+                </a:solidFill>
+                <a:latin typeface="Malgun Gothic"/>
+              </a:defRPr>
+            </a:pPr>
+            <a:r>
+              <a:rPr dirty="0"/>
+              <a:t>📱 </a:t>
+            </a:r>
+            <a:r>
+              <a:rPr dirty="0" err="1"/>
+              <a:t>화면</a:t>
+            </a:r>
+            <a:r>
+              <a:rPr dirty="0"/>
+              <a:t> </a:t>
+            </a:r>
+            <a:r>
+              <a:rPr dirty="0" err="1"/>
+              <a:t>레이아웃</a:t>
+            </a:r>
+            <a:r>
+              <a:rPr dirty="0"/>
+              <a:t> </a:t>
+            </a:r>
+          </a:p>
+        </p:txBody>
+      </p:sp>
+      <p:sp>
+        <p:nvSpPr>
+          <p:cNvPr id="9" name="Rounded Rectangle 8"/>
+          <p:cNvSpPr/>
+          <p:nvPr/>
+        </p:nvSpPr>
+        <p:spPr>
+          <a:xfrm>
+            <a:off x="4709160" y="1188720"/>
+            <a:ext cx="3886200" cy="5120640"/>
+          </a:xfrm>
+          <a:prstGeom prst="roundRect">
+            <a:avLst/>
+          </a:prstGeom>
+          <a:solidFill>
+            <a:srgbClr val="F8FAFC"/>
+          </a:solidFill>
+          <a:ln w="12700">
+            <a:solidFill>
+              <a:srgbClr val="E2E8F0"/>
+            </a:solidFill>
+          </a:ln>
+        </p:spPr>
+        <p:style>
+          <a:lnRef idx="1">
+            <a:schemeClr val="accent1"/>
+          </a:lnRef>
+          <a:fillRef idx="3">
+            <a:schemeClr val="accent1"/>
+          </a:fillRef>
+          <a:effectRef idx="2">
+            <a:schemeClr val="accent1"/>
+          </a:effectRef>
+          <a:fontRef idx="minor">
+            <a:schemeClr val="lt1"/>
+          </a:fontRef>
+        </p:style>
+        <p:txBody>
+          <a:bodyPr rtlCol="0" anchor="ctr"/>
+          <a:lstStyle/>
+          <a:p>
+            <a:pPr algn="ctr"/>
+            <a:endParaRPr/>
+          </a:p>
+        </p:txBody>
+      </p:sp>
+      <p:sp>
+        <p:nvSpPr>
+          <p:cNvPr id="10" name="TextBox 9"/>
+          <p:cNvSpPr txBox="1"/>
+          <p:nvPr/>
+        </p:nvSpPr>
+        <p:spPr>
+          <a:xfrm>
+            <a:off x="4892040" y="1371600"/>
+            <a:ext cx="3520440" cy="3408625"/>
+          </a:xfrm>
+          <a:prstGeom prst="rect">
+            <a:avLst/>
+          </a:prstGeom>
+          <a:noFill/>
+        </p:spPr>
+        <p:txBody>
+          <a:bodyPr wrap="square">
+            <a:spAutoFit/>
+          </a:bodyPr>
+          <a:lstStyle/>
+          <a:p>
+            <a:pPr>
+              <a:defRPr sz="1500" b="1">
+                <a:solidFill>
+                  <a:srgbClr val="1E293B"/>
+                </a:solidFill>
+                <a:latin typeface="Malgun Gothic"/>
+              </a:defRPr>
+            </a:pPr>
+            <a:r>
+              <a:rPr dirty="0"/>
+              <a:t>📋 </a:t>
+            </a:r>
+            <a:r>
+              <a:rPr dirty="0" err="1"/>
+              <a:t>담당</a:t>
+            </a:r>
+            <a:r>
+              <a:rPr dirty="0"/>
+              <a:t> </a:t>
+            </a:r>
+            <a:r>
+              <a:rPr dirty="0" err="1"/>
+              <a:t>역할</a:t>
+            </a:r>
+            <a:r>
+              <a:rPr dirty="0"/>
+              <a:t> &amp; </a:t>
+            </a:r>
+            <a:r>
+              <a:rPr dirty="0" err="1"/>
+              <a:t>핵심</a:t>
+            </a:r>
+            <a:r>
+              <a:rPr dirty="0"/>
+              <a:t> </a:t>
+            </a:r>
+            <a:r>
+              <a:rPr dirty="0" err="1"/>
+              <a:t>구현</a:t>
+            </a:r>
+            <a:r>
+              <a:rPr dirty="0"/>
+              <a:t> </a:t>
+            </a:r>
+            <a:r>
+              <a:rPr dirty="0" err="1"/>
+              <a:t>기능</a:t>
+            </a:r>
+            <a:endParaRPr dirty="0"/>
+          </a:p>
+          <a:p>
+            <a:pPr>
+              <a:spcBef>
+                <a:spcPts val="1000"/>
+              </a:spcBef>
+              <a:defRPr sz="1250" b="1">
+                <a:solidFill>
+                  <a:srgbClr val="004AC6"/>
+                </a:solidFill>
+                <a:latin typeface="Malgun Gothic"/>
+              </a:defRPr>
+            </a:pPr>
+            <a:r>
+              <a:rPr dirty="0"/>
+              <a:t>• </a:t>
+            </a:r>
+            <a:r>
+              <a:rPr dirty="0" err="1"/>
+              <a:t>담당</a:t>
+            </a:r>
+            <a:r>
+              <a:rPr dirty="0"/>
+              <a:t> </a:t>
+            </a:r>
+            <a:r>
+              <a:rPr dirty="0" err="1"/>
+              <a:t>팀원</a:t>
+            </a:r>
+            <a:endParaRPr dirty="0"/>
+          </a:p>
+          <a:p>
+            <a:pPr>
+              <a:spcBef>
+                <a:spcPts val="200"/>
+              </a:spcBef>
+              <a:defRPr sz="1100">
+                <a:solidFill>
+                  <a:srgbClr val="334155"/>
+                </a:solidFill>
+                <a:latin typeface="Malgun Gothic"/>
+              </a:defRPr>
+            </a:pPr>
+            <a:r>
+              <a:rPr dirty="0"/>
+              <a:t>  </a:t>
+            </a:r>
+            <a:r>
+              <a:rPr dirty="0" err="1"/>
+              <a:t>응웬치롱</a:t>
+            </a:r>
+            <a:endParaRPr dirty="0"/>
+          </a:p>
+          <a:p>
+            <a:pPr>
+              <a:spcBef>
+                <a:spcPts val="1000"/>
+              </a:spcBef>
+              <a:defRPr sz="1250" b="1">
+                <a:solidFill>
+                  <a:srgbClr val="1E293B"/>
+                </a:solidFill>
+                <a:latin typeface="Malgun Gothic"/>
+              </a:defRPr>
+            </a:pPr>
+            <a:r>
+              <a:rPr dirty="0"/>
+              <a:t>• </a:t>
+            </a:r>
+            <a:r>
+              <a:rPr dirty="0" err="1"/>
+              <a:t>개발</a:t>
+            </a:r>
+            <a:r>
+              <a:rPr dirty="0"/>
+              <a:t> </a:t>
+            </a:r>
+            <a:r>
+              <a:rPr dirty="0" err="1"/>
+              <a:t>화면</a:t>
+            </a:r>
+            <a:endParaRPr dirty="0"/>
+          </a:p>
+          <a:p>
+            <a:pPr>
+              <a:spcBef>
+                <a:spcPts val="200"/>
+              </a:spcBef>
+              <a:defRPr sz="1100">
+                <a:solidFill>
+                  <a:srgbClr val="334155"/>
+                </a:solidFill>
+                <a:latin typeface="Malgun Gothic"/>
+              </a:defRPr>
+            </a:pPr>
+            <a:r>
+              <a:rPr dirty="0"/>
+              <a:t>  My Page (</a:t>
+            </a:r>
+            <a:r>
+              <a:rPr dirty="0" err="1"/>
+              <a:t>학생</a:t>
+            </a:r>
+            <a:r>
+              <a:rPr dirty="0"/>
+              <a:t> </a:t>
+            </a:r>
+            <a:r>
+              <a:rPr dirty="0" err="1"/>
+              <a:t>개인</a:t>
+            </a:r>
+            <a:r>
+              <a:rPr dirty="0"/>
+              <a:t> </a:t>
+            </a:r>
+            <a:r>
+              <a:rPr dirty="0" err="1"/>
+              <a:t>프로필</a:t>
+            </a:r>
+            <a:r>
+              <a:rPr dirty="0"/>
+              <a:t> </a:t>
+            </a:r>
+            <a:r>
+              <a:rPr dirty="0" err="1"/>
+              <a:t>및</a:t>
+            </a:r>
+            <a:r>
+              <a:rPr dirty="0"/>
+              <a:t> </a:t>
+            </a:r>
+            <a:r>
+              <a:rPr dirty="0" err="1"/>
+              <a:t>활동</a:t>
+            </a:r>
+            <a:r>
+              <a:rPr dirty="0"/>
+              <a:t> </a:t>
+            </a:r>
+            <a:r>
+              <a:rPr dirty="0" err="1"/>
+              <a:t>관리</a:t>
+            </a:r>
+            <a:r>
+              <a:rPr dirty="0"/>
+              <a:t>)</a:t>
+            </a:r>
+          </a:p>
+          <a:p>
+            <a:pPr>
+              <a:spcBef>
+                <a:spcPts val="1000"/>
+              </a:spcBef>
+              <a:defRPr sz="1250" b="1">
+                <a:solidFill>
+                  <a:srgbClr val="1E293B"/>
+                </a:solidFill>
+                <a:latin typeface="Malgun Gothic"/>
+              </a:defRPr>
+            </a:pPr>
+            <a:r>
+              <a:rPr dirty="0"/>
+              <a:t>• </a:t>
+            </a:r>
+            <a:r>
+              <a:rPr dirty="0" err="1"/>
+              <a:t>학적</a:t>
+            </a:r>
+            <a:r>
+              <a:rPr dirty="0"/>
+              <a:t> </a:t>
+            </a:r>
+            <a:r>
+              <a:rPr dirty="0" err="1"/>
+              <a:t>프로필</a:t>
+            </a:r>
+            <a:r>
+              <a:rPr dirty="0"/>
+              <a:t> </a:t>
+            </a:r>
+            <a:r>
+              <a:rPr dirty="0" err="1"/>
+              <a:t>카드</a:t>
+            </a:r>
+            <a:endParaRPr dirty="0"/>
+          </a:p>
+          <a:p>
+            <a:pPr>
+              <a:spcBef>
+                <a:spcPts val="200"/>
+              </a:spcBef>
+              <a:defRPr sz="1100">
+                <a:solidFill>
+                  <a:srgbClr val="334155"/>
+                </a:solidFill>
+                <a:latin typeface="Malgun Gothic"/>
+              </a:defRPr>
+            </a:pPr>
+            <a:r>
+              <a:rPr dirty="0"/>
+              <a:t>  u-SAINT </a:t>
+            </a:r>
+            <a:r>
+              <a:rPr dirty="0" err="1"/>
+              <a:t>연동</a:t>
+            </a:r>
+            <a:r>
+              <a:rPr dirty="0"/>
+              <a:t> </a:t>
+            </a:r>
+            <a:r>
+              <a:rPr dirty="0" err="1"/>
+              <a:t>정보</a:t>
+            </a:r>
+            <a:r>
+              <a:rPr dirty="0"/>
+              <a:t>(</a:t>
+            </a:r>
+            <a:r>
+              <a:rPr dirty="0" err="1"/>
+              <a:t>이름</a:t>
+            </a:r>
+            <a:r>
+              <a:rPr dirty="0"/>
+              <a:t>, </a:t>
+            </a:r>
+            <a:r>
+              <a:rPr dirty="0" err="1"/>
+              <a:t>학번</a:t>
+            </a:r>
+            <a:r>
+              <a:rPr dirty="0"/>
+              <a:t>, </a:t>
+            </a:r>
+            <a:r>
+              <a:rPr dirty="0" err="1"/>
+              <a:t>소속</a:t>
+            </a:r>
+            <a:r>
+              <a:rPr dirty="0"/>
+              <a:t> </a:t>
+            </a:r>
+            <a:r>
+              <a:rPr dirty="0" err="1"/>
+              <a:t>단과대</a:t>
+            </a:r>
+            <a:r>
+              <a:rPr dirty="0"/>
+              <a:t>/</a:t>
+            </a:r>
+            <a:r>
+              <a:rPr dirty="0" err="1"/>
+              <a:t>학부</a:t>
+            </a:r>
+            <a:r>
+              <a:rPr dirty="0"/>
+              <a:t>, </a:t>
+            </a:r>
+            <a:r>
+              <a:rPr dirty="0" err="1"/>
+              <a:t>학년</a:t>
+            </a:r>
+            <a:r>
+              <a:rPr dirty="0"/>
+              <a:t>)</a:t>
+            </a:r>
+            <a:r>
+              <a:rPr dirty="0" err="1"/>
+              <a:t>와</a:t>
+            </a:r>
+            <a:r>
+              <a:rPr dirty="0"/>
+              <a:t> </a:t>
+            </a:r>
+            <a:r>
+              <a:rPr dirty="0" err="1"/>
+              <a:t>보유</a:t>
+            </a:r>
+            <a:r>
+              <a:rPr dirty="0"/>
+              <a:t> </a:t>
+            </a:r>
+            <a:r>
+              <a:rPr dirty="0" err="1"/>
+              <a:t>기술</a:t>
+            </a:r>
+            <a:r>
+              <a:rPr dirty="0"/>
+              <a:t> </a:t>
+            </a:r>
+            <a:r>
+              <a:rPr dirty="0" err="1"/>
+              <a:t>스택</a:t>
+            </a:r>
+            <a:r>
+              <a:rPr dirty="0"/>
+              <a:t> </a:t>
+            </a:r>
+            <a:r>
+              <a:rPr dirty="0" err="1"/>
+              <a:t>뱃지</a:t>
+            </a:r>
+            <a:r>
+              <a:rPr dirty="0"/>
+              <a:t> </a:t>
+            </a:r>
+            <a:r>
+              <a:rPr dirty="0" err="1"/>
+              <a:t>표시</a:t>
+            </a:r>
+            <a:endParaRPr dirty="0"/>
+          </a:p>
+          <a:p>
+            <a:pPr>
+              <a:spcBef>
+                <a:spcPts val="1000"/>
+              </a:spcBef>
+              <a:defRPr sz="1250" b="1">
+                <a:solidFill>
+                  <a:srgbClr val="1E293B"/>
+                </a:solidFill>
+                <a:latin typeface="Malgun Gothic"/>
+              </a:defRPr>
+            </a:pPr>
+            <a:r>
+              <a:rPr dirty="0"/>
+              <a:t>• </a:t>
+            </a:r>
+            <a:r>
+              <a:rPr dirty="0" err="1"/>
+              <a:t>참여</a:t>
+            </a:r>
+            <a:r>
+              <a:rPr dirty="0"/>
+              <a:t> </a:t>
+            </a:r>
+            <a:r>
+              <a:rPr dirty="0" err="1"/>
+              <a:t>그룹</a:t>
+            </a:r>
+            <a:r>
+              <a:rPr dirty="0"/>
+              <a:t> </a:t>
+            </a:r>
+            <a:r>
+              <a:rPr dirty="0" err="1"/>
+              <a:t>목록</a:t>
+            </a:r>
+            <a:endParaRPr dirty="0"/>
+          </a:p>
+          <a:p>
+            <a:pPr>
+              <a:spcBef>
+                <a:spcPts val="200"/>
+              </a:spcBef>
+              <a:defRPr sz="1100">
+                <a:solidFill>
+                  <a:srgbClr val="334155"/>
+                </a:solidFill>
+                <a:latin typeface="Malgun Gothic"/>
+              </a:defRPr>
+            </a:pPr>
+            <a:r>
+              <a:rPr dirty="0"/>
+              <a:t>  </a:t>
+            </a:r>
+            <a:r>
+              <a:rPr dirty="0" err="1"/>
+              <a:t>내가</a:t>
+            </a:r>
+            <a:r>
+              <a:rPr dirty="0"/>
+              <a:t> </a:t>
+            </a:r>
+            <a:r>
+              <a:rPr dirty="0" err="1"/>
+              <a:t>현재</a:t>
+            </a:r>
+            <a:r>
+              <a:rPr dirty="0"/>
+              <a:t> </a:t>
+            </a:r>
+            <a:r>
+              <a:rPr dirty="0" err="1"/>
+              <a:t>속해</a:t>
+            </a:r>
+            <a:r>
+              <a:rPr dirty="0"/>
+              <a:t> </a:t>
+            </a:r>
+            <a:r>
+              <a:rPr dirty="0" err="1"/>
+              <a:t>있는</a:t>
+            </a:r>
+            <a:r>
+              <a:rPr dirty="0"/>
+              <a:t> </a:t>
+            </a:r>
+            <a:r>
+              <a:rPr dirty="0" err="1"/>
+              <a:t>프로젝트</a:t>
+            </a:r>
+            <a:r>
+              <a:rPr dirty="0"/>
+              <a:t>/</a:t>
+            </a:r>
+            <a:r>
+              <a:rPr dirty="0" err="1"/>
+              <a:t>스터디</a:t>
+            </a:r>
+            <a:r>
+              <a:rPr dirty="0"/>
+              <a:t> </a:t>
+            </a:r>
+            <a:r>
+              <a:rPr dirty="0" err="1"/>
+              <a:t>목록</a:t>
+            </a:r>
+            <a:r>
+              <a:rPr dirty="0"/>
+              <a:t> </a:t>
+            </a:r>
+            <a:r>
+              <a:rPr dirty="0" err="1"/>
+              <a:t>및</a:t>
+            </a:r>
+            <a:r>
+              <a:rPr dirty="0"/>
+              <a:t> </a:t>
+            </a:r>
+            <a:r>
+              <a:rPr dirty="0" err="1"/>
+              <a:t>팀원</a:t>
+            </a:r>
+            <a:r>
+              <a:rPr dirty="0"/>
+              <a:t> </a:t>
+            </a:r>
+            <a:r>
+              <a:rPr dirty="0" err="1"/>
+              <a:t>현황</a:t>
+            </a:r>
+            <a:r>
+              <a:rPr dirty="0"/>
+              <a:t> </a:t>
+            </a:r>
+            <a:r>
+              <a:rPr dirty="0" err="1"/>
+              <a:t>한눈에</a:t>
+            </a:r>
+            <a:r>
+              <a:rPr dirty="0"/>
+              <a:t> </a:t>
+            </a:r>
+            <a:r>
+              <a:rPr dirty="0" err="1"/>
+              <a:t>확인</a:t>
+            </a:r>
+            <a:endParaRPr dirty="0"/>
+          </a:p>
+          <a:p>
+            <a:pPr>
+              <a:spcBef>
+                <a:spcPts val="1000"/>
+              </a:spcBef>
+              <a:defRPr sz="1250" b="1">
+                <a:solidFill>
+                  <a:srgbClr val="1E293B"/>
+                </a:solidFill>
+                <a:latin typeface="Malgun Gothic"/>
+              </a:defRPr>
+            </a:pPr>
+            <a:r>
+              <a:rPr dirty="0"/>
+              <a:t>• </a:t>
+            </a:r>
+            <a:r>
+              <a:rPr dirty="0" err="1"/>
+              <a:t>지원</a:t>
+            </a:r>
+            <a:r>
+              <a:rPr dirty="0"/>
+              <a:t> </a:t>
+            </a:r>
+            <a:r>
+              <a:rPr dirty="0" err="1"/>
+              <a:t>결과</a:t>
+            </a:r>
+            <a:r>
+              <a:rPr dirty="0"/>
+              <a:t> </a:t>
+            </a:r>
+            <a:r>
+              <a:rPr dirty="0" err="1"/>
+              <a:t>실시간</a:t>
+            </a:r>
+            <a:r>
+              <a:rPr dirty="0"/>
+              <a:t> </a:t>
+            </a:r>
+            <a:r>
+              <a:rPr dirty="0" err="1"/>
+              <a:t>추적</a:t>
+            </a:r>
+            <a:endParaRPr dirty="0"/>
+          </a:p>
+          <a:p>
+            <a:pPr>
+              <a:spcBef>
+                <a:spcPts val="200"/>
+              </a:spcBef>
+              <a:defRPr sz="1100">
+                <a:solidFill>
+                  <a:srgbClr val="334155"/>
+                </a:solidFill>
+                <a:latin typeface="Malgun Gothic"/>
+              </a:defRPr>
+            </a:pPr>
+            <a:r>
+              <a:rPr dirty="0"/>
+              <a:t>  </a:t>
+            </a:r>
+            <a:r>
+              <a:rPr dirty="0" err="1"/>
+              <a:t>내가</a:t>
+            </a:r>
+            <a:r>
+              <a:rPr dirty="0"/>
+              <a:t> </a:t>
+            </a:r>
+            <a:r>
+              <a:rPr dirty="0" err="1"/>
+              <a:t>지원한</a:t>
+            </a:r>
+            <a:r>
+              <a:rPr dirty="0"/>
+              <a:t> </a:t>
+            </a:r>
+            <a:r>
+              <a:rPr dirty="0" err="1"/>
+              <a:t>그룹의</a:t>
+            </a:r>
+            <a:r>
+              <a:rPr dirty="0"/>
+              <a:t> </a:t>
+            </a:r>
+            <a:r>
+              <a:rPr dirty="0" err="1"/>
+              <a:t>심사</a:t>
+            </a:r>
+            <a:r>
+              <a:rPr dirty="0"/>
+              <a:t> </a:t>
+            </a:r>
+            <a:r>
+              <a:rPr dirty="0" err="1"/>
+              <a:t>결과를</a:t>
+            </a:r>
+            <a:r>
+              <a:rPr dirty="0"/>
+              <a:t> [</a:t>
+            </a:r>
+            <a:r>
+              <a:rPr dirty="0" err="1"/>
+              <a:t>검토중</a:t>
+            </a:r>
+            <a:r>
+              <a:rPr dirty="0"/>
+              <a:t> (🟡)], [</a:t>
+            </a:r>
+            <a:r>
+              <a:rPr dirty="0" err="1"/>
+              <a:t>승인됨</a:t>
+            </a:r>
+            <a:r>
+              <a:rPr dirty="0"/>
+              <a:t> (🟢)], [</a:t>
+            </a:r>
+            <a:r>
+              <a:rPr dirty="0" err="1"/>
+              <a:t>반려됨</a:t>
+            </a:r>
+            <a:r>
+              <a:rPr dirty="0"/>
+              <a:t> (🔴)] </a:t>
+            </a:r>
+            <a:r>
+              <a:rPr dirty="0" err="1"/>
+              <a:t>뱃지로</a:t>
+            </a:r>
+            <a:r>
+              <a:rPr dirty="0"/>
+              <a:t> </a:t>
+            </a:r>
+            <a:r>
+              <a:rPr dirty="0" err="1"/>
+              <a:t>즉시</a:t>
+            </a:r>
+            <a:r>
+              <a:rPr dirty="0"/>
+              <a:t> </a:t>
+            </a:r>
+            <a:r>
+              <a:rPr dirty="0" err="1"/>
+              <a:t>파악</a:t>
+            </a:r>
+            <a:endParaRPr dirty="0"/>
+          </a:p>
+        </p:txBody>
+      </p:sp>
+      <p:pic>
+        <p:nvPicPr>
+          <p:cNvPr id="12" name="Picture 11">
+            <a:extLst>
+              <a:ext uri="{FF2B5EF4-FFF2-40B4-BE49-F238E27FC236}">
+                <a16:creationId xmlns:a16="http://schemas.microsoft.com/office/drawing/2014/main" id="{79D0E9DF-FD83-00B9-F5D4-6B8BE9F8C5AE}"/>
+              </a:ext>
+            </a:extLst>
+          </p:cNvPr>
+          <p:cNvPicPr>
+            <a:picLocks noChangeAspect="1"/>
+          </p:cNvPicPr>
+          <p:nvPr/>
+        </p:nvPicPr>
+        <p:blipFill>
+          <a:blip r:embed="rId2"/>
+          <a:stretch>
+            <a:fillRect/>
+          </a:stretch>
+        </p:blipFill>
+        <p:spPr>
+          <a:xfrm>
+            <a:off x="742872" y="1825661"/>
+            <a:ext cx="3543456" cy="3769034"/>
+          </a:xfrm>
+          <a:prstGeom prst="rect">
+            <a:avLst/>
+          </a:prstGeom>
+        </p:spPr>
+      </p:pic>
+    </p:spTree>
+  </p:cSld>
+  <p:clrMapOvr>
+    <a:masterClrMapping/>
+  </p:clrMapOvr>
+</p:sld>
+</file>
+
+<file path=ppt/slides/slide15.xml><?xml version="1.0" encoding="utf-8"?>
+<p:sld xmlns:a="http://schemas.openxmlformats.org/drawingml/2006/main" xmlns:r="http://schemas.openxmlformats.org/officeDocument/2006/relationships" xmlns:p="http://schemas.openxmlformats.org/presentationml/2006/main">
+  <p:cSld>
+    <p:spTree>
+      <p:nvGrpSpPr>
+        <p:cNvPr id="1" name=""/>
+        <p:cNvGrpSpPr/>
+        <p:nvPr/>
+      </p:nvGrpSpPr>
+      <p:grpSpPr>
+        <a:xfrm>
+          <a:off x="0" y="0"/>
+          <a:ext cx="0" cy="0"/>
+          <a:chOff x="0" y="0"/>
+          <a:chExt cx="0" cy="0"/>
+        </a:xfrm>
+      </p:grpSpPr>
+      <p:sp>
+        <p:nvSpPr>
+          <p:cNvPr id="2" name="TextBox 1"/>
+          <p:cNvSpPr txBox="1"/>
+          <p:nvPr/>
+        </p:nvSpPr>
+        <p:spPr>
+          <a:xfrm>
+            <a:off x="640080" y="201168"/>
+            <a:ext cx="7863840" cy="640080"/>
+          </a:xfrm>
+          <a:prstGeom prst="rect">
+            <a:avLst/>
+          </a:prstGeom>
+          <a:noFill/>
+        </p:spPr>
+        <p:txBody>
+          <a:bodyPr wrap="square" lIns="0" tIns="0" rIns="0" bIns="0">
+            <a:spAutoFit/>
+          </a:bodyPr>
+          <a:lstStyle/>
+          <a:p>
+            <a:pPr>
+              <a:defRPr sz="2800" b="1">
+                <a:solidFill>
+                  <a:srgbClr val="1E293B"/>
+                </a:solidFill>
+                <a:latin typeface="Malgun Gothic"/>
+              </a:defRPr>
+            </a:pPr>
+            <a:r>
+              <a:t>3. 시스템 설계 - (8) 데이터베이스 설계 (ERD)</a:t>
+            </a:r>
+          </a:p>
+        </p:txBody>
+      </p:sp>
+      <p:sp>
+        <p:nvSpPr>
+          <p:cNvPr id="3" name="Rectangle 2"/>
+          <p:cNvSpPr/>
+          <p:nvPr/>
+        </p:nvSpPr>
+        <p:spPr>
+          <a:xfrm>
+            <a:off x="457200" y="896112"/>
+            <a:ext cx="8229600" cy="32004"/>
+          </a:xfrm>
+          <a:prstGeom prst="rect">
+            <a:avLst/>
+          </a:prstGeom>
+          <a:solidFill>
+            <a:srgbClr val="E46C0A"/>
+          </a:solidFill>
+          <a:ln>
+            <a:solidFill>
+              <a:srgbClr val="E46C0A"/>
+            </a:solidFill>
+          </a:ln>
+        </p:spPr>
+        <p:style>
+          <a:lnRef idx="1">
+            <a:schemeClr val="accent1"/>
+          </a:lnRef>
+          <a:fillRef idx="3">
+            <a:schemeClr val="accent1"/>
+          </a:fillRef>
+          <a:effectRef idx="2">
+            <a:schemeClr val="accent1"/>
+          </a:effectRef>
+          <a:fontRef idx="minor">
+            <a:schemeClr val="lt1"/>
+          </a:fontRef>
+        </p:style>
+        <p:txBody>
+          <a:bodyPr rtlCol="0" anchor="ctr"/>
+          <a:lstStyle/>
+          <a:p>
+            <a:pPr algn="ctr"/>
+            <a:endParaRPr/>
+          </a:p>
+        </p:txBody>
+      </p:sp>
+      <p:sp>
+        <p:nvSpPr>
+          <p:cNvPr id="4" name="TextBox 3"/>
+          <p:cNvSpPr txBox="1"/>
+          <p:nvPr/>
+        </p:nvSpPr>
+        <p:spPr>
+          <a:xfrm>
+            <a:off x="8412480" y="6492240"/>
+            <a:ext cx="548640" cy="274320"/>
+          </a:xfrm>
+          <a:prstGeom prst="rect">
+            <a:avLst/>
+          </a:prstGeom>
+          <a:noFill/>
+        </p:spPr>
+        <p:txBody>
+          <a:bodyPr wrap="none" lIns="0" tIns="0" rIns="0" bIns="0">
+            <a:spAutoFit/>
+          </a:bodyPr>
+          <a:lstStyle/>
+          <a:p>
+            <a:pPr algn="r">
+              <a:defRPr sz="1100">
+                <a:solidFill>
+                  <a:srgbClr val="64748B"/>
+                </a:solidFill>
+                <a:latin typeface="Malgun Gothic"/>
+              </a:defRPr>
+            </a:pPr>
+            <a:r>
+              <a:t>15</a:t>
             </a:r>
           </a:p>
         </p:txBody>
@@ -14902,10 +16895,10 @@
       </p:sp>
       <p:pic>
         <p:nvPicPr>
-          <p:cNvPr id="16" name="Picture 15">
+          <p:cNvPr id="12" name="Picture 11">
             <a:extLst>
               <a:ext uri="{FF2B5EF4-FFF2-40B4-BE49-F238E27FC236}">
-                <a16:creationId xmlns:a16="http://schemas.microsoft.com/office/drawing/2014/main" id="{4D6EE5AC-3ACE-1D68-1306-6FF8B5188C5A}"/>
+                <a16:creationId xmlns:a16="http://schemas.microsoft.com/office/drawing/2014/main" id="{911617C3-1DAB-AEEB-1603-1A9001C762A5}"/>
               </a:ext>
             </a:extLst>
           </p:cNvPr>
@@ -14922,36 +16915,12 @@
         </p:blipFill>
         <p:spPr>
           <a:xfrm>
-            <a:off x="640080" y="1676780"/>
-            <a:ext cx="3791201" cy="4219958"/>
-          </a:xfrm>
-          <a:prstGeom prst="roundRect">
-            <a:avLst>
-              <a:gd name="adj" fmla="val 16667"/>
-            </a:avLst>
+            <a:off x="574953" y="1782207"/>
+            <a:ext cx="3884091" cy="3908589"/>
+          </a:xfrm>
+          <a:prstGeom prst="rect">
+            <a:avLst/>
           </a:prstGeom>
-          <a:ln>
-            <a:noFill/>
-          </a:ln>
-          <a:effectLst>
-            <a:outerShdw blurRad="76200" dist="38100" dir="7800000" algn="tl" rotWithShape="0">
-              <a:srgbClr val="000000">
-                <a:alpha val="40000"/>
-              </a:srgbClr>
-            </a:outerShdw>
-          </a:effectLst>
-          <a:scene3d>
-            <a:camera prst="orthographicFront"/>
-            <a:lightRig rig="contrasting" dir="t">
-              <a:rot lat="0" lon="0" rev="4200000"/>
-            </a:lightRig>
-          </a:scene3d>
-          <a:sp3d prstMaterial="plastic">
-            <a:bevelT w="381000" h="114300" prst="relaxedInset"/>
-            <a:contourClr>
-              <a:srgbClr val="969696"/>
-            </a:contourClr>
-          </a:sp3d>
         </p:spPr>
       </p:pic>
     </p:spTree>
@@ -15155,7 +17124,7 @@
         <p:spPr>
           <a:xfrm>
             <a:off x="548640" y="1188720"/>
-            <a:ext cx="3931920" cy="5120640"/>
+            <a:ext cx="4160520" cy="5468112"/>
           </a:xfrm>
           <a:prstGeom prst="roundRect">
             <a:avLst/>
@@ -15253,7 +17222,7 @@
         </p:nvSpPr>
         <p:spPr>
           <a:xfrm>
-            <a:off x="4709160" y="1188720"/>
+            <a:off x="4906832" y="1188720"/>
             <a:ext cx="3886200" cy="5120640"/>
           </a:xfrm>
           <a:prstGeom prst="roundRect">
@@ -15299,7 +17268,7 @@
         </p:nvSpPr>
         <p:spPr>
           <a:xfrm>
-            <a:off x="4892040" y="1371600"/>
+            <a:off x="5074920" y="1479476"/>
             <a:ext cx="3520440" cy="3577903"/>
           </a:xfrm>
           <a:prstGeom prst="rect">
@@ -15890,10 +17859,10 @@
       </p:sp>
       <p:pic>
         <p:nvPicPr>
-          <p:cNvPr id="8" name="Picture 7">
+          <p:cNvPr id="11" name="Picture 10">
             <a:extLst>
               <a:ext uri="{FF2B5EF4-FFF2-40B4-BE49-F238E27FC236}">
-                <a16:creationId xmlns:a16="http://schemas.microsoft.com/office/drawing/2014/main" id="{637ACA4F-46A2-B4E8-7340-3EE83B3A07B6}"/>
+                <a16:creationId xmlns:a16="http://schemas.microsoft.com/office/drawing/2014/main" id="{152E5328-D3A4-2DB7-5E77-18CB6506D4E9}"/>
               </a:ext>
             </a:extLst>
           </p:cNvPr>
@@ -15910,22 +17879,12 @@
         </p:blipFill>
         <p:spPr>
           <a:xfrm>
-            <a:off x="822792" y="1625670"/>
-            <a:ext cx="3383615" cy="4491928"/>
+            <a:off x="853440" y="1583625"/>
+            <a:ext cx="3540899" cy="4732680"/>
           </a:xfrm>
           <a:prstGeom prst="rect">
             <a:avLst/>
           </a:prstGeom>
-          <a:ln>
-            <a:noFill/>
-          </a:ln>
-          <a:effectLst>
-            <a:outerShdw blurRad="190500" algn="tl" rotWithShape="0">
-              <a:srgbClr val="000000">
-                <a:alpha val="70000"/>
-              </a:srgbClr>
-            </a:outerShdw>
-          </a:effectLst>
         </p:spPr>
       </p:pic>
     </p:spTree>
